--- a/Arquitectura de Sistemas Computacionales/Clases/Clase 12 - Pruebas de rendimiento y preparacion final/Presentacion.pptx
+++ b/Arquitectura de Sistemas Computacionales/Clases/Clase 12 - Pruebas de rendimiento y preparacion final/Presentacion.pptx
@@ -3377,7 +3377,7 @@
                 </a:solidFill>
                 <a:latin typeface="Calibri"/>
               </a:rPr>
-              <a:t> · Teoría breve · Taller PI · Quiz/cierre.</a:t>
+              <a:t> · Teoría breve · Taller PI · cierre.</a:t>
             </a:r>
           </a:p>
           <a:p>
@@ -4542,7 +4542,7 @@
                 </a:solidFill>
                 <a:latin typeface="Calibri"/>
               </a:rPr>
-              <a:t> Quiz corto / revisión de evidencias.</a:t>
+              <a:t> Revisión de evidencias del PI.</a:t>
             </a:r>
           </a:p>
           <a:p>

--- a/Arquitectura de Sistemas Computacionales/Clases/Clase 12 - Pruebas de rendimiento y preparacion final/Presentacion.pptx
+++ b/Arquitectura de Sistemas Computacionales/Clases/Clase 12 - Pruebas de rendimiento y preparacion final/Presentacion.pptx
@@ -5872,7 +5872,7 @@
                 </a:solidFill>
                 <a:latin typeface="Calibri"/>
               </a:rPr>
-              <a:t>–   Fecha/canal: Campus Virtual (coordinación del periodo).</a:t>
+              <a:t>–   Fecha/canal: coordinación del periodo.</a:t>
             </a:r>
           </a:p>
         </p:txBody>

--- a/Arquitectura de Sistemas Computacionales/Clases/Clase 12 - Pruebas de rendimiento y preparacion final/Presentacion.pptx
+++ b/Arquitectura de Sistemas Computacionales/Clases/Clase 12 - Pruebas de rendimiento y preparacion final/Presentacion.pptx
@@ -3850,7 +3850,7 @@
                 </a:solidFill>
                 <a:latin typeface="Calibri"/>
               </a:rPr>
-              <a:t>Subir evidencias al paquete CloudLite (Drive/repo) y a ExamLab domingo 23:59.</a:t>
+              <a:t>Subir evidencias al paquete CloudLite (Drive/repo) y a ExamLab (https://examlab.lovable.app/) domingo 23:59.</a:t>
             </a:r>
           </a:p>
         </p:txBody>

--- a/Arquitectura de Sistemas Computacionales/Clases/Clase 12 - Pruebas de rendimiento y preparacion final/Presentacion.pptx
+++ b/Arquitectura de Sistemas Computacionales/Clases/Clase 12 - Pruebas de rendimiento y preparacion final/Presentacion.pptx
@@ -6743,7 +6743,7 @@
                 </a:solidFill>
                 <a:latin typeface="Calibri"/>
               </a:rPr>
-              <a:t> Escriban escenario de carga + 3 métricas objetivo + bottleneck esperado.</a:t>
+              <a:t> Paso 1: describan el escenario de carga del pico real de su dominio con los 6 datos obligatorios (evento del pico, usuarios concurrentes, peticiones por segundo, mezcla de operaciones en porcentajes que sumen 100, duracion de la ventana y volumen de datos de partida), verificando que la mezcla sume exactamente 100 por ciento y que el pico corresponda a una fecha real del calendario de su dominio.</a:t>
             </a:r>
           </a:p>
           <a:p>
@@ -6777,7 +6777,7 @@
                 </a:solidFill>
                 <a:latin typeface="Calibri"/>
               </a:rPr>
-              <a:t> Ensayen pitch 5–8 min (cronómetro); feedback entre equipos.</a:t>
+              <a:t> Paso 2: definan las 3 metricas objetivo en una tabla de 4 columnas con numero, ventana de medicion, forma de medirla y consecuencia de incumplirla, verificando que cada objetivo tenga un numero y una ventana (por ejemplo p95 por debajo de 800 ms en 5 minutos) y que ninguna diga rapido o aceptable sin cifra.</a:t>
             </a:r>
           </a:p>
           <a:p>
@@ -6811,7 +6811,7 @@
                 </a:solidFill>
                 <a:latin typeface="Calibri"/>
               </a:rPr>
-              <a:t> Cierren backlog de Clase 11.</a:t>
+              <a:t> Paso 3: escriban en ExamLab el sequenceDiagram del camino critico con el presupuesto de latencia repartido por salto, verificando que la suma de los tramos sea menor o igual al objetivo de p95 y que la nota final muestre el margen restante en milisegundos.</a:t>
             </a:r>
           </a:p>
           <a:p>
@@ -6845,7 +6845,7 @@
                 </a:solidFill>
                 <a:latin typeface="Calibri"/>
               </a:rPr>
-              <a:t> Dejen paquete casi-final en Drive/repo.</a:t>
+              <a:t> Paso 4: ensayen el pitch de 5 a 8 minutos con cronometro y llenen la tabla de guion de 6 filas con minuto, seccion, quien habla, mensaje clave y evidencia en pantalla, verificando que la suma de los minutos quede entre 5 y 8, que los 3 integrantes hablen y que cada seccion tenga una evidencia concreta que se pueda mostrar.</a:t>
             </a:r>
           </a:p>
           <a:p>
@@ -6879,7 +6879,7 @@
                 </a:solidFill>
                 <a:latin typeface="Calibri"/>
               </a:rPr>
-              <a:t> Entrega de avance domingo 23:59.</a:t>
+              <a:t> Paso 5: cierren los 5 items del backlog de la Clase 11 dejando registro de los residuales, dejen el paquete casi final ordenado en el repositorio o el Drive y suban las 6 preguntas a ExamLab (modulo Talleres) antes del domingo 23:59, verificando que el cuello de botella declarado en el analisis sea el mismo que muestra el diagrama de secuencia.</a:t>
             </a:r>
           </a:p>
         </p:txBody>

--- a/Arquitectura de Sistemas Computacionales/Clases/Clase 12 - Pruebas de rendimiento y preparacion final/Presentacion.pptx
+++ b/Arquitectura de Sistemas Computacionales/Clases/Clase 12 - Pruebas de rendimiento y preparacion final/Presentacion.pptx
@@ -4517,7 +4517,7 @@
                 </a:solidFill>
                 <a:latin typeface="Calibri"/>
               </a:rPr>
-              <a:t> Taller guiado PI (demo en vivo + trabajo de equipo).</a:t>
+              <a:t> Taller guiado PI (demo en vivo + avance individual).</a:t>
             </a:r>
           </a:p>
           <a:p>
@@ -5132,7 +5132,7 @@
                 </a:solidFill>
                 <a:latin typeface="Calibri"/>
               </a:rPr>
-              <a:t>–   Equipos 2–3 · todos deben poder explicar el artefacto.</a:t>
+              <a:t>–   Individual por defecto · el docente puede autorizar equipos de 2–3; la entrega en ExamLab siempre es individual.</a:t>
             </a:r>
           </a:p>
         </p:txBody>
@@ -5636,7 +5636,7 @@
                 </a:solidFill>
                 <a:latin typeface="Calibri"/>
               </a:rPr>
-              <a:t>–   Todos los integrantes hablan.</a:t>
+              <a:t>–   Sustentas tú los 5 bloques; si hay equipo autorizado, hablan todos.</a:t>
             </a:r>
           </a:p>
         </p:txBody>
@@ -6845,7 +6845,7 @@
                 </a:solidFill>
                 <a:latin typeface="Calibri"/>
               </a:rPr>
-              <a:t> Paso 4: ensayen el pitch de 5 a 8 minutos con cronometro y llenen la tabla de guion de 6 filas con minuto, seccion, quien habla, mensaje clave y evidencia en pantalla, verificando que la suma de los minutos quede entre 5 y 8, que los 3 integrantes hablen y que cada seccion tenga una evidencia concreta que se pueda mostrar.</a:t>
+              <a:t> Paso 4: ensayen el pitch de 5 a 8 minutos con cronometro y llenen la tabla de guion de 6 filas con minuto, seccion, quien habla, mensaje clave y evidencia en pantalla, verificando que la suma de los minutos quede entre 5 y 8, que ninguna seccion pase de 2:00 (y, si el docente autorizo equipo, que todos los integrantes hablen) y que cada seccion tenga una evidencia concreta que se pueda mostrar.</a:t>
             </a:r>
           </a:p>
           <a:p>

--- a/Arquitectura de Sistemas Computacionales/Clases/Clase 12 - Pruebas de rendimiento y preparacion final/Presentacion.pptx
+++ b/Arquitectura de Sistemas Computacionales/Clases/Clase 12 - Pruebas de rendimiento y preparacion final/Presentacion.pptx
@@ -3850,7 +3850,7 @@
                 </a:solidFill>
                 <a:latin typeface="Calibri"/>
               </a:rPr>
-              <a:t>Subir evidencias al paquete CloudLite (Drive/repo) y a ExamLab (https://examlab.lovable.app/) domingo 23:59.</a:t>
+              <a:t>Subir evidencias al paquete CloudLite (Drive/repo) y a ExamLab (https://uniaj.examlab.workers.dev/) domingo 23:59.</a:t>
             </a:r>
           </a:p>
         </p:txBody>

--- a/Arquitectura de Sistemas Computacionales/Clases/Clase 12 - Pruebas de rendimiento y preparacion final/Presentacion.pptx
+++ b/Arquitectura de Sistemas Computacionales/Clases/Clase 12 - Pruebas de rendimiento y preparacion final/Presentacion.pptx
@@ -16,6 +16,8 @@
     <p:sldId id="264" r:id="rId15"/>
     <p:sldId id="265" r:id="rId16"/>
     <p:sldId id="266" r:id="rId17"/>
+    <p:sldId id="267" r:id="rId18"/>
+    <p:sldId id="268" r:id="rId19"/>
   </p:sldIdLst>
   <p:sldSz cx="12191695" cy="6858000" type="screen4x3"/>
   <p:notesSz cx="6858000" cy="9144000"/>
@@ -3468,7 +3470,7 @@
         <p:spPr>
           <a:xfrm>
             <a:off x="0" y="0"/>
-            <a:ext cx="12191695" cy="960120"/>
+            <a:ext cx="12191695" cy="1170432"/>
           </a:xfrm>
           <a:prstGeom prst="rect">
             <a:avLst/>
@@ -3510,7 +3512,7 @@
         </p:nvSpPr>
         <p:spPr>
           <a:xfrm>
-            <a:off x="0" y="960120"/>
+            <a:off x="0" y="1170432"/>
             <a:ext cx="12191695" cy="41148"/>
           </a:xfrm>
           <a:prstGeom prst="rect">
@@ -3554,7 +3556,7 @@
         <p:spPr>
           <a:xfrm>
             <a:off x="457200" y="164592"/>
-            <a:ext cx="11277295" cy="502920"/>
+            <a:ext cx="11277295" cy="384048"/>
           </a:xfrm>
           <a:prstGeom prst="rect">
             <a:avLst/>
@@ -3574,20 +3576,225 @@
                 </a:solidFill>
                 <a:latin typeface="Calibri"/>
               </a:rPr>
-              <a:t>Para continuar (PI)</a:t>
-            </a:r>
-          </a:p>
-        </p:txBody>
-      </p:sp>
-      <p:sp>
-        <p:nvSpPr>
-          <p:cNvPr id="5" name="Rounded Rectangle 4"/>
+              <a:t>Del boceto a ExamLab (diagrama)</a:t>
+            </a:r>
+          </a:p>
+        </p:txBody>
+      </p:sp>
+      <p:sp>
+        <p:nvSpPr>
+          <p:cNvPr id="5" name="TextBox 4"/>
+          <p:cNvSpPr txBox="1"/>
+          <p:nvPr/>
+        </p:nvSpPr>
+        <p:spPr>
+          <a:xfrm>
+            <a:off x="457200" y="566928"/>
+            <a:ext cx="11277295" cy="411480"/>
+          </a:xfrm>
+          <a:prstGeom prst="rect">
+            <a:avLst/>
+          </a:prstGeom>
+          <a:noFill/>
+        </p:spPr>
+        <p:txBody>
+          <a:bodyPr wrap="square">
+            <a:spAutoFit/>
+          </a:bodyPr>
+          <a:lstStyle/>
+          <a:p>
+            <a:r>
+              <a:rPr sz="1400" b="0" i="0">
+                <a:solidFill>
+                  <a:srgbClr val="B8D8EE"/>
+                </a:solidFill>
+                <a:latin typeface="Calibri"/>
+              </a:rPr>
+              <a:t>El diagrama se entrega como código Mermaid dentro de ExamLab, no como imagen</a:t>
+            </a:r>
+          </a:p>
+        </p:txBody>
+      </p:sp>
+      <p:sp>
+        <p:nvSpPr>
+          <p:cNvPr id="6" name="Rounded Rectangle 5"/>
           <p:cNvSpPr/>
           <p:nvPr/>
         </p:nvSpPr>
         <p:spPr>
           <a:xfrm>
-            <a:off x="457200" y="1261872"/>
+            <a:off x="457200" y="1659636"/>
+            <a:ext cx="11277295" cy="1051560"/>
+          </a:xfrm>
+          <a:prstGeom prst="roundRect">
+            <a:avLst>
+              <a:gd name="adj" fmla="val 12000"/>
+            </a:avLst>
+          </a:prstGeom>
+          <a:solidFill>
+            <a:srgbClr val="F2F2F2"/>
+          </a:solidFill>
+          <a:ln>
+            <a:noFill/>
+          </a:ln>
+        </p:spPr>
+        <p:style>
+          <a:lnRef idx="1">
+            <a:schemeClr val="accent1"/>
+          </a:lnRef>
+          <a:fillRef idx="3">
+            <a:schemeClr val="accent1"/>
+          </a:fillRef>
+          <a:effectRef idx="2">
+            <a:schemeClr val="accent1"/>
+          </a:effectRef>
+          <a:fontRef idx="minor">
+            <a:schemeClr val="lt1"/>
+          </a:fontRef>
+        </p:style>
+        <p:txBody>
+          <a:bodyPr rtlCol="0" anchor="ctr"/>
+          <a:lstStyle/>
+          <a:p>
+            <a:pPr algn="ctr"/>
+          </a:p>
+        </p:txBody>
+      </p:sp>
+      <p:sp>
+        <p:nvSpPr>
+          <p:cNvPr id="7" name="Rounded Rectangle 6"/>
+          <p:cNvSpPr/>
+          <p:nvPr/>
+        </p:nvSpPr>
+        <p:spPr>
+          <a:xfrm>
+            <a:off x="594360" y="1965960"/>
+            <a:ext cx="438912" cy="438912"/>
+          </a:xfrm>
+          <a:prstGeom prst="roundRect">
+            <a:avLst>
+              <a:gd name="adj" fmla="val 12000"/>
+            </a:avLst>
+          </a:prstGeom>
+          <a:solidFill>
+            <a:srgbClr val="095292"/>
+          </a:solidFill>
+          <a:ln>
+            <a:noFill/>
+          </a:ln>
+        </p:spPr>
+        <p:style>
+          <a:lnRef idx="1">
+            <a:schemeClr val="accent1"/>
+          </a:lnRef>
+          <a:fillRef idx="3">
+            <a:schemeClr val="accent1"/>
+          </a:fillRef>
+          <a:effectRef idx="2">
+            <a:schemeClr val="accent1"/>
+          </a:effectRef>
+          <a:fontRef idx="minor">
+            <a:schemeClr val="lt1"/>
+          </a:fontRef>
+        </p:style>
+        <p:txBody>
+          <a:bodyPr rtlCol="0" anchor="ctr"/>
+          <a:lstStyle/>
+          <a:p>
+            <a:pPr algn="ctr"/>
+          </a:p>
+        </p:txBody>
+      </p:sp>
+      <p:sp>
+        <p:nvSpPr>
+          <p:cNvPr id="8" name="TextBox 7"/>
+          <p:cNvSpPr txBox="1"/>
+          <p:nvPr/>
+        </p:nvSpPr>
+        <p:spPr>
+          <a:xfrm>
+            <a:off x="594360" y="1965960"/>
+            <a:ext cx="438912" cy="438912"/>
+          </a:xfrm>
+          <a:prstGeom prst="rect">
+            <a:avLst/>
+          </a:prstGeom>
+          <a:noFill/>
+        </p:spPr>
+        <p:txBody>
+          <a:bodyPr wrap="square" anchor="ctr"/>
+          <a:lstStyle/>
+          <a:p>
+            <a:pPr algn="ctr"/>
+            <a:r>
+              <a:rPr sz="1600" b="1" i="0">
+                <a:solidFill>
+                  <a:srgbClr val="FFFFFF"/>
+                </a:solidFill>
+                <a:latin typeface="Calibri"/>
+              </a:rPr>
+              <a:t>1</a:t>
+            </a:r>
+          </a:p>
+        </p:txBody>
+      </p:sp>
+      <p:sp>
+        <p:nvSpPr>
+          <p:cNvPr id="9" name="TextBox 8"/>
+          <p:cNvSpPr txBox="1"/>
+          <p:nvPr/>
+        </p:nvSpPr>
+        <p:spPr>
+          <a:xfrm>
+            <a:off x="1188720" y="1751076"/>
+            <a:ext cx="10271455" cy="886968"/>
+          </a:xfrm>
+          <a:prstGeom prst="rect">
+            <a:avLst/>
+          </a:prstGeom>
+          <a:noFill/>
+        </p:spPr>
+        <p:txBody>
+          <a:bodyPr wrap="square" anchor="ctr"/>
+          <a:lstStyle/>
+          <a:p>
+            <a:r>
+              <a:rPr sz="1500" b="1" i="0">
+                <a:solidFill>
+                  <a:srgbClr val="095292"/>
+                </a:solidFill>
+                <a:latin typeface="Calibri"/>
+              </a:rPr>
+              <a:t>Disena visual</a:t>
+            </a:r>
+          </a:p>
+          <a:p>
+            <a:pPr>
+              <a:spcBef>
+                <a:spcPts val="200"/>
+              </a:spcBef>
+            </a:pPr>
+            <a:r>
+              <a:rPr sz="1300" b="0" i="0">
+                <a:solidFill>
+                  <a:srgbClr val="333333"/>
+                </a:solidFill>
+                <a:latin typeface="Calibri"/>
+              </a:rPr>
+              <a:t>Dibuja el diagrama como quieras en Excalidraw o draw.io: es mas rapido arrastrar cajas que escribir codigo, y ahi es donde piensas el modelo.</a:t>
+            </a:r>
+          </a:p>
+        </p:txBody>
+      </p:sp>
+      <p:sp>
+        <p:nvSpPr>
+          <p:cNvPr id="10" name="Rounded Rectangle 9"/>
+          <p:cNvSpPr/>
+          <p:nvPr/>
+        </p:nvSpPr>
+        <p:spPr>
+          <a:xfrm>
+            <a:off x="457200" y="2802636"/>
             <a:ext cx="11277295" cy="1051560"/>
           </a:xfrm>
           <a:prstGeom prst="roundRect">
@@ -3626,20 +3833,22 @@
       </p:sp>
       <p:sp>
         <p:nvSpPr>
-          <p:cNvPr id="6" name="Rectangle 5"/>
+          <p:cNvPr id="11" name="Rounded Rectangle 10"/>
           <p:cNvSpPr/>
           <p:nvPr/>
         </p:nvSpPr>
         <p:spPr>
           <a:xfrm>
-            <a:off x="457200" y="1261872"/>
-            <a:ext cx="128016" cy="1051560"/>
-          </a:xfrm>
-          <a:prstGeom prst="rect">
-            <a:avLst/>
+            <a:off x="594360" y="3108960"/>
+            <a:ext cx="438912" cy="438912"/>
+          </a:xfrm>
+          <a:prstGeom prst="roundRect">
+            <a:avLst>
+              <a:gd name="adj" fmla="val 12000"/>
+            </a:avLst>
           </a:prstGeom>
           <a:solidFill>
-            <a:srgbClr val="269CCB"/>
+            <a:srgbClr val="095292"/>
           </a:solidFill>
           <a:ln>
             <a:noFill/>
@@ -3669,14 +3878,14 @@
       </p:sp>
       <p:sp>
         <p:nvSpPr>
-          <p:cNvPr id="7" name="TextBox 6"/>
+          <p:cNvPr id="12" name="TextBox 11"/>
           <p:cNvSpPr txBox="1"/>
           <p:nvPr/>
         </p:nvSpPr>
         <p:spPr>
           <a:xfrm>
-            <a:off x="777240" y="1399031"/>
-            <a:ext cx="10774375" cy="822959"/>
+            <a:off x="594360" y="3108960"/>
+            <a:ext cx="438912" cy="438912"/>
           </a:xfrm>
           <a:prstGeom prst="rect">
             <a:avLst/>
@@ -3684,48 +3893,79 @@
           <a:noFill/>
         </p:spPr>
         <p:txBody>
-          <a:bodyPr wrap="square">
-            <a:spAutoFit/>
-          </a:bodyPr>
-          <a:lstStyle/>
-          <a:p>
-            <a:r>
-              <a:rPr sz="1200" b="1" i="0">
-                <a:solidFill>
-                  <a:srgbClr val="269CCB"/>
-                </a:solidFill>
-                <a:latin typeface="Calibri"/>
-              </a:rPr>
-              <a:t>Info</a:t>
+          <a:bodyPr wrap="square" anchor="ctr"/>
+          <a:lstStyle/>
+          <a:p>
+            <a:pPr algn="ctr"/>
+            <a:r>
+              <a:rPr sz="1600" b="1" i="0">
+                <a:solidFill>
+                  <a:srgbClr val="FFFFFF"/>
+                </a:solidFill>
+                <a:latin typeface="Calibri"/>
+              </a:rPr>
+              <a:t>2</a:t>
+            </a:r>
+          </a:p>
+        </p:txBody>
+      </p:sp>
+      <p:sp>
+        <p:nvSpPr>
+          <p:cNvPr id="13" name="TextBox 12"/>
+          <p:cNvSpPr txBox="1"/>
+          <p:nvPr/>
+        </p:nvSpPr>
+        <p:spPr>
+          <a:xfrm>
+            <a:off x="1188720" y="2894076"/>
+            <a:ext cx="10271455" cy="886968"/>
+          </a:xfrm>
+          <a:prstGeom prst="rect">
+            <a:avLst/>
+          </a:prstGeom>
+          <a:noFill/>
+        </p:spPr>
+        <p:txBody>
+          <a:bodyPr wrap="square" anchor="ctr"/>
+          <a:lstStyle/>
+          <a:p>
+            <a:r>
+              <a:rPr sz="1500" b="1" i="0">
+                <a:solidFill>
+                  <a:srgbClr val="095292"/>
+                </a:solidFill>
+                <a:latin typeface="Calibri"/>
+              </a:rPr>
+              <a:t>Traduce con IA</a:t>
             </a:r>
           </a:p>
           <a:p>
             <a:pPr>
               <a:spcBef>
-                <a:spcPts val="400"/>
+                <a:spcPts val="200"/>
               </a:spcBef>
             </a:pPr>
             <a:r>
-              <a:rPr sz="1400" b="0" i="0">
+              <a:rPr sz="1300" b="0" i="0">
                 <a:solidFill>
                   <a:srgbClr val="333333"/>
                 </a:solidFill>
                 <a:latin typeface="Calibri"/>
               </a:rPr>
-              <a:t>Entregable: Sección Rendimiento + guion de pitch + paquete casi-final</a:t>
-            </a:r>
-          </a:p>
-        </p:txBody>
-      </p:sp>
-      <p:sp>
-        <p:nvSpPr>
-          <p:cNvPr id="8" name="Rounded Rectangle 7"/>
+              <a:t>Copia o describe tu boceto a una IA y pidele el codigo Mermaid: «convierte este diagrama a Mermaid usando sequenceDiagram». Revisa el resultado: la IA acierta la sintaxis, no tu modelo.</a:t>
+            </a:r>
+          </a:p>
+        </p:txBody>
+      </p:sp>
+      <p:sp>
+        <p:nvSpPr>
+          <p:cNvPr id="14" name="Rounded Rectangle 13"/>
           <p:cNvSpPr/>
           <p:nvPr/>
         </p:nvSpPr>
         <p:spPr>
           <a:xfrm>
-            <a:off x="457200" y="2478024"/>
+            <a:off x="457200" y="3945636"/>
             <a:ext cx="11277295" cy="1051560"/>
           </a:xfrm>
           <a:prstGeom prst="roundRect">
@@ -3734,7 +3974,7 @@
             </a:avLst>
           </a:prstGeom>
           <a:solidFill>
-            <a:srgbClr val="FFF8E1"/>
+            <a:srgbClr val="F2F2F2"/>
           </a:solidFill>
           <a:ln>
             <a:noFill/>
@@ -3764,20 +4004,22 @@
       </p:sp>
       <p:sp>
         <p:nvSpPr>
-          <p:cNvPr id="9" name="Rectangle 8"/>
+          <p:cNvPr id="15" name="Rounded Rectangle 14"/>
           <p:cNvSpPr/>
           <p:nvPr/>
         </p:nvSpPr>
         <p:spPr>
           <a:xfrm>
-            <a:off x="457200" y="2478024"/>
-            <a:ext cx="128016" cy="1051560"/>
-          </a:xfrm>
-          <a:prstGeom prst="rect">
-            <a:avLst/>
+            <a:off x="594360" y="4251960"/>
+            <a:ext cx="438912" cy="438912"/>
+          </a:xfrm>
+          <a:prstGeom prst="roundRect">
+            <a:avLst>
+              <a:gd name="adj" fmla="val 12000"/>
+            </a:avLst>
           </a:prstGeom>
           <a:solidFill>
-            <a:srgbClr val="FFD000"/>
+            <a:srgbClr val="095292"/>
           </a:solidFill>
           <a:ln>
             <a:noFill/>
@@ -3807,14 +4049,14 @@
       </p:sp>
       <p:sp>
         <p:nvSpPr>
-          <p:cNvPr id="10" name="TextBox 9"/>
+          <p:cNvPr id="16" name="TextBox 15"/>
           <p:cNvSpPr txBox="1"/>
           <p:nvPr/>
         </p:nvSpPr>
         <p:spPr>
           <a:xfrm>
-            <a:off x="777240" y="2615184"/>
-            <a:ext cx="10774375" cy="822959"/>
+            <a:off x="594360" y="4251960"/>
+            <a:ext cx="438912" cy="438912"/>
           </a:xfrm>
           <a:prstGeom prst="rect">
             <a:avLst/>
@@ -3822,48 +4064,79 @@
           <a:noFill/>
         </p:spPr>
         <p:txBody>
-          <a:bodyPr wrap="square">
-            <a:spAutoFit/>
-          </a:bodyPr>
-          <a:lstStyle/>
-          <a:p>
-            <a:r>
-              <a:rPr sz="1200" b="1" i="0">
-                <a:solidFill>
-                  <a:srgbClr val="FFD000"/>
-                </a:solidFill>
-                <a:latin typeface="Calibri"/>
-              </a:rPr>
-              <a:t>Aclaración</a:t>
+          <a:bodyPr wrap="square" anchor="ctr"/>
+          <a:lstStyle/>
+          <a:p>
+            <a:pPr algn="ctr"/>
+            <a:r>
+              <a:rPr sz="1600" b="1" i="0">
+                <a:solidFill>
+                  <a:srgbClr val="FFFFFF"/>
+                </a:solidFill>
+                <a:latin typeface="Calibri"/>
+              </a:rPr>
+              <a:t>3</a:t>
+            </a:r>
+          </a:p>
+        </p:txBody>
+      </p:sp>
+      <p:sp>
+        <p:nvSpPr>
+          <p:cNvPr id="17" name="TextBox 16"/>
+          <p:cNvSpPr txBox="1"/>
+          <p:nvPr/>
+        </p:nvSpPr>
+        <p:spPr>
+          <a:xfrm>
+            <a:off x="1188720" y="4037076"/>
+            <a:ext cx="10271455" cy="886968"/>
+          </a:xfrm>
+          <a:prstGeom prst="rect">
+            <a:avLst/>
+          </a:prstGeom>
+          <a:noFill/>
+        </p:spPr>
+        <p:txBody>
+          <a:bodyPr wrap="square" anchor="ctr"/>
+          <a:lstStyle/>
+          <a:p>
+            <a:r>
+              <a:rPr sz="1500" b="1" i="0">
+                <a:solidFill>
+                  <a:srgbClr val="095292"/>
+                </a:solidFill>
+                <a:latin typeface="Calibri"/>
+              </a:rPr>
+              <a:t>Pega y renderiza en ExamLab</a:t>
             </a:r>
           </a:p>
           <a:p>
             <a:pPr>
               <a:spcBef>
-                <a:spcPts val="400"/>
+                <a:spcPts val="200"/>
               </a:spcBef>
             </a:pPr>
             <a:r>
-              <a:rPr sz="1400" b="0" i="0">
+              <a:rPr sz="1300" b="0" i="0">
                 <a:solidFill>
                   <a:srgbClr val="333333"/>
                 </a:solidFill>
                 <a:latin typeface="Calibri"/>
               </a:rPr>
-              <a:t>Subir evidencias al paquete CloudLite (Drive/repo) y a ExamLab (https://uniaj.examlab.workers.dev/) domingo 23:59.</a:t>
-            </a:r>
-          </a:p>
-        </p:txBody>
-      </p:sp>
-      <p:sp>
-        <p:nvSpPr>
-          <p:cNvPr id="11" name="Rounded Rectangle 10"/>
+              <a:t>Pega ese codigo en la caja de texto de la pregunta y mira como lo dibuja la plataforma. Si no renderiza, corrige ahi mismo: lo que se califica es el diagrama renderizado dentro de ExamLab.</a:t>
+            </a:r>
+          </a:p>
+        </p:txBody>
+      </p:sp>
+      <p:sp>
+        <p:nvSpPr>
+          <p:cNvPr id="18" name="Rounded Rectangle 17"/>
           <p:cNvSpPr/>
           <p:nvPr/>
         </p:nvSpPr>
         <p:spPr>
           <a:xfrm>
-            <a:off x="457200" y="3694176"/>
+            <a:off x="457200" y="5088636"/>
             <a:ext cx="11277295" cy="1051560"/>
           </a:xfrm>
           <a:prstGeom prst="roundRect">
@@ -3872,7 +4145,7 @@
             </a:avLst>
           </a:prstGeom>
           <a:solidFill>
-            <a:srgbClr val="FBE4E4"/>
+            <a:srgbClr val="E8F4FA"/>
           </a:solidFill>
           <a:ln>
             <a:noFill/>
@@ -3902,20 +4175,22 @@
       </p:sp>
       <p:sp>
         <p:nvSpPr>
-          <p:cNvPr id="12" name="Rectangle 11"/>
+          <p:cNvPr id="19" name="Rounded Rectangle 18"/>
           <p:cNvSpPr/>
           <p:nvPr/>
         </p:nvSpPr>
         <p:spPr>
           <a:xfrm>
-            <a:off x="457200" y="3694176"/>
-            <a:ext cx="128016" cy="1051560"/>
-          </a:xfrm>
-          <a:prstGeom prst="rect">
-            <a:avLst/>
+            <a:off x="594360" y="5394960"/>
+            <a:ext cx="438912" cy="438912"/>
+          </a:xfrm>
+          <a:prstGeom prst="roundRect">
+            <a:avLst>
+              <a:gd name="adj" fmla="val 12000"/>
+            </a:avLst>
           </a:prstGeom>
           <a:solidFill>
-            <a:srgbClr val="A02030"/>
+            <a:srgbClr val="095292"/>
           </a:solidFill>
           <a:ln>
             <a:noFill/>
@@ -3945,14 +4220,14 @@
       </p:sp>
       <p:sp>
         <p:nvSpPr>
-          <p:cNvPr id="13" name="TextBox 12"/>
+          <p:cNvPr id="20" name="TextBox 19"/>
           <p:cNvSpPr txBox="1"/>
           <p:nvPr/>
         </p:nvSpPr>
         <p:spPr>
           <a:xfrm>
-            <a:off x="777240" y="3831336"/>
-            <a:ext cx="10774375" cy="822959"/>
+            <a:off x="594360" y="5394960"/>
+            <a:ext cx="438912" cy="438912"/>
           </a:xfrm>
           <a:prstGeom prst="rect">
             <a:avLst/>
@@ -3960,42 +4235,73 @@
           <a:noFill/>
         </p:spPr>
         <p:txBody>
-          <a:bodyPr wrap="square">
-            <a:spAutoFit/>
-          </a:bodyPr>
-          <a:lstStyle/>
-          <a:p>
-            <a:r>
-              <a:rPr sz="1200" b="1" i="0">
-                <a:solidFill>
-                  <a:srgbClr val="A02030"/>
-                </a:solidFill>
-                <a:latin typeface="Calibri"/>
-              </a:rPr>
-              <a:t>Atención</a:t>
+          <a:bodyPr wrap="square" anchor="ctr"/>
+          <a:lstStyle/>
+          <a:p>
+            <a:pPr algn="ctr"/>
+            <a:r>
+              <a:rPr sz="1600" b="1" i="0">
+                <a:solidFill>
+                  <a:srgbClr val="FFFFFF"/>
+                </a:solidFill>
+                <a:latin typeface="Calibri"/>
+              </a:rPr>
+              <a:t>4</a:t>
+            </a:r>
+          </a:p>
+        </p:txBody>
+      </p:sp>
+      <p:sp>
+        <p:nvSpPr>
+          <p:cNvPr id="21" name="TextBox 20"/>
+          <p:cNvSpPr txBox="1"/>
+          <p:nvPr/>
+        </p:nvSpPr>
+        <p:spPr>
+          <a:xfrm>
+            <a:off x="1188720" y="5180076"/>
+            <a:ext cx="10271455" cy="886968"/>
+          </a:xfrm>
+          <a:prstGeom prst="rect">
+            <a:avLst/>
+          </a:prstGeom>
+          <a:noFill/>
+        </p:spPr>
+        <p:txBody>
+          <a:bodyPr wrap="square" anchor="ctr"/>
+          <a:lstStyle/>
+          <a:p>
+            <a:r>
+              <a:rPr sz="1500" b="1" i="0">
+                <a:solidFill>
+                  <a:srgbClr val="095292"/>
+                </a:solidFill>
+                <a:latin typeface="Calibri"/>
+              </a:rPr>
+              <a:t>Guarda el PNG para tu PI</a:t>
             </a:r>
           </a:p>
           <a:p>
             <a:pPr>
               <a:spcBef>
-                <a:spcPts val="400"/>
+                <a:spcPts val="200"/>
               </a:spcBef>
             </a:pPr>
             <a:r>
-              <a:rPr sz="1400" b="0" i="0">
+              <a:rPr sz="1300" b="0" i="0">
                 <a:solidFill>
                   <a:srgbClr val="333333"/>
                 </a:solidFill>
                 <a:latin typeface="Calibri"/>
               </a:rPr>
-              <a:t>Sin cloud de pago ni instalaciones obligatorias de hipervisores/Docker Desktop.</a:t>
-            </a:r>
-          </a:p>
-        </p:txBody>
-      </p:sp>
-      <p:sp>
-        <p:nvSpPr>
-          <p:cNvPr id="14" name="TextBox 13"/>
+              <a:t>Exporta tambien la imagen a la carpeta de tu Proyecto Integrador. Esa copia es para tu informe; no reemplaza la respuesta en la plataforma.</a:t>
+            </a:r>
+          </a:p>
+        </p:txBody>
+      </p:sp>
+      <p:sp>
+        <p:nvSpPr>
+          <p:cNvPr id="22" name="TextBox 21"/>
           <p:cNvSpPr txBox="1"/>
           <p:nvPr/>
         </p:nvSpPr>
@@ -4063,6 +4369,966 @@
         <p:spPr>
           <a:xfrm>
             <a:off x="0" y="0"/>
+            <a:ext cx="12191695" cy="960120"/>
+          </a:xfrm>
+          <a:prstGeom prst="rect">
+            <a:avLst/>
+          </a:prstGeom>
+          <a:solidFill>
+            <a:srgbClr val="095292"/>
+          </a:solidFill>
+          <a:ln>
+            <a:noFill/>
+          </a:ln>
+        </p:spPr>
+        <p:style>
+          <a:lnRef idx="1">
+            <a:schemeClr val="accent1"/>
+          </a:lnRef>
+          <a:fillRef idx="3">
+            <a:schemeClr val="accent1"/>
+          </a:fillRef>
+          <a:effectRef idx="2">
+            <a:schemeClr val="accent1"/>
+          </a:effectRef>
+          <a:fontRef idx="minor">
+            <a:schemeClr val="lt1"/>
+          </a:fontRef>
+        </p:style>
+        <p:txBody>
+          <a:bodyPr rtlCol="0" anchor="ctr"/>
+          <a:lstStyle/>
+          <a:p>
+            <a:pPr algn="ctr"/>
+          </a:p>
+        </p:txBody>
+      </p:sp>
+      <p:sp>
+        <p:nvSpPr>
+          <p:cNvPr id="3" name="Rectangle 2"/>
+          <p:cNvSpPr/>
+          <p:nvPr/>
+        </p:nvSpPr>
+        <p:spPr>
+          <a:xfrm>
+            <a:off x="0" y="960120"/>
+            <a:ext cx="12191695" cy="41148"/>
+          </a:xfrm>
+          <a:prstGeom prst="rect">
+            <a:avLst/>
+          </a:prstGeom>
+          <a:solidFill>
+            <a:srgbClr val="FFD000"/>
+          </a:solidFill>
+          <a:ln>
+            <a:noFill/>
+          </a:ln>
+        </p:spPr>
+        <p:style>
+          <a:lnRef idx="1">
+            <a:schemeClr val="accent1"/>
+          </a:lnRef>
+          <a:fillRef idx="3">
+            <a:schemeClr val="accent1"/>
+          </a:fillRef>
+          <a:effectRef idx="2">
+            <a:schemeClr val="accent1"/>
+          </a:effectRef>
+          <a:fontRef idx="minor">
+            <a:schemeClr val="lt1"/>
+          </a:fontRef>
+        </p:style>
+        <p:txBody>
+          <a:bodyPr rtlCol="0" anchor="ctr"/>
+          <a:lstStyle/>
+          <a:p>
+            <a:pPr algn="ctr"/>
+          </a:p>
+        </p:txBody>
+      </p:sp>
+      <p:sp>
+        <p:nvSpPr>
+          <p:cNvPr id="4" name="TextBox 3"/>
+          <p:cNvSpPr txBox="1"/>
+          <p:nvPr/>
+        </p:nvSpPr>
+        <p:spPr>
+          <a:xfrm>
+            <a:off x="457200" y="164592"/>
+            <a:ext cx="11277295" cy="502920"/>
+          </a:xfrm>
+          <a:prstGeom prst="rect">
+            <a:avLst/>
+          </a:prstGeom>
+          <a:noFill/>
+        </p:spPr>
+        <p:txBody>
+          <a:bodyPr wrap="square">
+            <a:spAutoFit/>
+          </a:bodyPr>
+          <a:lstStyle/>
+          <a:p>
+            <a:r>
+              <a:rPr sz="2600" b="1" i="0">
+                <a:solidFill>
+                  <a:srgbClr val="FFFFFF"/>
+                </a:solidFill>
+                <a:latin typeface="Calibri"/>
+              </a:rPr>
+              <a:t>Taller PI (paso a paso)</a:t>
+            </a:r>
+          </a:p>
+        </p:txBody>
+      </p:sp>
+      <p:sp>
+        <p:nvSpPr>
+          <p:cNvPr id="5" name="TextBox 4"/>
+          <p:cNvSpPr txBox="1"/>
+          <p:nvPr/>
+        </p:nvSpPr>
+        <p:spPr>
+          <a:xfrm>
+            <a:off x="457200" y="1170432"/>
+            <a:ext cx="11277295" cy="5230368"/>
+          </a:xfrm>
+          <a:prstGeom prst="rect">
+            <a:avLst/>
+          </a:prstGeom>
+          <a:noFill/>
+        </p:spPr>
+        <p:txBody>
+          <a:bodyPr wrap="square">
+            <a:spAutoFit/>
+          </a:bodyPr>
+          <a:lstStyle/>
+          <a:p>
+            <a:pPr>
+              <a:spcAft>
+                <a:spcPts val="800"/>
+              </a:spcAft>
+            </a:pPr>
+            <a:r>
+              <a:rPr sz="1600" b="1" i="0">
+                <a:solidFill>
+                  <a:srgbClr val="333333"/>
+                </a:solidFill>
+                <a:latin typeface="Calibri"/>
+              </a:rPr>
+              <a:t>1.</a:t>
+            </a:r>
+            <a:r>
+              <a:rPr sz="1600" b="0" i="0">
+                <a:solidFill>
+                  <a:srgbClr val="333333"/>
+                </a:solidFill>
+                <a:latin typeface="Calibri"/>
+              </a:rPr>
+              <a:t> Paso 1: describan el escenario de carga del pico real de su dominio con los 6 datos obligatorios (evento del pico, usuarios concurrentes, peticiones por segundo, mezcla de operaciones en porcentajes que sumen 100, duracion de la ventana y volumen de datos de partida), verificando que la mezcla sume exactamente 100 por ciento y que el pico corresponda a una fecha real del calendario de su dominio.</a:t>
+            </a:r>
+          </a:p>
+          <a:p>
+            <a:pPr>
+              <a:spcAft>
+                <a:spcPts val="800"/>
+              </a:spcAft>
+            </a:pPr>
+            <a:r>
+              <a:rPr sz="1600" b="0" i="0">
+                <a:solidFill>
+                  <a:srgbClr val="333333"/>
+                </a:solidFill>
+                <a:latin typeface="Calibri"/>
+              </a:rPr>
+              <a:t>–   </a:t>
+            </a:r>
+            <a:r>
+              <a:rPr sz="1600" b="1" i="0">
+                <a:solidFill>
+                  <a:srgbClr val="333333"/>
+                </a:solidFill>
+                <a:latin typeface="Calibri"/>
+              </a:rPr>
+              <a:t>2.</a:t>
+            </a:r>
+            <a:r>
+              <a:rPr sz="1600" b="0" i="0">
+                <a:solidFill>
+                  <a:srgbClr val="333333"/>
+                </a:solidFill>
+                <a:latin typeface="Calibri"/>
+              </a:rPr>
+              <a:t> Paso 2: definan las 3 metricas objetivo en una tabla de 4 columnas con numero, ventana de medicion, forma de medirla y consecuencia de incumplirla, verificando que cada objetivo tenga un numero y una ventana (por ejemplo p95 por debajo de 800 ms en 5 minutos) y que ninguna diga rapido o aceptable sin cifra.</a:t>
+            </a:r>
+          </a:p>
+          <a:p>
+            <a:pPr>
+              <a:spcAft>
+                <a:spcPts val="800"/>
+              </a:spcAft>
+            </a:pPr>
+            <a:r>
+              <a:rPr sz="1600" b="0" i="0">
+                <a:solidFill>
+                  <a:srgbClr val="333333"/>
+                </a:solidFill>
+                <a:latin typeface="Calibri"/>
+              </a:rPr>
+              <a:t>–   </a:t>
+            </a:r>
+            <a:r>
+              <a:rPr sz="1600" b="1" i="0">
+                <a:solidFill>
+                  <a:srgbClr val="333333"/>
+                </a:solidFill>
+                <a:latin typeface="Calibri"/>
+              </a:rPr>
+              <a:t>3.</a:t>
+            </a:r>
+            <a:r>
+              <a:rPr sz="1600" b="0" i="0">
+                <a:solidFill>
+                  <a:srgbClr val="333333"/>
+                </a:solidFill>
+                <a:latin typeface="Calibri"/>
+              </a:rPr>
+              <a:t> Paso 3: escriban en ExamLab el sequenceDiagram del camino critico con el presupuesto de latencia repartido por salto, verificando que la suma de los tramos sea menor o igual al objetivo de p95 y que la nota final muestre el margen restante en milisegundos.</a:t>
+            </a:r>
+          </a:p>
+          <a:p>
+            <a:pPr>
+              <a:spcAft>
+                <a:spcPts val="800"/>
+              </a:spcAft>
+            </a:pPr>
+            <a:r>
+              <a:rPr sz="1600" b="0" i="0">
+                <a:solidFill>
+                  <a:srgbClr val="333333"/>
+                </a:solidFill>
+                <a:latin typeface="Calibri"/>
+              </a:rPr>
+              <a:t>–   </a:t>
+            </a:r>
+            <a:r>
+              <a:rPr sz="1600" b="1" i="0">
+                <a:solidFill>
+                  <a:srgbClr val="333333"/>
+                </a:solidFill>
+                <a:latin typeface="Calibri"/>
+              </a:rPr>
+              <a:t>4.</a:t>
+            </a:r>
+            <a:r>
+              <a:rPr sz="1600" b="0" i="0">
+                <a:solidFill>
+                  <a:srgbClr val="333333"/>
+                </a:solidFill>
+                <a:latin typeface="Calibri"/>
+              </a:rPr>
+              <a:t> Paso 4: ensayen el pitch de 5 a 8 minutos con cronometro y llenen la tabla de guion de 6 filas con minuto, seccion, quien habla, mensaje clave y evidencia en pantalla, verificando que la suma de los minutos quede entre 5 y 8, que ninguna seccion pase de 2:00 (y, si el docente autorizo equipo, que todos los integrantes hablen) y que cada seccion tenga una evidencia concreta que se pueda mostrar.</a:t>
+            </a:r>
+          </a:p>
+          <a:p>
+            <a:pPr>
+              <a:spcAft>
+                <a:spcPts val="800"/>
+              </a:spcAft>
+            </a:pPr>
+            <a:r>
+              <a:rPr sz="1600" b="0" i="0">
+                <a:solidFill>
+                  <a:srgbClr val="333333"/>
+                </a:solidFill>
+                <a:latin typeface="Calibri"/>
+              </a:rPr>
+              <a:t>–   </a:t>
+            </a:r>
+            <a:r>
+              <a:rPr sz="1600" b="1" i="0">
+                <a:solidFill>
+                  <a:srgbClr val="333333"/>
+                </a:solidFill>
+                <a:latin typeface="Calibri"/>
+              </a:rPr>
+              <a:t>5.</a:t>
+            </a:r>
+            <a:r>
+              <a:rPr sz="1600" b="0" i="0">
+                <a:solidFill>
+                  <a:srgbClr val="333333"/>
+                </a:solidFill>
+                <a:latin typeface="Calibri"/>
+              </a:rPr>
+              <a:t> Paso 5: cierren los 5 items del backlog de la Clase 11 dejando registro de los residuales, dejen el paquete casi final ordenado en el repositorio o el Drive y suban las 6 preguntas a ExamLab (modulo Talleres) antes del domingo 23:59, verificando que el cuello de botella declarado en el analisis sea el mismo que muestra el diagrama de secuencia.</a:t>
+            </a:r>
+          </a:p>
+        </p:txBody>
+      </p:sp>
+      <p:sp>
+        <p:nvSpPr>
+          <p:cNvPr id="6" name="TextBox 5"/>
+          <p:cNvSpPr txBox="1"/>
+          <p:nvPr/>
+        </p:nvSpPr>
+        <p:spPr>
+          <a:xfrm>
+            <a:off x="11185855" y="6473952"/>
+            <a:ext cx="640080" cy="274320"/>
+          </a:xfrm>
+          <a:prstGeom prst="rect">
+            <a:avLst/>
+          </a:prstGeom>
+          <a:noFill/>
+        </p:spPr>
+        <p:txBody>
+          <a:bodyPr wrap="square">
+            <a:spAutoFit/>
+          </a:bodyPr>
+          <a:lstStyle/>
+          <a:p>
+            <a:pPr algn="r"/>
+            <a:r>
+              <a:rPr sz="1100" b="0" i="0">
+                <a:solidFill>
+                  <a:srgbClr val="666666"/>
+                </a:solidFill>
+                <a:latin typeface="Calibri"/>
+              </a:rPr>
+              <a:t>11</a:t>
+            </a:r>
+          </a:p>
+        </p:txBody>
+      </p:sp>
+    </p:spTree>
+  </p:cSld>
+  <p:clrMapOvr>
+    <a:masterClrMapping/>
+  </p:clrMapOvr>
+</p:sld>
+</file>
+
+<file path=ppt/slides/slide12.xml><?xml version="1.0" encoding="utf-8"?>
+<p:sld xmlns:a="http://schemas.openxmlformats.org/drawingml/2006/main" xmlns:p="http://schemas.openxmlformats.org/presentationml/2006/main" xmlns:r="http://schemas.openxmlformats.org/officeDocument/2006/relationships">
+  <p:cSld>
+    <p:bg>
+      <p:bgPr>
+        <a:solidFill>
+          <a:srgbClr val="FFFFFF"/>
+        </a:solidFill>
+        <a:effectLst/>
+      </p:bgPr>
+    </p:bg>
+    <p:spTree>
+      <p:nvGrpSpPr>
+        <p:cNvPr id="1" name=""/>
+        <p:cNvGrpSpPr/>
+        <p:nvPr/>
+      </p:nvGrpSpPr>
+      <p:grpSpPr/>
+      <p:sp>
+        <p:nvSpPr>
+          <p:cNvPr id="2" name="Rectangle 1"/>
+          <p:cNvSpPr/>
+          <p:nvPr/>
+        </p:nvSpPr>
+        <p:spPr>
+          <a:xfrm>
+            <a:off x="0" y="0"/>
+            <a:ext cx="12191695" cy="960120"/>
+          </a:xfrm>
+          <a:prstGeom prst="rect">
+            <a:avLst/>
+          </a:prstGeom>
+          <a:solidFill>
+            <a:srgbClr val="095292"/>
+          </a:solidFill>
+          <a:ln>
+            <a:noFill/>
+          </a:ln>
+        </p:spPr>
+        <p:style>
+          <a:lnRef idx="1">
+            <a:schemeClr val="accent1"/>
+          </a:lnRef>
+          <a:fillRef idx="3">
+            <a:schemeClr val="accent1"/>
+          </a:fillRef>
+          <a:effectRef idx="2">
+            <a:schemeClr val="accent1"/>
+          </a:effectRef>
+          <a:fontRef idx="minor">
+            <a:schemeClr val="lt1"/>
+          </a:fontRef>
+        </p:style>
+        <p:txBody>
+          <a:bodyPr rtlCol="0" anchor="ctr"/>
+          <a:lstStyle/>
+          <a:p>
+            <a:pPr algn="ctr"/>
+          </a:p>
+        </p:txBody>
+      </p:sp>
+      <p:sp>
+        <p:nvSpPr>
+          <p:cNvPr id="3" name="Rectangle 2"/>
+          <p:cNvSpPr/>
+          <p:nvPr/>
+        </p:nvSpPr>
+        <p:spPr>
+          <a:xfrm>
+            <a:off x="0" y="960120"/>
+            <a:ext cx="12191695" cy="41148"/>
+          </a:xfrm>
+          <a:prstGeom prst="rect">
+            <a:avLst/>
+          </a:prstGeom>
+          <a:solidFill>
+            <a:srgbClr val="FFD000"/>
+          </a:solidFill>
+          <a:ln>
+            <a:noFill/>
+          </a:ln>
+        </p:spPr>
+        <p:style>
+          <a:lnRef idx="1">
+            <a:schemeClr val="accent1"/>
+          </a:lnRef>
+          <a:fillRef idx="3">
+            <a:schemeClr val="accent1"/>
+          </a:fillRef>
+          <a:effectRef idx="2">
+            <a:schemeClr val="accent1"/>
+          </a:effectRef>
+          <a:fontRef idx="minor">
+            <a:schemeClr val="lt1"/>
+          </a:fontRef>
+        </p:style>
+        <p:txBody>
+          <a:bodyPr rtlCol="0" anchor="ctr"/>
+          <a:lstStyle/>
+          <a:p>
+            <a:pPr algn="ctr"/>
+          </a:p>
+        </p:txBody>
+      </p:sp>
+      <p:sp>
+        <p:nvSpPr>
+          <p:cNvPr id="4" name="TextBox 3"/>
+          <p:cNvSpPr txBox="1"/>
+          <p:nvPr/>
+        </p:nvSpPr>
+        <p:spPr>
+          <a:xfrm>
+            <a:off x="457200" y="164592"/>
+            <a:ext cx="11277295" cy="502920"/>
+          </a:xfrm>
+          <a:prstGeom prst="rect">
+            <a:avLst/>
+          </a:prstGeom>
+          <a:noFill/>
+        </p:spPr>
+        <p:txBody>
+          <a:bodyPr wrap="square">
+            <a:spAutoFit/>
+          </a:bodyPr>
+          <a:lstStyle/>
+          <a:p>
+            <a:r>
+              <a:rPr sz="2600" b="1" i="0">
+                <a:solidFill>
+                  <a:srgbClr val="FFFFFF"/>
+                </a:solidFill>
+                <a:latin typeface="Calibri"/>
+              </a:rPr>
+              <a:t>Para continuar (PI)</a:t>
+            </a:r>
+          </a:p>
+        </p:txBody>
+      </p:sp>
+      <p:sp>
+        <p:nvSpPr>
+          <p:cNvPr id="5" name="Rounded Rectangle 4"/>
+          <p:cNvSpPr/>
+          <p:nvPr/>
+        </p:nvSpPr>
+        <p:spPr>
+          <a:xfrm>
+            <a:off x="457200" y="1261872"/>
+            <a:ext cx="11277295" cy="1051560"/>
+          </a:xfrm>
+          <a:prstGeom prst="roundRect">
+            <a:avLst>
+              <a:gd name="adj" fmla="val 12000"/>
+            </a:avLst>
+          </a:prstGeom>
+          <a:solidFill>
+            <a:srgbClr val="E8F4FA"/>
+          </a:solidFill>
+          <a:ln>
+            <a:noFill/>
+          </a:ln>
+        </p:spPr>
+        <p:style>
+          <a:lnRef idx="1">
+            <a:schemeClr val="accent1"/>
+          </a:lnRef>
+          <a:fillRef idx="3">
+            <a:schemeClr val="accent1"/>
+          </a:fillRef>
+          <a:effectRef idx="2">
+            <a:schemeClr val="accent1"/>
+          </a:effectRef>
+          <a:fontRef idx="minor">
+            <a:schemeClr val="lt1"/>
+          </a:fontRef>
+        </p:style>
+        <p:txBody>
+          <a:bodyPr rtlCol="0" anchor="ctr"/>
+          <a:lstStyle/>
+          <a:p>
+            <a:pPr algn="ctr"/>
+          </a:p>
+        </p:txBody>
+      </p:sp>
+      <p:sp>
+        <p:nvSpPr>
+          <p:cNvPr id="6" name="Rectangle 5"/>
+          <p:cNvSpPr/>
+          <p:nvPr/>
+        </p:nvSpPr>
+        <p:spPr>
+          <a:xfrm>
+            <a:off x="457200" y="1261872"/>
+            <a:ext cx="128016" cy="1051560"/>
+          </a:xfrm>
+          <a:prstGeom prst="rect">
+            <a:avLst/>
+          </a:prstGeom>
+          <a:solidFill>
+            <a:srgbClr val="269CCB"/>
+          </a:solidFill>
+          <a:ln>
+            <a:noFill/>
+          </a:ln>
+        </p:spPr>
+        <p:style>
+          <a:lnRef idx="1">
+            <a:schemeClr val="accent1"/>
+          </a:lnRef>
+          <a:fillRef idx="3">
+            <a:schemeClr val="accent1"/>
+          </a:fillRef>
+          <a:effectRef idx="2">
+            <a:schemeClr val="accent1"/>
+          </a:effectRef>
+          <a:fontRef idx="minor">
+            <a:schemeClr val="lt1"/>
+          </a:fontRef>
+        </p:style>
+        <p:txBody>
+          <a:bodyPr rtlCol="0" anchor="ctr"/>
+          <a:lstStyle/>
+          <a:p>
+            <a:pPr algn="ctr"/>
+          </a:p>
+        </p:txBody>
+      </p:sp>
+      <p:sp>
+        <p:nvSpPr>
+          <p:cNvPr id="7" name="TextBox 6"/>
+          <p:cNvSpPr txBox="1"/>
+          <p:nvPr/>
+        </p:nvSpPr>
+        <p:spPr>
+          <a:xfrm>
+            <a:off x="777240" y="1399031"/>
+            <a:ext cx="10774375" cy="822959"/>
+          </a:xfrm>
+          <a:prstGeom prst="rect">
+            <a:avLst/>
+          </a:prstGeom>
+          <a:noFill/>
+        </p:spPr>
+        <p:txBody>
+          <a:bodyPr wrap="square">
+            <a:spAutoFit/>
+          </a:bodyPr>
+          <a:lstStyle/>
+          <a:p>
+            <a:r>
+              <a:rPr sz="1200" b="1" i="0">
+                <a:solidFill>
+                  <a:srgbClr val="269CCB"/>
+                </a:solidFill>
+                <a:latin typeface="Calibri"/>
+              </a:rPr>
+              <a:t>Info</a:t>
+            </a:r>
+          </a:p>
+          <a:p>
+            <a:pPr>
+              <a:spcBef>
+                <a:spcPts val="400"/>
+              </a:spcBef>
+            </a:pPr>
+            <a:r>
+              <a:rPr sz="1400" b="0" i="0">
+                <a:solidFill>
+                  <a:srgbClr val="333333"/>
+                </a:solidFill>
+                <a:latin typeface="Calibri"/>
+              </a:rPr>
+              <a:t>Entregable: Sección Rendimiento + guion de pitch + paquete casi-final</a:t>
+            </a:r>
+          </a:p>
+        </p:txBody>
+      </p:sp>
+      <p:sp>
+        <p:nvSpPr>
+          <p:cNvPr id="8" name="Rounded Rectangle 7"/>
+          <p:cNvSpPr/>
+          <p:nvPr/>
+        </p:nvSpPr>
+        <p:spPr>
+          <a:xfrm>
+            <a:off x="457200" y="2478024"/>
+            <a:ext cx="11277295" cy="1051560"/>
+          </a:xfrm>
+          <a:prstGeom prst="roundRect">
+            <a:avLst>
+              <a:gd name="adj" fmla="val 12000"/>
+            </a:avLst>
+          </a:prstGeom>
+          <a:solidFill>
+            <a:srgbClr val="FFF8E1"/>
+          </a:solidFill>
+          <a:ln>
+            <a:noFill/>
+          </a:ln>
+        </p:spPr>
+        <p:style>
+          <a:lnRef idx="1">
+            <a:schemeClr val="accent1"/>
+          </a:lnRef>
+          <a:fillRef idx="3">
+            <a:schemeClr val="accent1"/>
+          </a:fillRef>
+          <a:effectRef idx="2">
+            <a:schemeClr val="accent1"/>
+          </a:effectRef>
+          <a:fontRef idx="minor">
+            <a:schemeClr val="lt1"/>
+          </a:fontRef>
+        </p:style>
+        <p:txBody>
+          <a:bodyPr rtlCol="0" anchor="ctr"/>
+          <a:lstStyle/>
+          <a:p>
+            <a:pPr algn="ctr"/>
+          </a:p>
+        </p:txBody>
+      </p:sp>
+      <p:sp>
+        <p:nvSpPr>
+          <p:cNvPr id="9" name="Rectangle 8"/>
+          <p:cNvSpPr/>
+          <p:nvPr/>
+        </p:nvSpPr>
+        <p:spPr>
+          <a:xfrm>
+            <a:off x="457200" y="2478024"/>
+            <a:ext cx="128016" cy="1051560"/>
+          </a:xfrm>
+          <a:prstGeom prst="rect">
+            <a:avLst/>
+          </a:prstGeom>
+          <a:solidFill>
+            <a:srgbClr val="FFD000"/>
+          </a:solidFill>
+          <a:ln>
+            <a:noFill/>
+          </a:ln>
+        </p:spPr>
+        <p:style>
+          <a:lnRef idx="1">
+            <a:schemeClr val="accent1"/>
+          </a:lnRef>
+          <a:fillRef idx="3">
+            <a:schemeClr val="accent1"/>
+          </a:fillRef>
+          <a:effectRef idx="2">
+            <a:schemeClr val="accent1"/>
+          </a:effectRef>
+          <a:fontRef idx="minor">
+            <a:schemeClr val="lt1"/>
+          </a:fontRef>
+        </p:style>
+        <p:txBody>
+          <a:bodyPr rtlCol="0" anchor="ctr"/>
+          <a:lstStyle/>
+          <a:p>
+            <a:pPr algn="ctr"/>
+          </a:p>
+        </p:txBody>
+      </p:sp>
+      <p:sp>
+        <p:nvSpPr>
+          <p:cNvPr id="10" name="TextBox 9"/>
+          <p:cNvSpPr txBox="1"/>
+          <p:nvPr/>
+        </p:nvSpPr>
+        <p:spPr>
+          <a:xfrm>
+            <a:off x="777240" y="2615184"/>
+            <a:ext cx="10774375" cy="822959"/>
+          </a:xfrm>
+          <a:prstGeom prst="rect">
+            <a:avLst/>
+          </a:prstGeom>
+          <a:noFill/>
+        </p:spPr>
+        <p:txBody>
+          <a:bodyPr wrap="square">
+            <a:spAutoFit/>
+          </a:bodyPr>
+          <a:lstStyle/>
+          <a:p>
+            <a:r>
+              <a:rPr sz="1200" b="1" i="0">
+                <a:solidFill>
+                  <a:srgbClr val="FFD000"/>
+                </a:solidFill>
+                <a:latin typeface="Calibri"/>
+              </a:rPr>
+              <a:t>Aclaración</a:t>
+            </a:r>
+          </a:p>
+          <a:p>
+            <a:pPr>
+              <a:spcBef>
+                <a:spcPts val="400"/>
+              </a:spcBef>
+            </a:pPr>
+            <a:r>
+              <a:rPr sz="1400" b="0" i="0">
+                <a:solidFill>
+                  <a:srgbClr val="333333"/>
+                </a:solidFill>
+                <a:latin typeface="Calibri"/>
+              </a:rPr>
+              <a:t>Subir evidencias al paquete CloudLite (Drive/repo) y a ExamLab (https://uniaj.examlab.workers.dev/) domingo 23:59.</a:t>
+            </a:r>
+          </a:p>
+        </p:txBody>
+      </p:sp>
+      <p:sp>
+        <p:nvSpPr>
+          <p:cNvPr id="11" name="Rounded Rectangle 10"/>
+          <p:cNvSpPr/>
+          <p:nvPr/>
+        </p:nvSpPr>
+        <p:spPr>
+          <a:xfrm>
+            <a:off x="457200" y="3694176"/>
+            <a:ext cx="11277295" cy="1051560"/>
+          </a:xfrm>
+          <a:prstGeom prst="roundRect">
+            <a:avLst>
+              <a:gd name="adj" fmla="val 12000"/>
+            </a:avLst>
+          </a:prstGeom>
+          <a:solidFill>
+            <a:srgbClr val="FBE4E4"/>
+          </a:solidFill>
+          <a:ln>
+            <a:noFill/>
+          </a:ln>
+        </p:spPr>
+        <p:style>
+          <a:lnRef idx="1">
+            <a:schemeClr val="accent1"/>
+          </a:lnRef>
+          <a:fillRef idx="3">
+            <a:schemeClr val="accent1"/>
+          </a:fillRef>
+          <a:effectRef idx="2">
+            <a:schemeClr val="accent1"/>
+          </a:effectRef>
+          <a:fontRef idx="minor">
+            <a:schemeClr val="lt1"/>
+          </a:fontRef>
+        </p:style>
+        <p:txBody>
+          <a:bodyPr rtlCol="0" anchor="ctr"/>
+          <a:lstStyle/>
+          <a:p>
+            <a:pPr algn="ctr"/>
+          </a:p>
+        </p:txBody>
+      </p:sp>
+      <p:sp>
+        <p:nvSpPr>
+          <p:cNvPr id="12" name="Rectangle 11"/>
+          <p:cNvSpPr/>
+          <p:nvPr/>
+        </p:nvSpPr>
+        <p:spPr>
+          <a:xfrm>
+            <a:off x="457200" y="3694176"/>
+            <a:ext cx="128016" cy="1051560"/>
+          </a:xfrm>
+          <a:prstGeom prst="rect">
+            <a:avLst/>
+          </a:prstGeom>
+          <a:solidFill>
+            <a:srgbClr val="A02030"/>
+          </a:solidFill>
+          <a:ln>
+            <a:noFill/>
+          </a:ln>
+        </p:spPr>
+        <p:style>
+          <a:lnRef idx="1">
+            <a:schemeClr val="accent1"/>
+          </a:lnRef>
+          <a:fillRef idx="3">
+            <a:schemeClr val="accent1"/>
+          </a:fillRef>
+          <a:effectRef idx="2">
+            <a:schemeClr val="accent1"/>
+          </a:effectRef>
+          <a:fontRef idx="minor">
+            <a:schemeClr val="lt1"/>
+          </a:fontRef>
+        </p:style>
+        <p:txBody>
+          <a:bodyPr rtlCol="0" anchor="ctr"/>
+          <a:lstStyle/>
+          <a:p>
+            <a:pPr algn="ctr"/>
+          </a:p>
+        </p:txBody>
+      </p:sp>
+      <p:sp>
+        <p:nvSpPr>
+          <p:cNvPr id="13" name="TextBox 12"/>
+          <p:cNvSpPr txBox="1"/>
+          <p:nvPr/>
+        </p:nvSpPr>
+        <p:spPr>
+          <a:xfrm>
+            <a:off x="777240" y="3831336"/>
+            <a:ext cx="10774375" cy="822959"/>
+          </a:xfrm>
+          <a:prstGeom prst="rect">
+            <a:avLst/>
+          </a:prstGeom>
+          <a:noFill/>
+        </p:spPr>
+        <p:txBody>
+          <a:bodyPr wrap="square">
+            <a:spAutoFit/>
+          </a:bodyPr>
+          <a:lstStyle/>
+          <a:p>
+            <a:r>
+              <a:rPr sz="1200" b="1" i="0">
+                <a:solidFill>
+                  <a:srgbClr val="A02030"/>
+                </a:solidFill>
+                <a:latin typeface="Calibri"/>
+              </a:rPr>
+              <a:t>Atención</a:t>
+            </a:r>
+          </a:p>
+          <a:p>
+            <a:pPr>
+              <a:spcBef>
+                <a:spcPts val="400"/>
+              </a:spcBef>
+            </a:pPr>
+            <a:r>
+              <a:rPr sz="1400" b="0" i="0">
+                <a:solidFill>
+                  <a:srgbClr val="333333"/>
+                </a:solidFill>
+                <a:latin typeface="Calibri"/>
+              </a:rPr>
+              <a:t>Sin cloud de pago ni instalaciones obligatorias de hipervisores/Docker Desktop.</a:t>
+            </a:r>
+          </a:p>
+        </p:txBody>
+      </p:sp>
+      <p:sp>
+        <p:nvSpPr>
+          <p:cNvPr id="14" name="TextBox 13"/>
+          <p:cNvSpPr txBox="1"/>
+          <p:nvPr/>
+        </p:nvSpPr>
+        <p:spPr>
+          <a:xfrm>
+            <a:off x="11185855" y="6473952"/>
+            <a:ext cx="640080" cy="274320"/>
+          </a:xfrm>
+          <a:prstGeom prst="rect">
+            <a:avLst/>
+          </a:prstGeom>
+          <a:noFill/>
+        </p:spPr>
+        <p:txBody>
+          <a:bodyPr wrap="square">
+            <a:spAutoFit/>
+          </a:bodyPr>
+          <a:lstStyle/>
+          <a:p>
+            <a:pPr algn="r"/>
+            <a:r>
+              <a:rPr sz="1100" b="0" i="0">
+                <a:solidFill>
+                  <a:srgbClr val="666666"/>
+                </a:solidFill>
+                <a:latin typeface="Calibri"/>
+              </a:rPr>
+              <a:t>12</a:t>
+            </a:r>
+          </a:p>
+        </p:txBody>
+      </p:sp>
+    </p:spTree>
+  </p:cSld>
+  <p:clrMapOvr>
+    <a:masterClrMapping/>
+  </p:clrMapOvr>
+</p:sld>
+</file>
+
+<file path=ppt/slides/slide13.xml><?xml version="1.0" encoding="utf-8"?>
+<p:sld xmlns:a="http://schemas.openxmlformats.org/drawingml/2006/main" xmlns:p="http://schemas.openxmlformats.org/presentationml/2006/main" xmlns:r="http://schemas.openxmlformats.org/officeDocument/2006/relationships">
+  <p:cSld>
+    <p:bg>
+      <p:bgPr>
+        <a:solidFill>
+          <a:srgbClr val="FFFFFF"/>
+        </a:solidFill>
+        <a:effectLst/>
+      </p:bgPr>
+    </p:bg>
+    <p:spTree>
+      <p:nvGrpSpPr>
+        <p:cNvPr id="1" name=""/>
+        <p:cNvGrpSpPr/>
+        <p:nvPr/>
+      </p:nvGrpSpPr>
+      <p:grpSpPr/>
+      <p:sp>
+        <p:nvSpPr>
+          <p:cNvPr id="2" name="Rectangle 1"/>
+          <p:cNvSpPr/>
+          <p:nvPr/>
+        </p:nvSpPr>
+        <p:spPr>
+          <a:xfrm>
+            <a:off x="0" y="0"/>
             <a:ext cx="12191695" cy="164592"/>
           </a:xfrm>
           <a:prstGeom prst="rect">
@@ -6589,7 +7855,7 @@
         <p:spPr>
           <a:xfrm>
             <a:off x="0" y="0"/>
-            <a:ext cx="12191695" cy="960120"/>
+            <a:ext cx="12191695" cy="1170432"/>
           </a:xfrm>
           <a:prstGeom prst="rect">
             <a:avLst/>
@@ -6631,7 +7897,7 @@
         </p:nvSpPr>
         <p:spPr>
           <a:xfrm>
-            <a:off x="0" y="960120"/>
+            <a:off x="0" y="1170432"/>
             <a:ext cx="12191695" cy="41148"/>
           </a:xfrm>
           <a:prstGeom prst="rect">
@@ -6675,7 +7941,7 @@
         <p:spPr>
           <a:xfrm>
             <a:off x="457200" y="164592"/>
-            <a:ext cx="11277295" cy="502920"/>
+            <a:ext cx="11277295" cy="384048"/>
           </a:xfrm>
           <a:prstGeom prst="rect">
             <a:avLst/>
@@ -6695,7 +7961,7 @@
                 </a:solidFill>
                 <a:latin typeface="Calibri"/>
               </a:rPr>
-              <a:t>Taller PI (paso a paso)</a:t>
+              <a:t>Herramientas de hoy</a:t>
             </a:r>
           </a:p>
         </p:txBody>
@@ -6708,8 +7974,8 @@
         </p:nvSpPr>
         <p:spPr>
           <a:xfrm>
-            <a:off x="457200" y="1170432"/>
-            <a:ext cx="11277295" cy="5230368"/>
+            <a:off x="457200" y="566928"/>
+            <a:ext cx="11277295" cy="411480"/>
           </a:xfrm>
           <a:prstGeom prst="rect">
             <a:avLst/>
@@ -6722,171 +7988,837 @@
           </a:bodyPr>
           <a:lstStyle/>
           <a:p>
-            <a:pPr>
-              <a:spcAft>
-                <a:spcPts val="800"/>
-              </a:spcAft>
+            <a:r>
+              <a:rPr sz="1400" b="0" i="0">
+                <a:solidFill>
+                  <a:srgbClr val="B8D8EE"/>
+                </a:solidFill>
+                <a:latin typeface="Calibri"/>
+              </a:rPr>
+              <a:t>Gratis · navegador o free tier · sin cuenta de pago</a:t>
+            </a:r>
+          </a:p>
+        </p:txBody>
+      </p:sp>
+      <p:sp>
+        <p:nvSpPr>
+          <p:cNvPr id="6" name="Rounded Rectangle 5"/>
+          <p:cNvSpPr/>
+          <p:nvPr/>
+        </p:nvSpPr>
+        <p:spPr>
+          <a:xfrm>
+            <a:off x="457200" y="1591056"/>
+            <a:ext cx="3624986" cy="2299716"/>
+          </a:xfrm>
+          <a:prstGeom prst="roundRect">
+            <a:avLst>
+              <a:gd name="adj" fmla="val 12000"/>
+            </a:avLst>
+          </a:prstGeom>
+          <a:solidFill>
+            <a:srgbClr val="F2F2F2"/>
+          </a:solidFill>
+          <a:ln>
+            <a:noFill/>
+          </a:ln>
+        </p:spPr>
+        <p:style>
+          <a:lnRef idx="1">
+            <a:schemeClr val="accent1"/>
+          </a:lnRef>
+          <a:fillRef idx="3">
+            <a:schemeClr val="accent1"/>
+          </a:fillRef>
+          <a:effectRef idx="2">
+            <a:schemeClr val="accent1"/>
+          </a:effectRef>
+          <a:fontRef idx="minor">
+            <a:schemeClr val="lt1"/>
+          </a:fontRef>
+        </p:style>
+        <p:txBody>
+          <a:bodyPr rtlCol="0" anchor="ctr"/>
+          <a:lstStyle/>
+          <a:p>
+            <a:pPr algn="ctr"/>
+          </a:p>
+        </p:txBody>
+      </p:sp>
+      <p:sp>
+        <p:nvSpPr>
+          <p:cNvPr id="7" name="Rectangle 6"/>
+          <p:cNvSpPr/>
+          <p:nvPr/>
+        </p:nvSpPr>
+        <p:spPr>
+          <a:xfrm>
+            <a:off x="457200" y="1591056"/>
+            <a:ext cx="3624986" cy="64008"/>
+          </a:xfrm>
+          <a:prstGeom prst="rect">
+            <a:avLst/>
+          </a:prstGeom>
+          <a:solidFill>
+            <a:srgbClr val="095292"/>
+          </a:solidFill>
+          <a:ln>
+            <a:noFill/>
+          </a:ln>
+        </p:spPr>
+        <p:style>
+          <a:lnRef idx="1">
+            <a:schemeClr val="accent1"/>
+          </a:lnRef>
+          <a:fillRef idx="3">
+            <a:schemeClr val="accent1"/>
+          </a:fillRef>
+          <a:effectRef idx="2">
+            <a:schemeClr val="accent1"/>
+          </a:effectRef>
+          <a:fontRef idx="minor">
+            <a:schemeClr val="lt1"/>
+          </a:fontRef>
+        </p:style>
+        <p:txBody>
+          <a:bodyPr rtlCol="0" anchor="ctr"/>
+          <a:lstStyle/>
+          <a:p>
+            <a:pPr algn="ctr"/>
+          </a:p>
+        </p:txBody>
+      </p:sp>
+      <p:sp>
+        <p:nvSpPr>
+          <p:cNvPr id="8" name="Rectangle 7"/>
+          <p:cNvSpPr/>
+          <p:nvPr/>
+        </p:nvSpPr>
+        <p:spPr>
+          <a:xfrm>
+            <a:off x="457200" y="1655064"/>
+            <a:ext cx="3624986" cy="27432"/>
+          </a:xfrm>
+          <a:prstGeom prst="rect">
+            <a:avLst/>
+          </a:prstGeom>
+          <a:solidFill>
+            <a:srgbClr val="FFD000"/>
+          </a:solidFill>
+          <a:ln>
+            <a:noFill/>
+          </a:ln>
+        </p:spPr>
+        <p:style>
+          <a:lnRef idx="1">
+            <a:schemeClr val="accent1"/>
+          </a:lnRef>
+          <a:fillRef idx="3">
+            <a:schemeClr val="accent1"/>
+          </a:fillRef>
+          <a:effectRef idx="2">
+            <a:schemeClr val="accent1"/>
+          </a:effectRef>
+          <a:fontRef idx="minor">
+            <a:schemeClr val="lt1"/>
+          </a:fontRef>
+        </p:style>
+        <p:txBody>
+          <a:bodyPr rtlCol="0" anchor="ctr"/>
+          <a:lstStyle/>
+          <a:p>
+            <a:pPr algn="ctr"/>
+          </a:p>
+        </p:txBody>
+      </p:sp>
+      <p:pic>
+        <p:nvPicPr>
+          <p:cNvPr id="9" name="Picture 8" descr="google_docs.png"/>
+          <p:cNvPicPr>
+            <a:picLocks noChangeAspect="1"/>
+          </p:cNvPicPr>
+          <p:nvPr/>
+        </p:nvPicPr>
+        <p:blipFill>
+          <a:blip r:embed="rId2"/>
+          <a:stretch>
+            <a:fillRect/>
+          </a:stretch>
+        </p:blipFill>
+        <p:spPr>
+          <a:xfrm>
+            <a:off x="1659331" y="1847087"/>
+            <a:ext cx="1220724" cy="1220724"/>
+          </a:xfrm>
+          <a:prstGeom prst="rect">
+            <a:avLst/>
+          </a:prstGeom>
+        </p:spPr>
+      </p:pic>
+      <p:sp>
+        <p:nvSpPr>
+          <p:cNvPr id="10" name="TextBox 9"/>
+          <p:cNvSpPr txBox="1"/>
+          <p:nvPr/>
+        </p:nvSpPr>
+        <p:spPr>
+          <a:xfrm>
+            <a:off x="530352" y="3159251"/>
+            <a:ext cx="3478682" cy="621792"/>
+          </a:xfrm>
+          <a:prstGeom prst="rect">
+            <a:avLst/>
+          </a:prstGeom>
+          <a:noFill/>
+        </p:spPr>
+        <p:txBody>
+          <a:bodyPr wrap="square" anchor="t"/>
+          <a:lstStyle/>
+          <a:p>
+            <a:pPr algn="ctr"/>
+            <a:r>
+              <a:rPr sz="1300" b="1" i="0">
+                <a:solidFill>
+                  <a:srgbClr val="095292"/>
+                </a:solidFill>
+                <a:latin typeface="Calibri"/>
+              </a:rPr>
+              <a:t>Google Docs</a:t>
+            </a:r>
+          </a:p>
+          <a:p>
+            <a:pPr algn="ctr">
+              <a:spcBef>
+                <a:spcPts val="200"/>
+              </a:spcBef>
             </a:pPr>
             <a:r>
-              <a:rPr sz="1600" b="1" i="0">
-                <a:solidFill>
-                  <a:srgbClr val="333333"/>
-                </a:solidFill>
-                <a:latin typeface="Calibri"/>
-              </a:rPr>
-              <a:t>1.</a:t>
-            </a:r>
-            <a:r>
-              <a:rPr sz="1600" b="0" i="0">
-                <a:solidFill>
-                  <a:srgbClr val="333333"/>
-                </a:solidFill>
-                <a:latin typeface="Calibri"/>
-              </a:rPr>
-              <a:t> Paso 1: describan el escenario de carga del pico real de su dominio con los 6 datos obligatorios (evento del pico, usuarios concurrentes, peticiones por segundo, mezcla de operaciones en porcentajes que sumen 100, duracion de la ventana y volumen de datos de partida), verificando que la mezcla sume exactamente 100 por ciento y que el pico corresponda a una fecha real del calendario de su dominio.</a:t>
-            </a:r>
-          </a:p>
-          <a:p>
-            <a:pPr>
-              <a:spcAft>
-                <a:spcPts val="800"/>
-              </a:spcAft>
+              <a:rPr sz="1000" b="0" i="0">
+                <a:solidFill>
+                  <a:srgbClr val="666666"/>
+                </a:solidFill>
+                <a:latin typeface="Calibri"/>
+              </a:rPr>
+              <a:t>Objetivo de rendimiento</a:t>
+            </a:r>
+          </a:p>
+        </p:txBody>
+      </p:sp>
+      <p:sp>
+        <p:nvSpPr>
+          <p:cNvPr id="11" name="Rounded Rectangle 10"/>
+          <p:cNvSpPr/>
+          <p:nvPr/>
+        </p:nvSpPr>
+        <p:spPr>
+          <a:xfrm>
+            <a:off x="4283354" y="1591056"/>
+            <a:ext cx="3624986" cy="2299716"/>
+          </a:xfrm>
+          <a:prstGeom prst="roundRect">
+            <a:avLst>
+              <a:gd name="adj" fmla="val 12000"/>
+            </a:avLst>
+          </a:prstGeom>
+          <a:solidFill>
+            <a:srgbClr val="F2F2F2"/>
+          </a:solidFill>
+          <a:ln>
+            <a:noFill/>
+          </a:ln>
+        </p:spPr>
+        <p:style>
+          <a:lnRef idx="1">
+            <a:schemeClr val="accent1"/>
+          </a:lnRef>
+          <a:fillRef idx="3">
+            <a:schemeClr val="accent1"/>
+          </a:fillRef>
+          <a:effectRef idx="2">
+            <a:schemeClr val="accent1"/>
+          </a:effectRef>
+          <a:fontRef idx="minor">
+            <a:schemeClr val="lt1"/>
+          </a:fontRef>
+        </p:style>
+        <p:txBody>
+          <a:bodyPr rtlCol="0" anchor="ctr"/>
+          <a:lstStyle/>
+          <a:p>
+            <a:pPr algn="ctr"/>
+          </a:p>
+        </p:txBody>
+      </p:sp>
+      <p:sp>
+        <p:nvSpPr>
+          <p:cNvPr id="12" name="Rectangle 11"/>
+          <p:cNvSpPr/>
+          <p:nvPr/>
+        </p:nvSpPr>
+        <p:spPr>
+          <a:xfrm>
+            <a:off x="4283354" y="1591056"/>
+            <a:ext cx="3624986" cy="64008"/>
+          </a:xfrm>
+          <a:prstGeom prst="rect">
+            <a:avLst/>
+          </a:prstGeom>
+          <a:solidFill>
+            <a:srgbClr val="095292"/>
+          </a:solidFill>
+          <a:ln>
+            <a:noFill/>
+          </a:ln>
+        </p:spPr>
+        <p:style>
+          <a:lnRef idx="1">
+            <a:schemeClr val="accent1"/>
+          </a:lnRef>
+          <a:fillRef idx="3">
+            <a:schemeClr val="accent1"/>
+          </a:fillRef>
+          <a:effectRef idx="2">
+            <a:schemeClr val="accent1"/>
+          </a:effectRef>
+          <a:fontRef idx="minor">
+            <a:schemeClr val="lt1"/>
+          </a:fontRef>
+        </p:style>
+        <p:txBody>
+          <a:bodyPr rtlCol="0" anchor="ctr"/>
+          <a:lstStyle/>
+          <a:p>
+            <a:pPr algn="ctr"/>
+          </a:p>
+        </p:txBody>
+      </p:sp>
+      <p:sp>
+        <p:nvSpPr>
+          <p:cNvPr id="13" name="Rectangle 12"/>
+          <p:cNvSpPr/>
+          <p:nvPr/>
+        </p:nvSpPr>
+        <p:spPr>
+          <a:xfrm>
+            <a:off x="4283354" y="1655064"/>
+            <a:ext cx="3624986" cy="27432"/>
+          </a:xfrm>
+          <a:prstGeom prst="rect">
+            <a:avLst/>
+          </a:prstGeom>
+          <a:solidFill>
+            <a:srgbClr val="FFD000"/>
+          </a:solidFill>
+          <a:ln>
+            <a:noFill/>
+          </a:ln>
+        </p:spPr>
+        <p:style>
+          <a:lnRef idx="1">
+            <a:schemeClr val="accent1"/>
+          </a:lnRef>
+          <a:fillRef idx="3">
+            <a:schemeClr val="accent1"/>
+          </a:fillRef>
+          <a:effectRef idx="2">
+            <a:schemeClr val="accent1"/>
+          </a:effectRef>
+          <a:fontRef idx="minor">
+            <a:schemeClr val="lt1"/>
+          </a:fontRef>
+        </p:style>
+        <p:txBody>
+          <a:bodyPr rtlCol="0" anchor="ctr"/>
+          <a:lstStyle/>
+          <a:p>
+            <a:pPr algn="ctr"/>
+          </a:p>
+        </p:txBody>
+      </p:sp>
+      <p:pic>
+        <p:nvPicPr>
+          <p:cNvPr id="14" name="Picture 13" descr="drawio.png"/>
+          <p:cNvPicPr>
+            <a:picLocks noChangeAspect="1"/>
+          </p:cNvPicPr>
+          <p:nvPr/>
+        </p:nvPicPr>
+        <p:blipFill>
+          <a:blip r:embed="rId3"/>
+          <a:stretch>
+            <a:fillRect/>
+          </a:stretch>
+        </p:blipFill>
+        <p:spPr>
+          <a:xfrm>
+            <a:off x="5485485" y="1847087"/>
+            <a:ext cx="1220724" cy="1220724"/>
+          </a:xfrm>
+          <a:prstGeom prst="rect">
+            <a:avLst/>
+          </a:prstGeom>
+        </p:spPr>
+      </p:pic>
+      <p:sp>
+        <p:nvSpPr>
+          <p:cNvPr id="15" name="TextBox 14"/>
+          <p:cNvSpPr txBox="1"/>
+          <p:nvPr/>
+        </p:nvSpPr>
+        <p:spPr>
+          <a:xfrm>
+            <a:off x="4356506" y="3159251"/>
+            <a:ext cx="3478682" cy="621792"/>
+          </a:xfrm>
+          <a:prstGeom prst="rect">
+            <a:avLst/>
+          </a:prstGeom>
+          <a:noFill/>
+        </p:spPr>
+        <p:txBody>
+          <a:bodyPr wrap="square" anchor="t"/>
+          <a:lstStyle/>
+          <a:p>
+            <a:pPr algn="ctr"/>
+            <a:r>
+              <a:rPr sz="1300" b="1" i="0">
+                <a:solidFill>
+                  <a:srgbClr val="095292"/>
+                </a:solidFill>
+                <a:latin typeface="Calibri"/>
+              </a:rPr>
+              <a:t>draw.io</a:t>
+            </a:r>
+          </a:p>
+          <a:p>
+            <a:pPr algn="ctr">
+              <a:spcBef>
+                <a:spcPts val="200"/>
+              </a:spcBef>
             </a:pPr>
             <a:r>
-              <a:rPr sz="1600" b="0" i="0">
-                <a:solidFill>
-                  <a:srgbClr val="333333"/>
-                </a:solidFill>
-                <a:latin typeface="Calibri"/>
-              </a:rPr>
-              <a:t>–   </a:t>
-            </a:r>
-            <a:r>
-              <a:rPr sz="1600" b="1" i="0">
-                <a:solidFill>
-                  <a:srgbClr val="333333"/>
-                </a:solidFill>
-                <a:latin typeface="Calibri"/>
-              </a:rPr>
-              <a:t>2.</a:t>
-            </a:r>
-            <a:r>
-              <a:rPr sz="1600" b="0" i="0">
-                <a:solidFill>
-                  <a:srgbClr val="333333"/>
-                </a:solidFill>
-                <a:latin typeface="Calibri"/>
-              </a:rPr>
-              <a:t> Paso 2: definan las 3 metricas objetivo en una tabla de 4 columnas con numero, ventana de medicion, forma de medirla y consecuencia de incumplirla, verificando que cada objetivo tenga un numero y una ventana (por ejemplo p95 por debajo de 800 ms en 5 minutos) y que ninguna diga rapido o aceptable sin cifra.</a:t>
-            </a:r>
-          </a:p>
-          <a:p>
-            <a:pPr>
-              <a:spcAft>
-                <a:spcPts val="800"/>
-              </a:spcAft>
+              <a:rPr sz="1000" b="0" i="0">
+                <a:solidFill>
+                  <a:srgbClr val="666666"/>
+                </a:solidFill>
+                <a:latin typeface="Calibri"/>
+              </a:rPr>
+              <a:t>Bottleneck</a:t>
+            </a:r>
+          </a:p>
+        </p:txBody>
+      </p:sp>
+      <p:sp>
+        <p:nvSpPr>
+          <p:cNvPr id="16" name="Rounded Rectangle 15"/>
+          <p:cNvSpPr/>
+          <p:nvPr/>
+        </p:nvSpPr>
+        <p:spPr>
+          <a:xfrm>
+            <a:off x="8109508" y="1591056"/>
+            <a:ext cx="3624986" cy="2299716"/>
+          </a:xfrm>
+          <a:prstGeom prst="roundRect">
+            <a:avLst>
+              <a:gd name="adj" fmla="val 12000"/>
+            </a:avLst>
+          </a:prstGeom>
+          <a:solidFill>
+            <a:srgbClr val="F2F2F2"/>
+          </a:solidFill>
+          <a:ln>
+            <a:noFill/>
+          </a:ln>
+        </p:spPr>
+        <p:style>
+          <a:lnRef idx="1">
+            <a:schemeClr val="accent1"/>
+          </a:lnRef>
+          <a:fillRef idx="3">
+            <a:schemeClr val="accent1"/>
+          </a:fillRef>
+          <a:effectRef idx="2">
+            <a:schemeClr val="accent1"/>
+          </a:effectRef>
+          <a:fontRef idx="minor">
+            <a:schemeClr val="lt1"/>
+          </a:fontRef>
+        </p:style>
+        <p:txBody>
+          <a:bodyPr rtlCol="0" anchor="ctr"/>
+          <a:lstStyle/>
+          <a:p>
+            <a:pPr algn="ctr"/>
+          </a:p>
+        </p:txBody>
+      </p:sp>
+      <p:sp>
+        <p:nvSpPr>
+          <p:cNvPr id="17" name="Rectangle 16"/>
+          <p:cNvSpPr/>
+          <p:nvPr/>
+        </p:nvSpPr>
+        <p:spPr>
+          <a:xfrm>
+            <a:off x="8109508" y="1591056"/>
+            <a:ext cx="3624986" cy="64008"/>
+          </a:xfrm>
+          <a:prstGeom prst="rect">
+            <a:avLst/>
+          </a:prstGeom>
+          <a:solidFill>
+            <a:srgbClr val="095292"/>
+          </a:solidFill>
+          <a:ln>
+            <a:noFill/>
+          </a:ln>
+        </p:spPr>
+        <p:style>
+          <a:lnRef idx="1">
+            <a:schemeClr val="accent1"/>
+          </a:lnRef>
+          <a:fillRef idx="3">
+            <a:schemeClr val="accent1"/>
+          </a:fillRef>
+          <a:effectRef idx="2">
+            <a:schemeClr val="accent1"/>
+          </a:effectRef>
+          <a:fontRef idx="minor">
+            <a:schemeClr val="lt1"/>
+          </a:fontRef>
+        </p:style>
+        <p:txBody>
+          <a:bodyPr rtlCol="0" anchor="ctr"/>
+          <a:lstStyle/>
+          <a:p>
+            <a:pPr algn="ctr"/>
+          </a:p>
+        </p:txBody>
+      </p:sp>
+      <p:sp>
+        <p:nvSpPr>
+          <p:cNvPr id="18" name="Rectangle 17"/>
+          <p:cNvSpPr/>
+          <p:nvPr/>
+        </p:nvSpPr>
+        <p:spPr>
+          <a:xfrm>
+            <a:off x="8109508" y="1655064"/>
+            <a:ext cx="3624986" cy="27432"/>
+          </a:xfrm>
+          <a:prstGeom prst="rect">
+            <a:avLst/>
+          </a:prstGeom>
+          <a:solidFill>
+            <a:srgbClr val="FFD000"/>
+          </a:solidFill>
+          <a:ln>
+            <a:noFill/>
+          </a:ln>
+        </p:spPr>
+        <p:style>
+          <a:lnRef idx="1">
+            <a:schemeClr val="accent1"/>
+          </a:lnRef>
+          <a:fillRef idx="3">
+            <a:schemeClr val="accent1"/>
+          </a:fillRef>
+          <a:effectRef idx="2">
+            <a:schemeClr val="accent1"/>
+          </a:effectRef>
+          <a:fontRef idx="minor">
+            <a:schemeClr val="lt1"/>
+          </a:fontRef>
+        </p:style>
+        <p:txBody>
+          <a:bodyPr rtlCol="0" anchor="ctr"/>
+          <a:lstStyle/>
+          <a:p>
+            <a:pPr algn="ctr"/>
+          </a:p>
+        </p:txBody>
+      </p:sp>
+      <p:pic>
+        <p:nvPicPr>
+          <p:cNvPr id="19" name="Picture 18" descr="mermaid.png"/>
+          <p:cNvPicPr>
+            <a:picLocks noChangeAspect="1"/>
+          </p:cNvPicPr>
+          <p:nvPr/>
+        </p:nvPicPr>
+        <p:blipFill>
+          <a:blip r:embed="rId4"/>
+          <a:stretch>
+            <a:fillRect/>
+          </a:stretch>
+        </p:blipFill>
+        <p:spPr>
+          <a:xfrm>
+            <a:off x="9311640" y="1847087"/>
+            <a:ext cx="1220724" cy="1220724"/>
+          </a:xfrm>
+          <a:prstGeom prst="rect">
+            <a:avLst/>
+          </a:prstGeom>
+        </p:spPr>
+      </p:pic>
+      <p:sp>
+        <p:nvSpPr>
+          <p:cNvPr id="20" name="TextBox 19"/>
+          <p:cNvSpPr txBox="1"/>
+          <p:nvPr/>
+        </p:nvSpPr>
+        <p:spPr>
+          <a:xfrm>
+            <a:off x="8182660" y="3159251"/>
+            <a:ext cx="3478682" cy="621792"/>
+          </a:xfrm>
+          <a:prstGeom prst="rect">
+            <a:avLst/>
+          </a:prstGeom>
+          <a:noFill/>
+        </p:spPr>
+        <p:txBody>
+          <a:bodyPr wrap="square" anchor="t"/>
+          <a:lstStyle/>
+          <a:p>
+            <a:pPr algn="ctr"/>
+            <a:r>
+              <a:rPr sz="1300" b="1" i="0">
+                <a:solidFill>
+                  <a:srgbClr val="095292"/>
+                </a:solidFill>
+                <a:latin typeface="Calibri"/>
+              </a:rPr>
+              <a:t>Mermaid</a:t>
+            </a:r>
+          </a:p>
+          <a:p>
+            <a:pPr algn="ctr">
+              <a:spcBef>
+                <a:spcPts val="200"/>
+              </a:spcBef>
             </a:pPr>
             <a:r>
-              <a:rPr sz="1600" b="0" i="0">
-                <a:solidFill>
-                  <a:srgbClr val="333333"/>
-                </a:solidFill>
-                <a:latin typeface="Calibri"/>
-              </a:rPr>
-              <a:t>–   </a:t>
-            </a:r>
-            <a:r>
-              <a:rPr sz="1600" b="1" i="0">
-                <a:solidFill>
-                  <a:srgbClr val="333333"/>
-                </a:solidFill>
-                <a:latin typeface="Calibri"/>
-              </a:rPr>
-              <a:t>3.</a:t>
-            </a:r>
-            <a:r>
-              <a:rPr sz="1600" b="0" i="0">
-                <a:solidFill>
-                  <a:srgbClr val="333333"/>
-                </a:solidFill>
-                <a:latin typeface="Calibri"/>
-              </a:rPr>
-              <a:t> Paso 3: escriban en ExamLab el sequenceDiagram del camino critico con el presupuesto de latencia repartido por salto, verificando que la suma de los tramos sea menor o igual al objetivo de p95 y que la nota final muestre el margen restante en milisegundos.</a:t>
-            </a:r>
-          </a:p>
-          <a:p>
-            <a:pPr>
-              <a:spcAft>
-                <a:spcPts val="800"/>
-              </a:spcAft>
+              <a:rPr sz="1000" b="0" i="0">
+                <a:solidFill>
+                  <a:srgbClr val="666666"/>
+                </a:solidFill>
+                <a:latin typeface="Calibri"/>
+              </a:rPr>
+              <a:t>Codigo del diagrama</a:t>
+            </a:r>
+          </a:p>
+        </p:txBody>
+      </p:sp>
+      <p:sp>
+        <p:nvSpPr>
+          <p:cNvPr id="21" name="Rounded Rectangle 20"/>
+          <p:cNvSpPr/>
+          <p:nvPr/>
+        </p:nvSpPr>
+        <p:spPr>
+          <a:xfrm>
+            <a:off x="4283354" y="4055364"/>
+            <a:ext cx="3624986" cy="2299716"/>
+          </a:xfrm>
+          <a:prstGeom prst="roundRect">
+            <a:avLst>
+              <a:gd name="adj" fmla="val 12000"/>
+            </a:avLst>
+          </a:prstGeom>
+          <a:solidFill>
+            <a:srgbClr val="F2F2F2"/>
+          </a:solidFill>
+          <a:ln>
+            <a:noFill/>
+          </a:ln>
+        </p:spPr>
+        <p:style>
+          <a:lnRef idx="1">
+            <a:schemeClr val="accent1"/>
+          </a:lnRef>
+          <a:fillRef idx="3">
+            <a:schemeClr val="accent1"/>
+          </a:fillRef>
+          <a:effectRef idx="2">
+            <a:schemeClr val="accent1"/>
+          </a:effectRef>
+          <a:fontRef idx="minor">
+            <a:schemeClr val="lt1"/>
+          </a:fontRef>
+        </p:style>
+        <p:txBody>
+          <a:bodyPr rtlCol="0" anchor="ctr"/>
+          <a:lstStyle/>
+          <a:p>
+            <a:pPr algn="ctr"/>
+          </a:p>
+        </p:txBody>
+      </p:sp>
+      <p:sp>
+        <p:nvSpPr>
+          <p:cNvPr id="22" name="Rectangle 21"/>
+          <p:cNvSpPr/>
+          <p:nvPr/>
+        </p:nvSpPr>
+        <p:spPr>
+          <a:xfrm>
+            <a:off x="4283354" y="4055364"/>
+            <a:ext cx="3624986" cy="64008"/>
+          </a:xfrm>
+          <a:prstGeom prst="rect">
+            <a:avLst/>
+          </a:prstGeom>
+          <a:solidFill>
+            <a:srgbClr val="095292"/>
+          </a:solidFill>
+          <a:ln>
+            <a:noFill/>
+          </a:ln>
+        </p:spPr>
+        <p:style>
+          <a:lnRef idx="1">
+            <a:schemeClr val="accent1"/>
+          </a:lnRef>
+          <a:fillRef idx="3">
+            <a:schemeClr val="accent1"/>
+          </a:fillRef>
+          <a:effectRef idx="2">
+            <a:schemeClr val="accent1"/>
+          </a:effectRef>
+          <a:fontRef idx="minor">
+            <a:schemeClr val="lt1"/>
+          </a:fontRef>
+        </p:style>
+        <p:txBody>
+          <a:bodyPr rtlCol="0" anchor="ctr"/>
+          <a:lstStyle/>
+          <a:p>
+            <a:pPr algn="ctr"/>
+          </a:p>
+        </p:txBody>
+      </p:sp>
+      <p:sp>
+        <p:nvSpPr>
+          <p:cNvPr id="23" name="Rectangle 22"/>
+          <p:cNvSpPr/>
+          <p:nvPr/>
+        </p:nvSpPr>
+        <p:spPr>
+          <a:xfrm>
+            <a:off x="4283354" y="4119372"/>
+            <a:ext cx="3624986" cy="27432"/>
+          </a:xfrm>
+          <a:prstGeom prst="rect">
+            <a:avLst/>
+          </a:prstGeom>
+          <a:solidFill>
+            <a:srgbClr val="FFD000"/>
+          </a:solidFill>
+          <a:ln>
+            <a:noFill/>
+          </a:ln>
+        </p:spPr>
+        <p:style>
+          <a:lnRef idx="1">
+            <a:schemeClr val="accent1"/>
+          </a:lnRef>
+          <a:fillRef idx="3">
+            <a:schemeClr val="accent1"/>
+          </a:fillRef>
+          <a:effectRef idx="2">
+            <a:schemeClr val="accent1"/>
+          </a:effectRef>
+          <a:fontRef idx="minor">
+            <a:schemeClr val="lt1"/>
+          </a:fontRef>
+        </p:style>
+        <p:txBody>
+          <a:bodyPr rtlCol="0" anchor="ctr"/>
+          <a:lstStyle/>
+          <a:p>
+            <a:pPr algn="ctr"/>
+          </a:p>
+        </p:txBody>
+      </p:sp>
+      <p:pic>
+        <p:nvPicPr>
+          <p:cNvPr id="24" name="Picture 23" descr="examlab.png"/>
+          <p:cNvPicPr>
+            <a:picLocks noChangeAspect="1"/>
+          </p:cNvPicPr>
+          <p:nvPr/>
+        </p:nvPicPr>
+        <p:blipFill>
+          <a:blip r:embed="rId5"/>
+          <a:stretch>
+            <a:fillRect/>
+          </a:stretch>
+        </p:blipFill>
+        <p:spPr>
+          <a:xfrm>
+            <a:off x="5485485" y="4311396"/>
+            <a:ext cx="1220724" cy="1220724"/>
+          </a:xfrm>
+          <a:prstGeom prst="rect">
+            <a:avLst/>
+          </a:prstGeom>
+        </p:spPr>
+      </p:pic>
+      <p:sp>
+        <p:nvSpPr>
+          <p:cNvPr id="25" name="TextBox 24"/>
+          <p:cNvSpPr txBox="1"/>
+          <p:nvPr/>
+        </p:nvSpPr>
+        <p:spPr>
+          <a:xfrm>
+            <a:off x="4356506" y="5623560"/>
+            <a:ext cx="3478682" cy="621792"/>
+          </a:xfrm>
+          <a:prstGeom prst="rect">
+            <a:avLst/>
+          </a:prstGeom>
+          <a:noFill/>
+        </p:spPr>
+        <p:txBody>
+          <a:bodyPr wrap="square" anchor="t"/>
+          <a:lstStyle/>
+          <a:p>
+            <a:pPr algn="ctr"/>
+            <a:r>
+              <a:rPr sz="1300" b="1" i="0">
+                <a:solidFill>
+                  <a:srgbClr val="095292"/>
+                </a:solidFill>
+                <a:latin typeface="Calibri"/>
+              </a:rPr>
+              <a:t>ExamLab</a:t>
+            </a:r>
+          </a:p>
+          <a:p>
+            <a:pPr algn="ctr">
+              <a:spcBef>
+                <a:spcPts val="200"/>
+              </a:spcBef>
             </a:pPr>
             <a:r>
-              <a:rPr sz="1600" b="0" i="0">
-                <a:solidFill>
-                  <a:srgbClr val="333333"/>
-                </a:solidFill>
-                <a:latin typeface="Calibri"/>
-              </a:rPr>
-              <a:t>–   </a:t>
-            </a:r>
-            <a:r>
-              <a:rPr sz="1600" b="1" i="0">
-                <a:solidFill>
-                  <a:srgbClr val="333333"/>
-                </a:solidFill>
-                <a:latin typeface="Calibri"/>
-              </a:rPr>
-              <a:t>4.</a:t>
-            </a:r>
-            <a:r>
-              <a:rPr sz="1600" b="0" i="0">
-                <a:solidFill>
-                  <a:srgbClr val="333333"/>
-                </a:solidFill>
-                <a:latin typeface="Calibri"/>
-              </a:rPr>
-              <a:t> Paso 4: ensayen el pitch de 5 a 8 minutos con cronometro y llenen la tabla de guion de 6 filas con minuto, seccion, quien habla, mensaje clave y evidencia en pantalla, verificando que la suma de los minutos quede entre 5 y 8, que ninguna seccion pase de 2:00 (y, si el docente autorizo equipo, que todos los integrantes hablen) y que cada seccion tenga una evidencia concreta que se pueda mostrar.</a:t>
-            </a:r>
-          </a:p>
-          <a:p>
-            <a:pPr>
-              <a:spcAft>
-                <a:spcPts val="800"/>
-              </a:spcAft>
-            </a:pPr>
-            <a:r>
-              <a:rPr sz="1600" b="0" i="0">
-                <a:solidFill>
-                  <a:srgbClr val="333333"/>
-                </a:solidFill>
-                <a:latin typeface="Calibri"/>
-              </a:rPr>
-              <a:t>–   </a:t>
-            </a:r>
-            <a:r>
-              <a:rPr sz="1600" b="1" i="0">
-                <a:solidFill>
-                  <a:srgbClr val="333333"/>
-                </a:solidFill>
-                <a:latin typeface="Calibri"/>
-              </a:rPr>
-              <a:t>5.</a:t>
-            </a:r>
-            <a:r>
-              <a:rPr sz="1600" b="0" i="0">
-                <a:solidFill>
-                  <a:srgbClr val="333333"/>
-                </a:solidFill>
-                <a:latin typeface="Calibri"/>
-              </a:rPr>
-              <a:t> Paso 5: cierren los 5 items del backlog de la Clase 11 dejando registro de los residuales, dejen el paquete casi final ordenado en el repositorio o el Drive y suban las 6 preguntas a ExamLab (modulo Talleres) antes del domingo 23:59, verificando que el cuello de botella declarado en el analisis sea el mismo que muestra el diagrama de secuencia.</a:t>
-            </a:r>
-          </a:p>
-        </p:txBody>
-      </p:sp>
-      <p:sp>
-        <p:nvSpPr>
-          <p:cNvPr id="6" name="TextBox 5"/>
+              <a:rPr sz="1000" b="0" i="0">
+                <a:solidFill>
+                  <a:srgbClr val="666666"/>
+                </a:solidFill>
+                <a:latin typeface="Calibri"/>
+              </a:rPr>
+              <a:t>Donde se entrega</a:t>
+            </a:r>
+          </a:p>
+        </p:txBody>
+      </p:sp>
+      <p:sp>
+        <p:nvSpPr>
+          <p:cNvPr id="26" name="TextBox 25"/>
           <p:cNvSpPr txBox="1"/>
           <p:nvPr/>
         </p:nvSpPr>

--- a/Arquitectura de Sistemas Computacionales/Clases/Clase 12 - Pruebas de rendimiento y preparacion final/Presentacion.pptx
+++ b/Arquitectura de Sistemas Computacionales/Clases/Clase 12 - Pruebas de rendimiento y preparacion final/Presentacion.pptx
@@ -4508,7 +4508,7 @@
               </a:spcAft>
             </a:pPr>
             <a:r>
-              <a:rPr sz="1600" b="1" i="0">
+              <a:rPr sz="1700" b="1" i="0">
                 <a:solidFill>
                   <a:srgbClr val="333333"/>
                 </a:solidFill>
@@ -4517,7 +4517,7 @@
               <a:t>1.</a:t>
             </a:r>
             <a:r>
-              <a:rPr sz="1600" b="0" i="0">
+              <a:rPr sz="1700" b="0" i="0">
                 <a:solidFill>
                   <a:srgbClr val="333333"/>
                 </a:solidFill>
@@ -4533,7 +4533,7 @@
               </a:spcAft>
             </a:pPr>
             <a:r>
-              <a:rPr sz="1600" b="0" i="0">
+              <a:rPr sz="1700" b="0" i="0">
                 <a:solidFill>
                   <a:srgbClr val="333333"/>
                 </a:solidFill>
@@ -4542,7 +4542,7 @@
               <a:t>–   </a:t>
             </a:r>
             <a:r>
-              <a:rPr sz="1600" b="1" i="0">
+              <a:rPr sz="1700" b="1" i="0">
                 <a:solidFill>
                   <a:srgbClr val="333333"/>
                 </a:solidFill>
@@ -4551,7 +4551,7 @@
               <a:t>2.</a:t>
             </a:r>
             <a:r>
-              <a:rPr sz="1600" b="0" i="0">
+              <a:rPr sz="1700" b="0" i="0">
                 <a:solidFill>
                   <a:srgbClr val="333333"/>
                 </a:solidFill>
@@ -4567,7 +4567,7 @@
               </a:spcAft>
             </a:pPr>
             <a:r>
-              <a:rPr sz="1600" b="0" i="0">
+              <a:rPr sz="1700" b="0" i="0">
                 <a:solidFill>
                   <a:srgbClr val="333333"/>
                 </a:solidFill>
@@ -4576,7 +4576,7 @@
               <a:t>–   </a:t>
             </a:r>
             <a:r>
-              <a:rPr sz="1600" b="1" i="0">
+              <a:rPr sz="1700" b="1" i="0">
                 <a:solidFill>
                   <a:srgbClr val="333333"/>
                 </a:solidFill>
@@ -4585,7 +4585,7 @@
               <a:t>3.</a:t>
             </a:r>
             <a:r>
-              <a:rPr sz="1600" b="0" i="0">
+              <a:rPr sz="1700" b="0" i="0">
                 <a:solidFill>
                   <a:srgbClr val="333333"/>
                 </a:solidFill>
@@ -4601,7 +4601,7 @@
               </a:spcAft>
             </a:pPr>
             <a:r>
-              <a:rPr sz="1600" b="0" i="0">
+              <a:rPr sz="1700" b="0" i="0">
                 <a:solidFill>
                   <a:srgbClr val="333333"/>
                 </a:solidFill>
@@ -4610,7 +4610,7 @@
               <a:t>–   </a:t>
             </a:r>
             <a:r>
-              <a:rPr sz="1600" b="1" i="0">
+              <a:rPr sz="1700" b="1" i="0">
                 <a:solidFill>
                   <a:srgbClr val="333333"/>
                 </a:solidFill>
@@ -4619,7 +4619,7 @@
               <a:t>4.</a:t>
             </a:r>
             <a:r>
-              <a:rPr sz="1600" b="0" i="0">
+              <a:rPr sz="1700" b="0" i="0">
                 <a:solidFill>
                   <a:srgbClr val="333333"/>
                 </a:solidFill>
@@ -4635,7 +4635,7 @@
               </a:spcAft>
             </a:pPr>
             <a:r>
-              <a:rPr sz="1600" b="0" i="0">
+              <a:rPr sz="1700" b="0" i="0">
                 <a:solidFill>
                   <a:srgbClr val="333333"/>
                 </a:solidFill>
@@ -4644,7 +4644,7 @@
               <a:t>–   </a:t>
             </a:r>
             <a:r>
-              <a:rPr sz="1600" b="1" i="0">
+              <a:rPr sz="1700" b="1" i="0">
                 <a:solidFill>
                   <a:srgbClr val="333333"/>
                 </a:solidFill>
@@ -4653,7 +4653,7 @@
               <a:t>5.</a:t>
             </a:r>
             <a:r>
-              <a:rPr sz="1600" b="0" i="0">
+              <a:rPr sz="1700" b="0" i="0">
                 <a:solidFill>
                   <a:srgbClr val="333333"/>
                 </a:solidFill>
@@ -5700,7 +5700,7 @@
               </a:spcAft>
             </a:pPr>
             <a:r>
-              <a:rPr sz="1600" b="0" i="0">
+              <a:rPr sz="2000" b="0" i="0">
                 <a:solidFill>
                   <a:srgbClr val="333333"/>
                 </a:solidFill>
@@ -5709,7 +5709,7 @@
               <a:t>–   </a:t>
             </a:r>
             <a:r>
-              <a:rPr sz="1600" b="1" i="0">
+              <a:rPr sz="2000" b="1" i="0">
                 <a:solidFill>
                   <a:srgbClr val="333333"/>
                 </a:solidFill>
@@ -5718,7 +5718,7 @@
               <a:t>0–10</a:t>
             </a:r>
             <a:r>
-              <a:rPr sz="1600" b="0" i="0">
+              <a:rPr sz="2000" b="0" i="0">
                 <a:solidFill>
                   <a:srgbClr val="333333"/>
                 </a:solidFill>
@@ -5734,7 +5734,7 @@
               </a:spcAft>
             </a:pPr>
             <a:r>
-              <a:rPr sz="1600" b="1" i="0">
+              <a:rPr sz="2000" b="1" i="0">
                 <a:solidFill>
                   <a:srgbClr val="333333"/>
                 </a:solidFill>
@@ -5743,7 +5743,7 @@
               <a:t>10–40</a:t>
             </a:r>
             <a:r>
-              <a:rPr sz="1600" b="0" i="0">
+              <a:rPr sz="2000" b="0" i="0">
                 <a:solidFill>
                   <a:srgbClr val="333333"/>
                 </a:solidFill>
@@ -5759,7 +5759,7 @@
               </a:spcAft>
             </a:pPr>
             <a:r>
-              <a:rPr sz="1600" b="0" i="0">
+              <a:rPr sz="2000" b="0" i="0">
                 <a:solidFill>
                   <a:srgbClr val="333333"/>
                 </a:solidFill>
@@ -5768,7 +5768,7 @@
               <a:t>–   </a:t>
             </a:r>
             <a:r>
-              <a:rPr sz="1600" b="1" i="0">
+              <a:rPr sz="2000" b="1" i="0">
                 <a:solidFill>
                   <a:srgbClr val="333333"/>
                 </a:solidFill>
@@ -5777,7 +5777,7 @@
               <a:t>40–100</a:t>
             </a:r>
             <a:r>
-              <a:rPr sz="1600" b="0" i="0">
+              <a:rPr sz="2000" b="0" i="0">
                 <a:solidFill>
                   <a:srgbClr val="333333"/>
                 </a:solidFill>
@@ -5793,7 +5793,7 @@
               </a:spcAft>
             </a:pPr>
             <a:r>
-              <a:rPr sz="1600" b="1" i="0">
+              <a:rPr sz="2000" b="1" i="0">
                 <a:solidFill>
                   <a:srgbClr val="333333"/>
                 </a:solidFill>
@@ -5802,7 +5802,7 @@
               <a:t>100–115</a:t>
             </a:r>
             <a:r>
-              <a:rPr sz="1600" b="0" i="0">
+              <a:rPr sz="2000" b="0" i="0">
                 <a:solidFill>
                   <a:srgbClr val="333333"/>
                 </a:solidFill>
@@ -5818,7 +5818,7 @@
               </a:spcAft>
             </a:pPr>
             <a:r>
-              <a:rPr sz="1600" b="1" i="0">
+              <a:rPr sz="2000" b="1" i="0">
                 <a:solidFill>
                   <a:srgbClr val="333333"/>
                 </a:solidFill>
@@ -5827,7 +5827,7 @@
               <a:t>115–120</a:t>
             </a:r>
             <a:r>
-              <a:rPr sz="1600" b="0" i="0">
+              <a:rPr sz="2000" b="0" i="0">
                 <a:solidFill>
                   <a:srgbClr val="333333"/>
                 </a:solidFill>
@@ -6047,7 +6047,7 @@
               </a:spcAft>
             </a:pPr>
             <a:r>
-              <a:rPr sz="1600" b="0" i="0">
+              <a:rPr sz="2000" b="0" i="0">
                 <a:solidFill>
                   <a:srgbClr val="333333"/>
                 </a:solidFill>
@@ -6063,7 +6063,7 @@
               </a:spcAft>
             </a:pPr>
             <a:r>
-              <a:rPr sz="1600" b="0" i="0">
+              <a:rPr sz="2000" b="0" i="0">
                 <a:solidFill>
                   <a:srgbClr val="333333"/>
                 </a:solidFill>
@@ -6079,7 +6079,7 @@
               </a:spcAft>
             </a:pPr>
             <a:r>
-              <a:rPr sz="1600" b="0" i="0">
+              <a:rPr sz="2000" b="0" i="0">
                 <a:solidFill>
                   <a:srgbClr val="333333"/>
                 </a:solidFill>
@@ -6299,7 +6299,7 @@
               </a:spcAft>
             </a:pPr>
             <a:r>
-              <a:rPr sz="1600" b="0" i="0">
+              <a:rPr sz="2000" b="0" i="0">
                 <a:solidFill>
                   <a:srgbClr val="333333"/>
                 </a:solidFill>
@@ -6308,7 +6308,7 @@
               <a:t>–   </a:t>
             </a:r>
             <a:r>
-              <a:rPr sz="1600" b="1" i="0">
+              <a:rPr sz="2000" b="1" i="0">
                 <a:solidFill>
                   <a:srgbClr val="333333"/>
                 </a:solidFill>
@@ -6317,7 +6317,7 @@
               <a:t>Entregable:</a:t>
             </a:r>
             <a:r>
-              <a:rPr sz="1600" b="0" i="0">
+              <a:rPr sz="2000" b="0" i="0">
                 <a:solidFill>
                   <a:srgbClr val="333333"/>
                 </a:solidFill>
@@ -6333,7 +6333,7 @@
               </a:spcAft>
             </a:pPr>
             <a:r>
-              <a:rPr sz="1600" b="0" i="0">
+              <a:rPr sz="2000" b="0" i="0">
                 <a:solidFill>
                   <a:srgbClr val="333333"/>
                 </a:solidFill>
@@ -6342,7 +6342,7 @@
               <a:t>–   Herramienta: </a:t>
             </a:r>
             <a:r>
-              <a:rPr sz="1600" b="1" i="0">
+              <a:rPr sz="2000" b="1" i="0">
                 <a:solidFill>
                   <a:srgbClr val="333333"/>
                 </a:solidFill>
@@ -6358,7 +6358,7 @@
               </a:spcAft>
             </a:pPr>
             <a:r>
-              <a:rPr sz="1600" b="0" i="0">
+              <a:rPr sz="2000" b="0" i="0">
                 <a:solidFill>
                   <a:srgbClr val="333333"/>
                 </a:solidFill>
@@ -6367,7 +6367,7 @@
               <a:t>–   Todo lo que construyan hoy entra al </a:t>
             </a:r>
             <a:r>
-              <a:rPr sz="1600" b="1" i="0">
+              <a:rPr sz="2000" b="1" i="0">
                 <a:solidFill>
                   <a:srgbClr val="333333"/>
                 </a:solidFill>
@@ -6376,7 +6376,7 @@
               <a:t>informe/repo del PI</a:t>
             </a:r>
             <a:r>
-              <a:rPr sz="1600" b="0" i="0">
+              <a:rPr sz="2000" b="0" i="0">
                 <a:solidFill>
                   <a:srgbClr val="333333"/>
                 </a:solidFill>
@@ -6392,7 +6392,7 @@
               </a:spcAft>
             </a:pPr>
             <a:r>
-              <a:rPr sz="1600" b="0" i="0">
+              <a:rPr sz="2000" b="0" i="0">
                 <a:solidFill>
                   <a:srgbClr val="333333"/>
                 </a:solidFill>
@@ -6612,7 +6612,7 @@
               </a:spcAft>
             </a:pPr>
             <a:r>
-              <a:rPr sz="1600" b="0" i="0">
+              <a:rPr sz="2000" b="0" i="0">
                 <a:solidFill>
                   <a:srgbClr val="333333"/>
                 </a:solidFill>
@@ -6628,7 +6628,7 @@
               </a:spcAft>
             </a:pPr>
             <a:r>
-              <a:rPr sz="1600" b="0" i="0">
+              <a:rPr sz="2000" b="0" i="0">
                 <a:solidFill>
                   <a:srgbClr val="333333"/>
                 </a:solidFill>
@@ -6644,7 +6644,7 @@
               </a:spcAft>
             </a:pPr>
             <a:r>
-              <a:rPr sz="1600" b="0" i="0">
+              <a:rPr sz="2000" b="0" i="0">
                 <a:solidFill>
                   <a:srgbClr val="333333"/>
                 </a:solidFill>
@@ -6864,7 +6864,7 @@
               </a:spcAft>
             </a:pPr>
             <a:r>
-              <a:rPr sz="1600" b="0" i="0">
+              <a:rPr sz="2000" b="0" i="0">
                 <a:solidFill>
                   <a:srgbClr val="333333"/>
                 </a:solidFill>
@@ -6880,7 +6880,7 @@
               </a:spcAft>
             </a:pPr>
             <a:r>
-              <a:rPr sz="1600" b="0" i="0">
+              <a:rPr sz="2000" b="0" i="0">
                 <a:solidFill>
                   <a:srgbClr val="333333"/>
                 </a:solidFill>
@@ -6896,7 +6896,7 @@
               </a:spcAft>
             </a:pPr>
             <a:r>
-              <a:rPr sz="1600" b="0" i="0">
+              <a:rPr sz="2000" b="0" i="0">
                 <a:solidFill>
                   <a:srgbClr val="333333"/>
                 </a:solidFill>
@@ -7116,7 +7116,7 @@
               </a:spcAft>
             </a:pPr>
             <a:r>
-              <a:rPr sz="1600" b="0" i="0">
+              <a:rPr sz="2000" b="0" i="0">
                 <a:solidFill>
                   <a:srgbClr val="333333"/>
                 </a:solidFill>
@@ -7132,7 +7132,7 @@
               </a:spcAft>
             </a:pPr>
             <a:r>
-              <a:rPr sz="1600" b="0" i="0">
+              <a:rPr sz="2000" b="0" i="0">
                 <a:solidFill>
                   <a:srgbClr val="333333"/>
                 </a:solidFill>

--- a/Arquitectura de Sistemas Computacionales/Clases/Clase 12 - Pruebas de rendimiento y preparacion final/Presentacion.pptx
+++ b/Arquitectura de Sistemas Computacionales/Clases/Clase 12 - Pruebas de rendimiento y preparacion final/Presentacion.pptx
@@ -3576,7 +3576,7 @@
                 </a:solidFill>
                 <a:latin typeface="Calibri"/>
               </a:rPr>
-              <a:t>Del boceto a ExamLab (diagrama)</a:t>
+              <a:t>Del boceto a la plataforma del curso (diagrama)</a:t>
             </a:r>
           </a:p>
         </p:txBody>
@@ -3610,7 +3610,7 @@
                 </a:solidFill>
                 <a:latin typeface="Calibri"/>
               </a:rPr>
-              <a:t>El diagrama se entrega como código Mermaid dentro de ExamLab, no como imagen</a:t>
+              <a:t>El diagrama se entrega como código Mermaid dentro de la plataforma del curso, no como imagen</a:t>
             </a:r>
           </a:p>
         </p:txBody>
@@ -4107,7 +4107,7 @@
                 </a:solidFill>
                 <a:latin typeface="Calibri"/>
               </a:rPr>
-              <a:t>Pega y renderiza en ExamLab</a:t>
+              <a:t>Pega y renderiza en la plataforma del curso</a:t>
             </a:r>
           </a:p>
           <a:p>
@@ -4123,7 +4123,7 @@
                 </a:solidFill>
                 <a:latin typeface="Calibri"/>
               </a:rPr>
-              <a:t>Pega ese codigo en la caja de texto de la pregunta y mira como lo dibuja la plataforma. Si no renderiza, corrige ahi mismo: lo que se califica es el diagrama renderizado dentro de ExamLab.</a:t>
+              <a:t>Pega ese codigo en la caja de texto de la pregunta y mira como lo dibuja la plataforma. Si no renderiza, corrige ahi mismo: lo que se califica es el diagrama renderizado dentro de la plataforma del curso.</a:t>
             </a:r>
           </a:p>
         </p:txBody>
@@ -4508,7 +4508,7 @@
               </a:spcAft>
             </a:pPr>
             <a:r>
-              <a:rPr sz="1700" b="1" i="0">
+              <a:rPr sz="1600" b="1" i="0">
                 <a:solidFill>
                   <a:srgbClr val="333333"/>
                 </a:solidFill>
@@ -4517,7 +4517,7 @@
               <a:t>1.</a:t>
             </a:r>
             <a:r>
-              <a:rPr sz="1700" b="0" i="0">
+              <a:rPr sz="1600" b="0" i="0">
                 <a:solidFill>
                   <a:srgbClr val="333333"/>
                 </a:solidFill>
@@ -4533,7 +4533,7 @@
               </a:spcAft>
             </a:pPr>
             <a:r>
-              <a:rPr sz="1700" b="0" i="0">
+              <a:rPr sz="1600" b="0" i="0">
                 <a:solidFill>
                   <a:srgbClr val="333333"/>
                 </a:solidFill>
@@ -4542,7 +4542,7 @@
               <a:t>–   </a:t>
             </a:r>
             <a:r>
-              <a:rPr sz="1700" b="1" i="0">
+              <a:rPr sz="1600" b="1" i="0">
                 <a:solidFill>
                   <a:srgbClr val="333333"/>
                 </a:solidFill>
@@ -4551,7 +4551,7 @@
               <a:t>2.</a:t>
             </a:r>
             <a:r>
-              <a:rPr sz="1700" b="0" i="0">
+              <a:rPr sz="1600" b="0" i="0">
                 <a:solidFill>
                   <a:srgbClr val="333333"/>
                 </a:solidFill>
@@ -4567,7 +4567,7 @@
               </a:spcAft>
             </a:pPr>
             <a:r>
-              <a:rPr sz="1700" b="0" i="0">
+              <a:rPr sz="1600" b="0" i="0">
                 <a:solidFill>
                   <a:srgbClr val="333333"/>
                 </a:solidFill>
@@ -4576,7 +4576,7 @@
               <a:t>–   </a:t>
             </a:r>
             <a:r>
-              <a:rPr sz="1700" b="1" i="0">
+              <a:rPr sz="1600" b="1" i="0">
                 <a:solidFill>
                   <a:srgbClr val="333333"/>
                 </a:solidFill>
@@ -4585,13 +4585,13 @@
               <a:t>3.</a:t>
             </a:r>
             <a:r>
-              <a:rPr sz="1700" b="0" i="0">
+              <a:rPr sz="1600" b="0" i="0">
                 <a:solidFill>
                   <a:srgbClr val="333333"/>
                 </a:solidFill>
                 <a:latin typeface="Calibri"/>
               </a:rPr>
-              <a:t> Paso 3: escriban en ExamLab el sequenceDiagram del camino critico con el presupuesto de latencia repartido por salto, verificando que la suma de los tramos sea menor o igual al objetivo de p95 y que la nota final muestre el margen restante en milisegundos.</a:t>
+              <a:t> Paso 3: escriban en la plataforma del curso el sequenceDiagram del camino critico con el presupuesto de latencia repartido por salto, verificando que la suma de los tramos sea menor o igual al objetivo de p95 y que la nota final muestre el margen restante en milisegundos.</a:t>
             </a:r>
           </a:p>
           <a:p>
@@ -4601,7 +4601,7 @@
               </a:spcAft>
             </a:pPr>
             <a:r>
-              <a:rPr sz="1700" b="0" i="0">
+              <a:rPr sz="1600" b="0" i="0">
                 <a:solidFill>
                   <a:srgbClr val="333333"/>
                 </a:solidFill>
@@ -4610,7 +4610,7 @@
               <a:t>–   </a:t>
             </a:r>
             <a:r>
-              <a:rPr sz="1700" b="1" i="0">
+              <a:rPr sz="1600" b="1" i="0">
                 <a:solidFill>
                   <a:srgbClr val="333333"/>
                 </a:solidFill>
@@ -4619,7 +4619,7 @@
               <a:t>4.</a:t>
             </a:r>
             <a:r>
-              <a:rPr sz="1700" b="0" i="0">
+              <a:rPr sz="1600" b="0" i="0">
                 <a:solidFill>
                   <a:srgbClr val="333333"/>
                 </a:solidFill>
@@ -4635,7 +4635,7 @@
               </a:spcAft>
             </a:pPr>
             <a:r>
-              <a:rPr sz="1700" b="0" i="0">
+              <a:rPr sz="1600" b="0" i="0">
                 <a:solidFill>
                   <a:srgbClr val="333333"/>
                 </a:solidFill>
@@ -4644,7 +4644,7 @@
               <a:t>–   </a:t>
             </a:r>
             <a:r>
-              <a:rPr sz="1700" b="1" i="0">
+              <a:rPr sz="1600" b="1" i="0">
                 <a:solidFill>
                   <a:srgbClr val="333333"/>
                 </a:solidFill>
@@ -4653,13 +4653,13 @@
               <a:t>5.</a:t>
             </a:r>
             <a:r>
-              <a:rPr sz="1700" b="0" i="0">
+              <a:rPr sz="1600" b="0" i="0">
                 <a:solidFill>
                   <a:srgbClr val="333333"/>
                 </a:solidFill>
                 <a:latin typeface="Calibri"/>
               </a:rPr>
-              <a:t> Paso 5: cierren los 5 items del backlog de la Clase 11 dejando registro de los residuales, dejen el paquete casi final ordenado en el repositorio o el Drive y suban las 6 preguntas a ExamLab (modulo Talleres) antes del domingo 23:59, verificando que el cuello de botella declarado en el analisis sea el mismo que muestra el diagrama de secuencia.</a:t>
+              <a:t> Paso 5: cierren los 5 items del backlog de la Clase 11 dejando registro de los residuales, dejen el paquete casi final ordenado en el repositorio o el Drive y suban las 6 preguntas a la plataforma del curso (modulo Talleres) antes del en la fecha que indique el docente, verificando que el cuello de botella declarado en el analisis sea el mismo que muestra el diagrama de secuencia.</a:t>
             </a:r>
           </a:p>
         </p:txBody>
@@ -5116,7 +5116,7 @@
                 </a:solidFill>
                 <a:latin typeface="Calibri"/>
               </a:rPr>
-              <a:t>Subir evidencias al paquete CloudLite (Drive/repo) y a ExamLab (https://uniaj.examlab.workers.dev/) domingo 23:59.</a:t>
+              <a:t>Subir evidencias al paquete CloudLite (Drive/repo) y a la plataforma del curso en la fecha que indique el docente.</a:t>
             </a:r>
           </a:p>
         </p:txBody>
@@ -5833,7 +5833,7 @@
                 </a:solidFill>
                 <a:latin typeface="Calibri"/>
               </a:rPr>
-              <a:t> Cierre: criterio de éxito + plazo domingo 23:59.</a:t>
+              <a:t> Cierre: criterio de éxito + plazo en la fecha que indique el docente.</a:t>
             </a:r>
           </a:p>
         </p:txBody>
@@ -6398,7 +6398,7 @@
                 </a:solidFill>
                 <a:latin typeface="Calibri"/>
               </a:rPr>
-              <a:t>–   Individual por defecto · el docente puede autorizar equipos de 2–3; la entrega en ExamLab siempre es individual.</a:t>
+              <a:t>–   Individual por defecto · el docente puede autorizar equipos de 2–3; la entrega en la plataforma del curso siempre es individual.</a:t>
             </a:r>
           </a:p>
         </p:txBody>
@@ -8795,7 +8795,7 @@
                 </a:solidFill>
                 <a:latin typeface="Calibri"/>
               </a:rPr>
-              <a:t>ExamLab</a:t>
+              <a:t>la plataforma del curso</a:t>
             </a:r>
           </a:p>
           <a:p>

--- a/Arquitectura de Sistemas Computacionales/Clases/Clase 12 - Pruebas de rendimiento y preparacion final/Presentacion.pptx
+++ b/Arquitectura de Sistemas Computacionales/Clases/Clase 12 - Pruebas de rendimiento y preparacion final/Presentacion.pptx
@@ -3470,7 +3470,7 @@
         <p:spPr>
           <a:xfrm>
             <a:off x="0" y="0"/>
-            <a:ext cx="12191695" cy="1170432"/>
+            <a:ext cx="12191695" cy="960120"/>
           </a:xfrm>
           <a:prstGeom prst="rect">
             <a:avLst/>
@@ -3512,7 +3512,7 @@
         </p:nvSpPr>
         <p:spPr>
           <a:xfrm>
-            <a:off x="0" y="1170432"/>
+            <a:off x="0" y="960120"/>
             <a:ext cx="12191695" cy="41148"/>
           </a:xfrm>
           <a:prstGeom prst="rect">
@@ -3556,7 +3556,7 @@
         <p:spPr>
           <a:xfrm>
             <a:off x="457200" y="164592"/>
-            <a:ext cx="11277295" cy="384048"/>
+            <a:ext cx="11277295" cy="502920"/>
           </a:xfrm>
           <a:prstGeom prst="rect">
             <a:avLst/>
@@ -3576,7 +3576,7 @@
                 </a:solidFill>
                 <a:latin typeface="Calibri"/>
               </a:rPr>
-              <a:t>Del boceto a la plataforma del curso (diagrama)</a:t>
+              <a:t>PI CloudLite — entregable de hoy</a:t>
             </a:r>
           </a:p>
         </p:txBody>
@@ -3589,8 +3589,8 @@
         </p:nvSpPr>
         <p:spPr>
           <a:xfrm>
-            <a:off x="457200" y="566928"/>
-            <a:ext cx="11277295" cy="411480"/>
+            <a:off x="457200" y="1170432"/>
+            <a:ext cx="11277295" cy="5230368"/>
           </a:xfrm>
           <a:prstGeom prst="rect">
             <a:avLst/>
@@ -3603,705 +3603,119 @@
           </a:bodyPr>
           <a:lstStyle/>
           <a:p>
-            <a:r>
-              <a:rPr sz="1400" b="0" i="0">
-                <a:solidFill>
-                  <a:srgbClr val="B8D8EE"/>
-                </a:solidFill>
-                <a:latin typeface="Calibri"/>
-              </a:rPr>
-              <a:t>El diagrama se entrega como código Mermaid dentro de la plataforma del curso, no como imagen</a:t>
-            </a:r>
-          </a:p>
-        </p:txBody>
-      </p:sp>
-      <p:sp>
-        <p:nvSpPr>
-          <p:cNvPr id="6" name="Rounded Rectangle 5"/>
-          <p:cNvSpPr/>
-          <p:nvPr/>
-        </p:nvSpPr>
-        <p:spPr>
-          <a:xfrm>
-            <a:off x="457200" y="1659636"/>
-            <a:ext cx="11277295" cy="1051560"/>
-          </a:xfrm>
-          <a:prstGeom prst="roundRect">
-            <a:avLst>
-              <a:gd name="adj" fmla="val 12000"/>
-            </a:avLst>
-          </a:prstGeom>
-          <a:solidFill>
-            <a:srgbClr val="F2F2F2"/>
-          </a:solidFill>
-          <a:ln>
-            <a:noFill/>
-          </a:ln>
-        </p:spPr>
-        <p:style>
-          <a:lnRef idx="1">
-            <a:schemeClr val="accent1"/>
-          </a:lnRef>
-          <a:fillRef idx="3">
-            <a:schemeClr val="accent1"/>
-          </a:fillRef>
-          <a:effectRef idx="2">
-            <a:schemeClr val="accent1"/>
-          </a:effectRef>
-          <a:fontRef idx="minor">
-            <a:schemeClr val="lt1"/>
-          </a:fontRef>
-        </p:style>
-        <p:txBody>
-          <a:bodyPr rtlCol="0" anchor="ctr"/>
-          <a:lstStyle/>
-          <a:p>
-            <a:pPr algn="ctr"/>
-          </a:p>
-        </p:txBody>
-      </p:sp>
-      <p:sp>
-        <p:nvSpPr>
-          <p:cNvPr id="7" name="Rounded Rectangle 6"/>
-          <p:cNvSpPr/>
-          <p:nvPr/>
-        </p:nvSpPr>
-        <p:spPr>
-          <a:xfrm>
-            <a:off x="594360" y="1965960"/>
-            <a:ext cx="438912" cy="438912"/>
-          </a:xfrm>
-          <a:prstGeom prst="roundRect">
-            <a:avLst>
-              <a:gd name="adj" fmla="val 12000"/>
-            </a:avLst>
-          </a:prstGeom>
-          <a:solidFill>
-            <a:srgbClr val="095292"/>
-          </a:solidFill>
-          <a:ln>
-            <a:noFill/>
-          </a:ln>
-        </p:spPr>
-        <p:style>
-          <a:lnRef idx="1">
-            <a:schemeClr val="accent1"/>
-          </a:lnRef>
-          <a:fillRef idx="3">
-            <a:schemeClr val="accent1"/>
-          </a:fillRef>
-          <a:effectRef idx="2">
-            <a:schemeClr val="accent1"/>
-          </a:effectRef>
-          <a:fontRef idx="minor">
-            <a:schemeClr val="lt1"/>
-          </a:fontRef>
-        </p:style>
-        <p:txBody>
-          <a:bodyPr rtlCol="0" anchor="ctr"/>
-          <a:lstStyle/>
-          <a:p>
-            <a:pPr algn="ctr"/>
-          </a:p>
-        </p:txBody>
-      </p:sp>
-      <p:sp>
-        <p:nvSpPr>
-          <p:cNvPr id="8" name="TextBox 7"/>
-          <p:cNvSpPr txBox="1"/>
-          <p:nvPr/>
-        </p:nvSpPr>
-        <p:spPr>
-          <a:xfrm>
-            <a:off x="594360" y="1965960"/>
-            <a:ext cx="438912" cy="438912"/>
-          </a:xfrm>
-          <a:prstGeom prst="rect">
-            <a:avLst/>
-          </a:prstGeom>
-          <a:noFill/>
-        </p:spPr>
-        <p:txBody>
-          <a:bodyPr wrap="square" anchor="ctr"/>
-          <a:lstStyle/>
-          <a:p>
-            <a:pPr algn="ctr"/>
-            <a:r>
-              <a:rPr sz="1600" b="1" i="0">
-                <a:solidFill>
-                  <a:srgbClr val="FFFFFF"/>
-                </a:solidFill>
-                <a:latin typeface="Calibri"/>
-              </a:rPr>
-              <a:t>1</a:t>
-            </a:r>
-          </a:p>
-        </p:txBody>
-      </p:sp>
-      <p:sp>
-        <p:nvSpPr>
-          <p:cNvPr id="9" name="TextBox 8"/>
-          <p:cNvSpPr txBox="1"/>
-          <p:nvPr/>
-        </p:nvSpPr>
-        <p:spPr>
-          <a:xfrm>
-            <a:off x="1188720" y="1751076"/>
-            <a:ext cx="10271455" cy="886968"/>
-          </a:xfrm>
-          <a:prstGeom prst="rect">
-            <a:avLst/>
-          </a:prstGeom>
-          <a:noFill/>
-        </p:spPr>
-        <p:txBody>
-          <a:bodyPr wrap="square" anchor="ctr"/>
-          <a:lstStyle/>
-          <a:p>
-            <a:r>
-              <a:rPr sz="1500" b="1" i="0">
-                <a:solidFill>
-                  <a:srgbClr val="095292"/>
-                </a:solidFill>
-                <a:latin typeface="Calibri"/>
-              </a:rPr>
-              <a:t>Disena visual</a:t>
-            </a:r>
-          </a:p>
-          <a:p>
             <a:pPr>
-              <a:spcBef>
-                <a:spcPts val="200"/>
-              </a:spcBef>
+              <a:spcAft>
+                <a:spcPts val="800"/>
+              </a:spcAft>
             </a:pPr>
             <a:r>
-              <a:rPr sz="1300" b="0" i="0">
+              <a:rPr sz="2000" b="0" i="0">
                 <a:solidFill>
                   <a:srgbClr val="333333"/>
                 </a:solidFill>
                 <a:latin typeface="Calibri"/>
               </a:rPr>
-              <a:t>Dibuja el diagrama como quieras en Excalidraw o draw.io: es mas rapido arrastrar cajas que escribir codigo, y ahi es donde piensas el modelo.</a:t>
-            </a:r>
-          </a:p>
-        </p:txBody>
-      </p:sp>
-      <p:sp>
-        <p:nvSpPr>
-          <p:cNvPr id="10" name="Rounded Rectangle 9"/>
-          <p:cNvSpPr/>
-          <p:nvPr/>
-        </p:nvSpPr>
-        <p:spPr>
-          <a:xfrm>
-            <a:off x="457200" y="2802636"/>
-            <a:ext cx="11277295" cy="1051560"/>
-          </a:xfrm>
-          <a:prstGeom prst="roundRect">
-            <a:avLst>
-              <a:gd name="adj" fmla="val 12000"/>
-            </a:avLst>
-          </a:prstGeom>
-          <a:solidFill>
-            <a:srgbClr val="E8F4FA"/>
-          </a:solidFill>
-          <a:ln>
-            <a:noFill/>
-          </a:ln>
-        </p:spPr>
-        <p:style>
-          <a:lnRef idx="1">
-            <a:schemeClr val="accent1"/>
-          </a:lnRef>
-          <a:fillRef idx="3">
-            <a:schemeClr val="accent1"/>
-          </a:fillRef>
-          <a:effectRef idx="2">
-            <a:schemeClr val="accent1"/>
-          </a:effectRef>
-          <a:fontRef idx="minor">
-            <a:schemeClr val="lt1"/>
-          </a:fontRef>
-        </p:style>
-        <p:txBody>
-          <a:bodyPr rtlCol="0" anchor="ctr"/>
-          <a:lstStyle/>
-          <a:p>
-            <a:pPr algn="ctr"/>
-          </a:p>
-        </p:txBody>
-      </p:sp>
-      <p:sp>
-        <p:nvSpPr>
-          <p:cNvPr id="11" name="Rounded Rectangle 10"/>
-          <p:cNvSpPr/>
-          <p:nvPr/>
-        </p:nvSpPr>
-        <p:spPr>
-          <a:xfrm>
-            <a:off x="594360" y="3108960"/>
-            <a:ext cx="438912" cy="438912"/>
-          </a:xfrm>
-          <a:prstGeom prst="roundRect">
-            <a:avLst>
-              <a:gd name="adj" fmla="val 12000"/>
-            </a:avLst>
-          </a:prstGeom>
-          <a:solidFill>
-            <a:srgbClr val="095292"/>
-          </a:solidFill>
-          <a:ln>
-            <a:noFill/>
-          </a:ln>
-        </p:spPr>
-        <p:style>
-          <a:lnRef idx="1">
-            <a:schemeClr val="accent1"/>
-          </a:lnRef>
-          <a:fillRef idx="3">
-            <a:schemeClr val="accent1"/>
-          </a:fillRef>
-          <a:effectRef idx="2">
-            <a:schemeClr val="accent1"/>
-          </a:effectRef>
-          <a:fontRef idx="minor">
-            <a:schemeClr val="lt1"/>
-          </a:fontRef>
-        </p:style>
-        <p:txBody>
-          <a:bodyPr rtlCol="0" anchor="ctr"/>
-          <a:lstStyle/>
-          <a:p>
-            <a:pPr algn="ctr"/>
-          </a:p>
-        </p:txBody>
-      </p:sp>
-      <p:sp>
-        <p:nvSpPr>
-          <p:cNvPr id="12" name="TextBox 11"/>
-          <p:cNvSpPr txBox="1"/>
-          <p:nvPr/>
-        </p:nvSpPr>
-        <p:spPr>
-          <a:xfrm>
-            <a:off x="594360" y="3108960"/>
-            <a:ext cx="438912" cy="438912"/>
-          </a:xfrm>
-          <a:prstGeom prst="rect">
-            <a:avLst/>
-          </a:prstGeom>
-          <a:noFill/>
-        </p:spPr>
-        <p:txBody>
-          <a:bodyPr wrap="square" anchor="ctr"/>
-          <a:lstStyle/>
-          <a:p>
-            <a:pPr algn="ctr"/>
-            <a:r>
-              <a:rPr sz="1600" b="1" i="0">
-                <a:solidFill>
-                  <a:srgbClr val="FFFFFF"/>
-                </a:solidFill>
-                <a:latin typeface="Calibri"/>
-              </a:rPr>
-              <a:t>2</a:t>
-            </a:r>
-          </a:p>
-        </p:txBody>
-      </p:sp>
-      <p:sp>
-        <p:nvSpPr>
-          <p:cNvPr id="13" name="TextBox 12"/>
-          <p:cNvSpPr txBox="1"/>
-          <p:nvPr/>
-        </p:nvSpPr>
-        <p:spPr>
-          <a:xfrm>
-            <a:off x="1188720" y="2894076"/>
-            <a:ext cx="10271455" cy="886968"/>
-          </a:xfrm>
-          <a:prstGeom prst="rect">
-            <a:avLst/>
-          </a:prstGeom>
-          <a:noFill/>
-        </p:spPr>
-        <p:txBody>
-          <a:bodyPr wrap="square" anchor="ctr"/>
-          <a:lstStyle/>
-          <a:p>
-            <a:r>
-              <a:rPr sz="1500" b="1" i="0">
-                <a:solidFill>
-                  <a:srgbClr val="095292"/>
-                </a:solidFill>
-                <a:latin typeface="Calibri"/>
-              </a:rPr>
-              <a:t>Traduce con IA</a:t>
+              <a:t>–   </a:t>
+            </a:r>
+            <a:r>
+              <a:rPr sz="2000" b="1" i="0">
+                <a:solidFill>
+                  <a:srgbClr val="333333"/>
+                </a:solidFill>
+                <a:latin typeface="Calibri"/>
+              </a:rPr>
+              <a:t>Entregable:</a:t>
+            </a:r>
+            <a:r>
+              <a:rPr sz="2000" b="0" i="0">
+                <a:solidFill>
+                  <a:srgbClr val="333333"/>
+                </a:solidFill>
+                <a:latin typeface="Calibri"/>
+              </a:rPr>
+              <a:t> Sección Rendimiento + guion de pitch + paquete casi-final</a:t>
             </a:r>
           </a:p>
           <a:p>
             <a:pPr>
-              <a:spcBef>
-                <a:spcPts val="200"/>
-              </a:spcBef>
+              <a:spcAft>
+                <a:spcPts val="800"/>
+              </a:spcAft>
             </a:pPr>
             <a:r>
-              <a:rPr sz="1300" b="0" i="0">
+              <a:rPr sz="2000" b="0" i="0">
                 <a:solidFill>
                   <a:srgbClr val="333333"/>
                 </a:solidFill>
                 <a:latin typeface="Calibri"/>
               </a:rPr>
-              <a:t>Copia o describe tu boceto a una IA y pidele el codigo Mermaid: «convierte este diagrama a Mermaid usando sequenceDiagram». Revisa el resultado: la IA acierta la sintaxis, no tu modelo.</a:t>
-            </a:r>
-          </a:p>
-        </p:txBody>
-      </p:sp>
-      <p:sp>
-        <p:nvSpPr>
-          <p:cNvPr id="14" name="Rounded Rectangle 13"/>
-          <p:cNvSpPr/>
-          <p:nvPr/>
-        </p:nvSpPr>
-        <p:spPr>
-          <a:xfrm>
-            <a:off x="457200" y="3945636"/>
-            <a:ext cx="11277295" cy="1051560"/>
-          </a:xfrm>
-          <a:prstGeom prst="roundRect">
-            <a:avLst>
-              <a:gd name="adj" fmla="val 12000"/>
-            </a:avLst>
-          </a:prstGeom>
-          <a:solidFill>
-            <a:srgbClr val="F2F2F2"/>
-          </a:solidFill>
-          <a:ln>
-            <a:noFill/>
-          </a:ln>
-        </p:spPr>
-        <p:style>
-          <a:lnRef idx="1">
-            <a:schemeClr val="accent1"/>
-          </a:lnRef>
-          <a:fillRef idx="3">
-            <a:schemeClr val="accent1"/>
-          </a:fillRef>
-          <a:effectRef idx="2">
-            <a:schemeClr val="accent1"/>
-          </a:effectRef>
-          <a:fontRef idx="minor">
-            <a:schemeClr val="lt1"/>
-          </a:fontRef>
-        </p:style>
-        <p:txBody>
-          <a:bodyPr rtlCol="0" anchor="ctr"/>
-          <a:lstStyle/>
-          <a:p>
-            <a:pPr algn="ctr"/>
-          </a:p>
-        </p:txBody>
-      </p:sp>
-      <p:sp>
-        <p:nvSpPr>
-          <p:cNvPr id="15" name="Rounded Rectangle 14"/>
-          <p:cNvSpPr/>
-          <p:nvPr/>
-        </p:nvSpPr>
-        <p:spPr>
-          <a:xfrm>
-            <a:off x="594360" y="4251960"/>
-            <a:ext cx="438912" cy="438912"/>
-          </a:xfrm>
-          <a:prstGeom prst="roundRect">
-            <a:avLst>
-              <a:gd name="adj" fmla="val 12000"/>
-            </a:avLst>
-          </a:prstGeom>
-          <a:solidFill>
-            <a:srgbClr val="095292"/>
-          </a:solidFill>
-          <a:ln>
-            <a:noFill/>
-          </a:ln>
-        </p:spPr>
-        <p:style>
-          <a:lnRef idx="1">
-            <a:schemeClr val="accent1"/>
-          </a:lnRef>
-          <a:fillRef idx="3">
-            <a:schemeClr val="accent1"/>
-          </a:fillRef>
-          <a:effectRef idx="2">
-            <a:schemeClr val="accent1"/>
-          </a:effectRef>
-          <a:fontRef idx="minor">
-            <a:schemeClr val="lt1"/>
-          </a:fontRef>
-        </p:style>
-        <p:txBody>
-          <a:bodyPr rtlCol="0" anchor="ctr"/>
-          <a:lstStyle/>
-          <a:p>
-            <a:pPr algn="ctr"/>
-          </a:p>
-        </p:txBody>
-      </p:sp>
-      <p:sp>
-        <p:nvSpPr>
-          <p:cNvPr id="16" name="TextBox 15"/>
-          <p:cNvSpPr txBox="1"/>
-          <p:nvPr/>
-        </p:nvSpPr>
-        <p:spPr>
-          <a:xfrm>
-            <a:off x="594360" y="4251960"/>
-            <a:ext cx="438912" cy="438912"/>
-          </a:xfrm>
-          <a:prstGeom prst="rect">
-            <a:avLst/>
-          </a:prstGeom>
-          <a:noFill/>
-        </p:spPr>
-        <p:txBody>
-          <a:bodyPr wrap="square" anchor="ctr"/>
-          <a:lstStyle/>
-          <a:p>
-            <a:pPr algn="ctr"/>
-            <a:r>
-              <a:rPr sz="1600" b="1" i="0">
-                <a:solidFill>
-                  <a:srgbClr val="FFFFFF"/>
-                </a:solidFill>
-                <a:latin typeface="Calibri"/>
-              </a:rPr>
-              <a:t>3</a:t>
-            </a:r>
-          </a:p>
-        </p:txBody>
-      </p:sp>
-      <p:sp>
-        <p:nvSpPr>
-          <p:cNvPr id="17" name="TextBox 16"/>
-          <p:cNvSpPr txBox="1"/>
-          <p:nvPr/>
-        </p:nvSpPr>
-        <p:spPr>
-          <a:xfrm>
-            <a:off x="1188720" y="4037076"/>
-            <a:ext cx="10271455" cy="886968"/>
-          </a:xfrm>
-          <a:prstGeom prst="rect">
-            <a:avLst/>
-          </a:prstGeom>
-          <a:noFill/>
-        </p:spPr>
-        <p:txBody>
-          <a:bodyPr wrap="square" anchor="ctr"/>
-          <a:lstStyle/>
-          <a:p>
-            <a:r>
-              <a:rPr sz="1500" b="1" i="0">
-                <a:solidFill>
-                  <a:srgbClr val="095292"/>
-                </a:solidFill>
-                <a:latin typeface="Calibri"/>
-              </a:rPr>
-              <a:t>Pega y renderiza en la plataforma del curso</a:t>
+              <a:t>–   Herramienta: </a:t>
+            </a:r>
+            <a:r>
+              <a:rPr sz="2000" b="1" i="0">
+                <a:solidFill>
+                  <a:srgbClr val="333333"/>
+                </a:solidFill>
+                <a:latin typeface="Calibri"/>
+              </a:rPr>
+              <a:t>Google Docs · draw.io · (opcional) lab contenedor</a:t>
             </a:r>
           </a:p>
           <a:p>
             <a:pPr>
-              <a:spcBef>
-                <a:spcPts val="200"/>
-              </a:spcBef>
+              <a:spcAft>
+                <a:spcPts val="800"/>
+              </a:spcAft>
             </a:pPr>
             <a:r>
-              <a:rPr sz="1300" b="0" i="0">
+              <a:rPr sz="2000" b="0" i="0">
                 <a:solidFill>
                   <a:srgbClr val="333333"/>
                 </a:solidFill>
                 <a:latin typeface="Calibri"/>
               </a:rPr>
-              <a:t>Pega ese codigo en la caja de texto de la pregunta y mira como lo dibuja la plataforma. Si no renderiza, corrige ahi mismo: lo que se califica es el diagrama renderizado dentro de la plataforma del curso.</a:t>
-            </a:r>
-          </a:p>
-        </p:txBody>
-      </p:sp>
-      <p:sp>
-        <p:nvSpPr>
-          <p:cNvPr id="18" name="Rounded Rectangle 17"/>
-          <p:cNvSpPr/>
-          <p:nvPr/>
-        </p:nvSpPr>
-        <p:spPr>
-          <a:xfrm>
-            <a:off x="457200" y="5088636"/>
-            <a:ext cx="11277295" cy="1051560"/>
-          </a:xfrm>
-          <a:prstGeom prst="roundRect">
-            <a:avLst>
-              <a:gd name="adj" fmla="val 12000"/>
-            </a:avLst>
-          </a:prstGeom>
-          <a:solidFill>
-            <a:srgbClr val="E8F4FA"/>
-          </a:solidFill>
-          <a:ln>
-            <a:noFill/>
-          </a:ln>
-        </p:spPr>
-        <p:style>
-          <a:lnRef idx="1">
-            <a:schemeClr val="accent1"/>
-          </a:lnRef>
-          <a:fillRef idx="3">
-            <a:schemeClr val="accent1"/>
-          </a:fillRef>
-          <a:effectRef idx="2">
-            <a:schemeClr val="accent1"/>
-          </a:effectRef>
-          <a:fontRef idx="minor">
-            <a:schemeClr val="lt1"/>
-          </a:fontRef>
-        </p:style>
-        <p:txBody>
-          <a:bodyPr rtlCol="0" anchor="ctr"/>
-          <a:lstStyle/>
-          <a:p>
-            <a:pPr algn="ctr"/>
-          </a:p>
-        </p:txBody>
-      </p:sp>
-      <p:sp>
-        <p:nvSpPr>
-          <p:cNvPr id="19" name="Rounded Rectangle 18"/>
-          <p:cNvSpPr/>
-          <p:nvPr/>
-        </p:nvSpPr>
-        <p:spPr>
-          <a:xfrm>
-            <a:off x="594360" y="5394960"/>
-            <a:ext cx="438912" cy="438912"/>
-          </a:xfrm>
-          <a:prstGeom prst="roundRect">
-            <a:avLst>
-              <a:gd name="adj" fmla="val 12000"/>
-            </a:avLst>
-          </a:prstGeom>
-          <a:solidFill>
-            <a:srgbClr val="095292"/>
-          </a:solidFill>
-          <a:ln>
-            <a:noFill/>
-          </a:ln>
-        </p:spPr>
-        <p:style>
-          <a:lnRef idx="1">
-            <a:schemeClr val="accent1"/>
-          </a:lnRef>
-          <a:fillRef idx="3">
-            <a:schemeClr val="accent1"/>
-          </a:fillRef>
-          <a:effectRef idx="2">
-            <a:schemeClr val="accent1"/>
-          </a:effectRef>
-          <a:fontRef idx="minor">
-            <a:schemeClr val="lt1"/>
-          </a:fontRef>
-        </p:style>
-        <p:txBody>
-          <a:bodyPr rtlCol="0" anchor="ctr"/>
-          <a:lstStyle/>
-          <a:p>
-            <a:pPr algn="ctr"/>
-          </a:p>
-        </p:txBody>
-      </p:sp>
-      <p:sp>
-        <p:nvSpPr>
-          <p:cNvPr id="20" name="TextBox 19"/>
-          <p:cNvSpPr txBox="1"/>
-          <p:nvPr/>
-        </p:nvSpPr>
-        <p:spPr>
-          <a:xfrm>
-            <a:off x="594360" y="5394960"/>
-            <a:ext cx="438912" cy="438912"/>
-          </a:xfrm>
-          <a:prstGeom prst="rect">
-            <a:avLst/>
-          </a:prstGeom>
-          <a:noFill/>
-        </p:spPr>
-        <p:txBody>
-          <a:bodyPr wrap="square" anchor="ctr"/>
-          <a:lstStyle/>
-          <a:p>
-            <a:pPr algn="ctr"/>
-            <a:r>
-              <a:rPr sz="1600" b="1" i="0">
-                <a:solidFill>
-                  <a:srgbClr val="FFFFFF"/>
-                </a:solidFill>
-                <a:latin typeface="Calibri"/>
-              </a:rPr>
-              <a:t>4</a:t>
-            </a:r>
-          </a:p>
-        </p:txBody>
-      </p:sp>
-      <p:sp>
-        <p:nvSpPr>
-          <p:cNvPr id="21" name="TextBox 20"/>
-          <p:cNvSpPr txBox="1"/>
-          <p:nvPr/>
-        </p:nvSpPr>
-        <p:spPr>
-          <a:xfrm>
-            <a:off x="1188720" y="5180076"/>
-            <a:ext cx="10271455" cy="886968"/>
-          </a:xfrm>
-          <a:prstGeom prst="rect">
-            <a:avLst/>
-          </a:prstGeom>
-          <a:noFill/>
-        </p:spPr>
-        <p:txBody>
-          <a:bodyPr wrap="square" anchor="ctr"/>
-          <a:lstStyle/>
-          <a:p>
-            <a:r>
-              <a:rPr sz="1500" b="1" i="0">
-                <a:solidFill>
-                  <a:srgbClr val="095292"/>
-                </a:solidFill>
-                <a:latin typeface="Calibri"/>
-              </a:rPr>
-              <a:t>Guarda el PNG para tu PI</a:t>
+              <a:t>–   Todo lo que construyan hoy entra al </a:t>
+            </a:r>
+            <a:r>
+              <a:rPr sz="2000" b="1" i="0">
+                <a:solidFill>
+                  <a:srgbClr val="333333"/>
+                </a:solidFill>
+                <a:latin typeface="Calibri"/>
+              </a:rPr>
+              <a:t>informe/repo del PI</a:t>
+            </a:r>
+            <a:r>
+              <a:rPr sz="2000" b="0" i="0">
+                <a:solidFill>
+                  <a:srgbClr val="333333"/>
+                </a:solidFill>
+                <a:latin typeface="Calibri"/>
+              </a:rPr>
+              <a:t> (no es lab suelto).</a:t>
             </a:r>
           </a:p>
           <a:p>
             <a:pPr>
-              <a:spcBef>
-                <a:spcPts val="200"/>
-              </a:spcBef>
+              <a:spcAft>
+                <a:spcPts val="800"/>
+              </a:spcAft>
             </a:pPr>
             <a:r>
-              <a:rPr sz="1300" b="0" i="0">
+              <a:rPr sz="2000" b="0" i="0">
                 <a:solidFill>
                   <a:srgbClr val="333333"/>
                 </a:solidFill>
                 <a:latin typeface="Calibri"/>
               </a:rPr>
-              <a:t>Exporta tambien la imagen a la carpeta de tu Proyecto Integrador. Esa copia es para tu informe; no reemplaza la respuesta en la plataforma.</a:t>
-            </a:r>
-          </a:p>
-        </p:txBody>
-      </p:sp>
-      <p:sp>
-        <p:nvSpPr>
-          <p:cNvPr id="22" name="TextBox 21"/>
+              <a:t>–   Individual por defecto · el docente puede autorizar equipos de 2–3; la entrega en la plataforma del curso siempre es individual.</a:t>
+            </a:r>
+          </a:p>
+        </p:txBody>
+      </p:sp>
+      <p:sp>
+        <p:nvSpPr>
+          <p:cNvPr id="6" name="TextBox 5"/>
           <p:cNvSpPr txBox="1"/>
           <p:nvPr/>
         </p:nvSpPr>
@@ -4475,7 +3889,7 @@
                 </a:solidFill>
                 <a:latin typeface="Calibri"/>
               </a:rPr>
-              <a:t>Taller PI (paso a paso)</a:t>
+              <a:t>Manos a la obra (paso a paso)</a:t>
             </a:r>
           </a:p>
         </p:txBody>
@@ -5783,7 +5197,7 @@
                 </a:solidFill>
                 <a:latin typeface="Calibri"/>
               </a:rPr>
-              <a:t> Taller guiado PI (demo en vivo + avance individual).</a:t>
+              <a:t> Trabajo guiado del PI (demo en vivo + avance individual).</a:t>
             </a:r>
           </a:p>
           <a:p>
@@ -6266,7 +5680,7 @@
                 </a:solidFill>
                 <a:latin typeface="Calibri"/>
               </a:rPr>
-              <a:t>PI CloudLite — entregable de hoy</a:t>
+              <a:t>Rendimiento sin stress-tool de pago</a:t>
             </a:r>
           </a:p>
         </p:txBody>
@@ -6305,25 +5719,7 @@
                 </a:solidFill>
                 <a:latin typeface="Calibri"/>
               </a:rPr>
-              <a:t>–   </a:t>
-            </a:r>
-            <a:r>
-              <a:rPr sz="2000" b="1" i="0">
-                <a:solidFill>
-                  <a:srgbClr val="333333"/>
-                </a:solidFill>
-                <a:latin typeface="Calibri"/>
-              </a:rPr>
-              <a:t>Entregable:</a:t>
-            </a:r>
-            <a:r>
-              <a:rPr sz="2000" b="0" i="0">
-                <a:solidFill>
-                  <a:srgbClr val="333333"/>
-                </a:solidFill>
-                <a:latin typeface="Calibri"/>
-              </a:rPr>
-              <a:t> Sección Rendimiento + guion de pitch + paquete casi-final</a:t>
+              <a:t>–   Definan: RPS/usuarios concurrentes objetivo · p95 latencia · error rate.</a:t>
             </a:r>
           </a:p>
           <a:p>
@@ -6339,16 +5735,7 @@
                 </a:solidFill>
                 <a:latin typeface="Calibri"/>
               </a:rPr>
-              <a:t>–   Herramienta: </a:t>
-            </a:r>
-            <a:r>
-              <a:rPr sz="2000" b="1" i="0">
-                <a:solidFill>
-                  <a:srgbClr val="333333"/>
-                </a:solidFill>
-                <a:latin typeface="Calibri"/>
-              </a:rPr>
-              <a:t>Google Docs · draw.io · (opcional) lab contenedor</a:t>
+              <a:t>–   Escenario: pico de matrícula / hora pico de citas — narren carga.</a:t>
             </a:r>
           </a:p>
           <a:p>
@@ -6364,41 +5751,7 @@
                 </a:solidFill>
                 <a:latin typeface="Calibri"/>
               </a:rPr>
-              <a:t>–   Todo lo que construyan hoy entra al </a:t>
-            </a:r>
-            <a:r>
-              <a:rPr sz="2000" b="1" i="0">
-                <a:solidFill>
-                  <a:srgbClr val="333333"/>
-                </a:solidFill>
-                <a:latin typeface="Calibri"/>
-              </a:rPr>
-              <a:t>informe/repo del PI</a:t>
-            </a:r>
-            <a:r>
-              <a:rPr sz="2000" b="0" i="0">
-                <a:solidFill>
-                  <a:srgbClr val="333333"/>
-                </a:solidFill>
-                <a:latin typeface="Calibri"/>
-              </a:rPr>
-              <a:t> (no es lab suelto).</a:t>
-            </a:r>
-          </a:p>
-          <a:p>
-            <a:pPr>
-              <a:spcAft>
-                <a:spcPts val="800"/>
-              </a:spcAft>
-            </a:pPr>
-            <a:r>
-              <a:rPr sz="2000" b="0" i="0">
-                <a:solidFill>
-                  <a:srgbClr val="333333"/>
-                </a:solidFill>
-                <a:latin typeface="Calibri"/>
-              </a:rPr>
-              <a:t>–   Individual por defecto · el docente puede autorizar equipos de 2–3; la entrega en la plataforma del curso siempre es individual.</a:t>
+              <a:t>–   Bottlenecks probables: DB, auth, I/O de objetos.</a:t>
             </a:r>
           </a:p>
         </p:txBody>
@@ -6579,7 +5932,7 @@
                 </a:solidFill>
                 <a:latin typeface="Calibri"/>
               </a:rPr>
-              <a:t>Rendimiento sin stress-tool de pago</a:t>
+              <a:t>Preparación de presentación (5–8 min)</a:t>
             </a:r>
           </a:p>
         </p:txBody>
@@ -6618,7 +5971,7 @@
                 </a:solidFill>
                 <a:latin typeface="Calibri"/>
               </a:rPr>
-              <a:t>–   Definan: RPS/usuarios concurrentes objetivo · p95 latencia · error rate.</a:t>
+              <a:t>–   1 min problema · 2 min arquitectura · 1 min contenedor · 1 min CI · 1 min seguridad/costos · Q&amp;A.</a:t>
             </a:r>
           </a:p>
           <a:p>
@@ -6634,7 +5987,7 @@
                 </a:solidFill>
                 <a:latin typeface="Calibri"/>
               </a:rPr>
-              <a:t>–   Escenario: pico de matrícula / hora pico de citas — narren carga.</a:t>
+              <a:t>–   Demo: diagrama + captura lab/Actions (no improvisar login cloud).</a:t>
             </a:r>
           </a:p>
           <a:p>
@@ -6650,7 +6003,7 @@
                 </a:solidFill>
                 <a:latin typeface="Calibri"/>
               </a:rPr>
-              <a:t>–   Bottlenecks probables: DB, auth, I/O de objetos.</a:t>
+              <a:t>–   Sustentas tú los 5 bloques; si hay equipo autorizado, hablan todos.</a:t>
             </a:r>
           </a:p>
         </p:txBody>
@@ -6831,7 +6184,7 @@
                 </a:solidFill>
                 <a:latin typeface="Calibri"/>
               </a:rPr>
-              <a:t>Preparación de presentación (5–8 min)</a:t>
+              <a:t>Paquete de entrega</a:t>
             </a:r>
           </a:p>
         </p:txBody>
@@ -6870,7 +6223,7 @@
                 </a:solidFill>
                 <a:latin typeface="Calibri"/>
               </a:rPr>
-              <a:t>–   1 min problema · 2 min arquitectura · 1 min contenedor · 1 min CI · 1 min seguridad/costos · Q&amp;A.</a:t>
+              <a:t>–   Informe + diagramas + Dockerfile + YAML + capturas.</a:t>
             </a:r>
           </a:p>
           <a:p>
@@ -6886,23 +6239,7 @@
                 </a:solidFill>
                 <a:latin typeface="Calibri"/>
               </a:rPr>
-              <a:t>–   Demo: diagrama + captura lab/Actions (no improvisar login cloud).</a:t>
-            </a:r>
-          </a:p>
-          <a:p>
-            <a:pPr>
-              <a:spcAft>
-                <a:spcPts val="800"/>
-              </a:spcAft>
-            </a:pPr>
-            <a:r>
-              <a:rPr sz="2000" b="0" i="0">
-                <a:solidFill>
-                  <a:srgbClr val="333333"/>
-                </a:solidFill>
-                <a:latin typeface="Calibri"/>
-              </a:rPr>
-              <a:t>–   Sustentas tú los 5 bloques; si hay equipo autorizado, hablan todos.</a:t>
+              <a:t>–   Fecha/canal: coordinación del periodo.</a:t>
             </a:r>
           </a:p>
         </p:txBody>
@@ -7083,21 +6420,142 @@
                 </a:solidFill>
                 <a:latin typeface="Calibri"/>
               </a:rPr>
-              <a:t>Paquete de entrega</a:t>
-            </a:r>
-          </a:p>
-        </p:txBody>
-      </p:sp>
-      <p:sp>
-        <p:nvSpPr>
-          <p:cNvPr id="5" name="TextBox 4"/>
+              <a:t>«Que sea rapido» no es un requisito</a:t>
+            </a:r>
+          </a:p>
+        </p:txBody>
+      </p:sp>
+      <p:sp>
+        <p:nvSpPr>
+          <p:cNvPr id="5" name="Rounded Rectangle 4"/>
+          <p:cNvSpPr/>
+          <p:nvPr/>
+        </p:nvSpPr>
+        <p:spPr>
+          <a:xfrm>
+            <a:off x="457200" y="1261872"/>
+            <a:ext cx="5478627" cy="5093208"/>
+          </a:xfrm>
+          <a:prstGeom prst="roundRect">
+            <a:avLst>
+              <a:gd name="adj" fmla="val 12000"/>
+            </a:avLst>
+          </a:prstGeom>
+          <a:solidFill>
+            <a:srgbClr val="FBE4E4"/>
+          </a:solidFill>
+          <a:ln>
+            <a:noFill/>
+          </a:ln>
+        </p:spPr>
+        <p:style>
+          <a:lnRef idx="1">
+            <a:schemeClr val="accent1"/>
+          </a:lnRef>
+          <a:fillRef idx="3">
+            <a:schemeClr val="accent1"/>
+          </a:fillRef>
+          <a:effectRef idx="2">
+            <a:schemeClr val="accent1"/>
+          </a:effectRef>
+          <a:fontRef idx="minor">
+            <a:schemeClr val="lt1"/>
+          </a:fontRef>
+        </p:style>
+        <p:txBody>
+          <a:bodyPr rtlCol="0" anchor="ctr"/>
+          <a:lstStyle/>
+          <a:p>
+            <a:pPr algn="ctr"/>
+          </a:p>
+        </p:txBody>
+      </p:sp>
+      <p:sp>
+        <p:nvSpPr>
+          <p:cNvPr id="6" name="Rectangle 5"/>
+          <p:cNvSpPr/>
+          <p:nvPr/>
+        </p:nvSpPr>
+        <p:spPr>
+          <a:xfrm>
+            <a:off x="457200" y="1261872"/>
+            <a:ext cx="5478627" cy="502920"/>
+          </a:xfrm>
+          <a:prstGeom prst="rect">
+            <a:avLst/>
+          </a:prstGeom>
+          <a:solidFill>
+            <a:srgbClr val="A02030"/>
+          </a:solidFill>
+          <a:ln>
+            <a:noFill/>
+          </a:ln>
+        </p:spPr>
+        <p:style>
+          <a:lnRef idx="1">
+            <a:schemeClr val="accent1"/>
+          </a:lnRef>
+          <a:fillRef idx="3">
+            <a:schemeClr val="accent1"/>
+          </a:fillRef>
+          <a:effectRef idx="2">
+            <a:schemeClr val="accent1"/>
+          </a:effectRef>
+          <a:fontRef idx="minor">
+            <a:schemeClr val="lt1"/>
+          </a:fontRef>
+        </p:style>
+        <p:txBody>
+          <a:bodyPr rtlCol="0" anchor="ctr"/>
+          <a:lstStyle/>
+          <a:p>
+            <a:pPr algn="ctr"/>
+          </a:p>
+        </p:txBody>
+      </p:sp>
+      <p:sp>
+        <p:nvSpPr>
+          <p:cNvPr id="7" name="TextBox 6"/>
           <p:cNvSpPr txBox="1"/>
           <p:nvPr/>
         </p:nvSpPr>
         <p:spPr>
           <a:xfrm>
-            <a:off x="457200" y="1170432"/>
-            <a:ext cx="11277295" cy="5230368"/>
+            <a:off x="594360" y="1353312"/>
+            <a:ext cx="5204307" cy="365760"/>
+          </a:xfrm>
+          <a:prstGeom prst="rect">
+            <a:avLst/>
+          </a:prstGeom>
+          <a:noFill/>
+        </p:spPr>
+        <p:txBody>
+          <a:bodyPr wrap="square" anchor="ctr"/>
+          <a:lstStyle/>
+          <a:p>
+            <a:pPr algn="ctr"/>
+            <a:r>
+              <a:rPr sz="1600" b="1" i="0">
+                <a:solidFill>
+                  <a:srgbClr val="FFFFFF"/>
+                </a:solidFill>
+                <a:latin typeface="Calibri"/>
+              </a:rPr>
+              <a:t>Enunciado vago</a:t>
+            </a:r>
+          </a:p>
+        </p:txBody>
+      </p:sp>
+      <p:sp>
+        <p:nvSpPr>
+          <p:cNvPr id="8" name="TextBox 7"/>
+          <p:cNvSpPr txBox="1"/>
+          <p:nvPr/>
+        </p:nvSpPr>
+        <p:spPr>
+          <a:xfrm>
+            <a:off x="621792" y="1901952"/>
+            <a:ext cx="5158587" cy="4498848"/>
           </a:xfrm>
           <a:prstGeom prst="rect">
             <a:avLst/>
@@ -7116,13 +6574,13 @@
               </a:spcAft>
             </a:pPr>
             <a:r>
-              <a:rPr sz="2000" b="0" i="0">
+              <a:rPr sz="1500" b="0" i="0">
                 <a:solidFill>
                   <a:srgbClr val="333333"/>
                 </a:solidFill>
                 <a:latin typeface="Calibri"/>
               </a:rPr>
-              <a:t>–   Informe + diagramas + Dockerfile + YAML + capturas.</a:t>
+              <a:t>–   «La app tiene que ser rapida»</a:t>
             </a:r>
           </a:p>
           <a:p>
@@ -7132,20 +6590,305 @@
               </a:spcAft>
             </a:pPr>
             <a:r>
-              <a:rPr sz="2000" b="0" i="0">
+              <a:rPr sz="1500" b="0" i="0">
                 <a:solidFill>
                   <a:srgbClr val="333333"/>
                 </a:solidFill>
                 <a:latin typeface="Calibri"/>
               </a:rPr>
-              <a:t>–   Fecha/canal: coordinación del periodo.</a:t>
-            </a:r>
-          </a:p>
-        </p:txBody>
-      </p:sp>
-      <p:sp>
-        <p:nvSpPr>
-          <p:cNvPr id="6" name="TextBox 5"/>
+              <a:t>–   «Aguanta harta gente»</a:t>
+            </a:r>
+          </a:p>
+          <a:p>
+            <a:pPr>
+              <a:spcAft>
+                <a:spcPts val="800"/>
+              </a:spcAft>
+            </a:pPr>
+            <a:r>
+              <a:rPr sz="1500" b="0" i="0">
+                <a:solidFill>
+                  <a:srgbClr val="333333"/>
+                </a:solidFill>
+                <a:latin typeface="Calibri"/>
+              </a:rPr>
+              <a:t>–   «Si se pone lenta, le subimos recursos»</a:t>
+            </a:r>
+          </a:p>
+          <a:p>
+            <a:pPr>
+              <a:spcAft>
+                <a:spcPts val="800"/>
+              </a:spcAft>
+            </a:pPr>
+            <a:r>
+              <a:rPr sz="1500" b="0" i="0">
+                <a:solidFill>
+                  <a:srgbClr val="333333"/>
+                </a:solidFill>
+                <a:latin typeface="Calibri"/>
+              </a:rPr>
+              <a:t>–   No hay con que comparar despues</a:t>
+            </a:r>
+          </a:p>
+        </p:txBody>
+      </p:sp>
+      <p:sp>
+        <p:nvSpPr>
+          <p:cNvPr id="9" name="Rounded Rectangle 8"/>
+          <p:cNvSpPr/>
+          <p:nvPr/>
+        </p:nvSpPr>
+        <p:spPr>
+          <a:xfrm>
+            <a:off x="6255867" y="1261872"/>
+            <a:ext cx="5478627" cy="5093208"/>
+          </a:xfrm>
+          <a:prstGeom prst="roundRect">
+            <a:avLst>
+              <a:gd name="adj" fmla="val 12000"/>
+            </a:avLst>
+          </a:prstGeom>
+          <a:solidFill>
+            <a:srgbClr val="E8F4FA"/>
+          </a:solidFill>
+          <a:ln>
+            <a:noFill/>
+          </a:ln>
+        </p:spPr>
+        <p:style>
+          <a:lnRef idx="1">
+            <a:schemeClr val="accent1"/>
+          </a:lnRef>
+          <a:fillRef idx="3">
+            <a:schemeClr val="accent1"/>
+          </a:fillRef>
+          <a:effectRef idx="2">
+            <a:schemeClr val="accent1"/>
+          </a:effectRef>
+          <a:fontRef idx="minor">
+            <a:schemeClr val="lt1"/>
+          </a:fontRef>
+        </p:style>
+        <p:txBody>
+          <a:bodyPr rtlCol="0" anchor="ctr"/>
+          <a:lstStyle/>
+          <a:p>
+            <a:pPr algn="ctr"/>
+          </a:p>
+        </p:txBody>
+      </p:sp>
+      <p:sp>
+        <p:nvSpPr>
+          <p:cNvPr id="10" name="Rectangle 9"/>
+          <p:cNvSpPr/>
+          <p:nvPr/>
+        </p:nvSpPr>
+        <p:spPr>
+          <a:xfrm>
+            <a:off x="6255867" y="1261872"/>
+            <a:ext cx="5478627" cy="502920"/>
+          </a:xfrm>
+          <a:prstGeom prst="rect">
+            <a:avLst/>
+          </a:prstGeom>
+          <a:solidFill>
+            <a:srgbClr val="095292"/>
+          </a:solidFill>
+          <a:ln>
+            <a:noFill/>
+          </a:ln>
+        </p:spPr>
+        <p:style>
+          <a:lnRef idx="1">
+            <a:schemeClr val="accent1"/>
+          </a:lnRef>
+          <a:fillRef idx="3">
+            <a:schemeClr val="accent1"/>
+          </a:fillRef>
+          <a:effectRef idx="2">
+            <a:schemeClr val="accent1"/>
+          </a:effectRef>
+          <a:fontRef idx="minor">
+            <a:schemeClr val="lt1"/>
+          </a:fontRef>
+        </p:style>
+        <p:txBody>
+          <a:bodyPr rtlCol="0" anchor="ctr"/>
+          <a:lstStyle/>
+          <a:p>
+            <a:pPr algn="ctr"/>
+          </a:p>
+        </p:txBody>
+      </p:sp>
+      <p:sp>
+        <p:nvSpPr>
+          <p:cNvPr id="11" name="TextBox 10"/>
+          <p:cNvSpPr txBox="1"/>
+          <p:nvPr/>
+        </p:nvSpPr>
+        <p:spPr>
+          <a:xfrm>
+            <a:off x="6393027" y="1353312"/>
+            <a:ext cx="5204307" cy="365760"/>
+          </a:xfrm>
+          <a:prstGeom prst="rect">
+            <a:avLst/>
+          </a:prstGeom>
+          <a:noFill/>
+        </p:spPr>
+        <p:txBody>
+          <a:bodyPr wrap="square" anchor="ctr"/>
+          <a:lstStyle/>
+          <a:p>
+            <a:pPr algn="ctr"/>
+            <a:r>
+              <a:rPr sz="1600" b="1" i="0">
+                <a:solidFill>
+                  <a:srgbClr val="FFFFFF"/>
+                </a:solidFill>
+                <a:latin typeface="Calibri"/>
+              </a:rPr>
+              <a:t>Enunciado medible</a:t>
+            </a:r>
+          </a:p>
+        </p:txBody>
+      </p:sp>
+      <p:sp>
+        <p:nvSpPr>
+          <p:cNvPr id="12" name="TextBox 11"/>
+          <p:cNvSpPr txBox="1"/>
+          <p:nvPr/>
+        </p:nvSpPr>
+        <p:spPr>
+          <a:xfrm>
+            <a:off x="6420459" y="1901952"/>
+            <a:ext cx="5158587" cy="4498848"/>
+          </a:xfrm>
+          <a:prstGeom prst="rect">
+            <a:avLst/>
+          </a:prstGeom>
+          <a:noFill/>
+        </p:spPr>
+        <p:txBody>
+          <a:bodyPr wrap="square">
+            <a:spAutoFit/>
+          </a:bodyPr>
+          <a:lstStyle/>
+          <a:p>
+            <a:pPr>
+              <a:spcAft>
+                <a:spcPts val="800"/>
+              </a:spcAft>
+            </a:pPr>
+            <a:r>
+              <a:rPr sz="1500" b="0" i="0">
+                <a:solidFill>
+                  <a:srgbClr val="333333"/>
+                </a:solidFill>
+                <a:latin typeface="Calibri"/>
+              </a:rPr>
+              <a:t>–   </a:t>
+            </a:r>
+            <a:r>
+              <a:rPr sz="1500" b="1" i="0">
+                <a:solidFill>
+                  <a:srgbClr val="333333"/>
+                </a:solidFill>
+                <a:latin typeface="Calibri"/>
+              </a:rPr>
+              <a:t>p95 &lt; 300 ms</a:t>
+            </a:r>
+            <a:r>
+              <a:rPr sz="1500" b="0" i="0">
+                <a:solidFill>
+                  <a:srgbClr val="333333"/>
+                </a:solidFill>
+                <a:latin typeface="Calibri"/>
+              </a:rPr>
+              <a:t> en el endpoint de reserva</a:t>
+            </a:r>
+          </a:p>
+          <a:p>
+            <a:pPr>
+              <a:spcAft>
+                <a:spcPts val="800"/>
+              </a:spcAft>
+            </a:pPr>
+            <a:r>
+              <a:rPr sz="1500" b="0" i="0">
+                <a:solidFill>
+                  <a:srgbClr val="333333"/>
+                </a:solidFill>
+                <a:latin typeface="Calibri"/>
+              </a:rPr>
+              <a:t>–   Escenario: </a:t>
+            </a:r>
+            <a:r>
+              <a:rPr sz="1500" b="1" i="0">
+                <a:solidFill>
+                  <a:srgbClr val="333333"/>
+                </a:solidFill>
+                <a:latin typeface="Calibri"/>
+              </a:rPr>
+              <a:t>150 RPS</a:t>
+            </a:r>
+            <a:r>
+              <a:rPr sz="1500" b="0" i="0">
+                <a:solidFill>
+                  <a:srgbClr val="333333"/>
+                </a:solidFill>
+                <a:latin typeface="Calibri"/>
+              </a:rPr>
+              <a:t> en el pico de inicio de semestre</a:t>
+            </a:r>
+          </a:p>
+          <a:p>
+            <a:pPr>
+              <a:spcAft>
+                <a:spcPts val="800"/>
+              </a:spcAft>
+            </a:pPr>
+            <a:r>
+              <a:rPr sz="1500" b="0" i="0">
+                <a:solidFill>
+                  <a:srgbClr val="333333"/>
+                </a:solidFill>
+                <a:latin typeface="Calibri"/>
+              </a:rPr>
+              <a:t>–   Bottleneck sospechado: </a:t>
+            </a:r>
+            <a:r>
+              <a:rPr sz="1500" b="1" i="0">
+                <a:solidFill>
+                  <a:srgbClr val="333333"/>
+                </a:solidFill>
+                <a:latin typeface="Calibri"/>
+              </a:rPr>
+              <a:t>consulta a la BD</a:t>
+            </a:r>
+          </a:p>
+          <a:p>
+            <a:pPr>
+              <a:spcAft>
+                <a:spcPts val="800"/>
+              </a:spcAft>
+            </a:pPr>
+            <a:r>
+              <a:rPr sz="1500" b="0" i="0">
+                <a:solidFill>
+                  <a:srgbClr val="333333"/>
+                </a:solidFill>
+                <a:latin typeface="Calibri"/>
+              </a:rPr>
+              <a:t>–   Se puede verificar: pasa o no pasa</a:t>
+            </a:r>
+          </a:p>
+        </p:txBody>
+      </p:sp>
+      <p:sp>
+        <p:nvSpPr>
+          <p:cNvPr id="13" name="TextBox 12"/>
           <p:cNvSpPr txBox="1"/>
           <p:nvPr/>
         </p:nvSpPr>
@@ -7213,7 +6956,7 @@
         <p:spPr>
           <a:xfrm>
             <a:off x="0" y="0"/>
-            <a:ext cx="12191695" cy="960120"/>
+            <a:ext cx="12191695" cy="1170432"/>
           </a:xfrm>
           <a:prstGeom prst="rect">
             <a:avLst/>
@@ -7255,7 +6998,7 @@
         </p:nvSpPr>
         <p:spPr>
           <a:xfrm>
-            <a:off x="0" y="960120"/>
+            <a:off x="0" y="1170432"/>
             <a:ext cx="12191695" cy="41148"/>
           </a:xfrm>
           <a:prstGeom prst="rect">
@@ -7299,7 +7042,7 @@
         <p:spPr>
           <a:xfrm>
             <a:off x="457200" y="164592"/>
-            <a:ext cx="11277295" cy="502920"/>
+            <a:ext cx="11277295" cy="384048"/>
           </a:xfrm>
           <a:prstGeom prst="rect">
             <a:avLst/>
@@ -7319,21 +7062,55 @@
                 </a:solidFill>
                 <a:latin typeface="Calibri"/>
               </a:rPr>
-              <a:t>«Que sea rapido» no es un requisito</a:t>
-            </a:r>
-          </a:p>
-        </p:txBody>
-      </p:sp>
-      <p:sp>
-        <p:nvSpPr>
-          <p:cNvPr id="5" name="Rounded Rectangle 4"/>
+              <a:t>Herramientas de hoy</a:t>
+            </a:r>
+          </a:p>
+        </p:txBody>
+      </p:sp>
+      <p:sp>
+        <p:nvSpPr>
+          <p:cNvPr id="5" name="TextBox 4"/>
+          <p:cNvSpPr txBox="1"/>
+          <p:nvPr/>
+        </p:nvSpPr>
+        <p:spPr>
+          <a:xfrm>
+            <a:off x="457200" y="566928"/>
+            <a:ext cx="11277295" cy="411480"/>
+          </a:xfrm>
+          <a:prstGeom prst="rect">
+            <a:avLst/>
+          </a:prstGeom>
+          <a:noFill/>
+        </p:spPr>
+        <p:txBody>
+          <a:bodyPr wrap="square">
+            <a:spAutoFit/>
+          </a:bodyPr>
+          <a:lstStyle/>
+          <a:p>
+            <a:r>
+              <a:rPr sz="1400" b="0" i="0">
+                <a:solidFill>
+                  <a:srgbClr val="B8D8EE"/>
+                </a:solidFill>
+                <a:latin typeface="Calibri"/>
+              </a:rPr>
+              <a:t>Gratis · navegador o free tier · sin cuenta de pago</a:t>
+            </a:r>
+          </a:p>
+        </p:txBody>
+      </p:sp>
+      <p:sp>
+        <p:nvSpPr>
+          <p:cNvPr id="6" name="Rounded Rectangle 5"/>
           <p:cNvSpPr/>
           <p:nvPr/>
         </p:nvSpPr>
         <p:spPr>
           <a:xfrm>
-            <a:off x="457200" y="1261872"/>
-            <a:ext cx="5478627" cy="5093208"/>
+            <a:off x="457200" y="1591056"/>
+            <a:ext cx="3624986" cy="2299716"/>
           </a:xfrm>
           <a:prstGeom prst="roundRect">
             <a:avLst>
@@ -7341,7 +7118,7 @@
             </a:avLst>
           </a:prstGeom>
           <a:solidFill>
-            <a:srgbClr val="FBE4E4"/>
+            <a:srgbClr val="F2F2F2"/>
           </a:solidFill>
           <a:ln>
             <a:noFill/>
@@ -7371,222 +7148,14 @@
       </p:sp>
       <p:sp>
         <p:nvSpPr>
-          <p:cNvPr id="6" name="Rectangle 5"/>
+          <p:cNvPr id="7" name="Rectangle 6"/>
           <p:cNvSpPr/>
           <p:nvPr/>
         </p:nvSpPr>
         <p:spPr>
           <a:xfrm>
-            <a:off x="457200" y="1261872"/>
-            <a:ext cx="5478627" cy="502920"/>
-          </a:xfrm>
-          <a:prstGeom prst="rect">
-            <a:avLst/>
-          </a:prstGeom>
-          <a:solidFill>
-            <a:srgbClr val="A02030"/>
-          </a:solidFill>
-          <a:ln>
-            <a:noFill/>
-          </a:ln>
-        </p:spPr>
-        <p:style>
-          <a:lnRef idx="1">
-            <a:schemeClr val="accent1"/>
-          </a:lnRef>
-          <a:fillRef idx="3">
-            <a:schemeClr val="accent1"/>
-          </a:fillRef>
-          <a:effectRef idx="2">
-            <a:schemeClr val="accent1"/>
-          </a:effectRef>
-          <a:fontRef idx="minor">
-            <a:schemeClr val="lt1"/>
-          </a:fontRef>
-        </p:style>
-        <p:txBody>
-          <a:bodyPr rtlCol="0" anchor="ctr"/>
-          <a:lstStyle/>
-          <a:p>
-            <a:pPr algn="ctr"/>
-          </a:p>
-        </p:txBody>
-      </p:sp>
-      <p:sp>
-        <p:nvSpPr>
-          <p:cNvPr id="7" name="TextBox 6"/>
-          <p:cNvSpPr txBox="1"/>
-          <p:nvPr/>
-        </p:nvSpPr>
-        <p:spPr>
-          <a:xfrm>
-            <a:off x="594360" y="1353312"/>
-            <a:ext cx="5204307" cy="365760"/>
-          </a:xfrm>
-          <a:prstGeom prst="rect">
-            <a:avLst/>
-          </a:prstGeom>
-          <a:noFill/>
-        </p:spPr>
-        <p:txBody>
-          <a:bodyPr wrap="square" anchor="ctr"/>
-          <a:lstStyle/>
-          <a:p>
-            <a:pPr algn="ctr"/>
-            <a:r>
-              <a:rPr sz="1600" b="1" i="0">
-                <a:solidFill>
-                  <a:srgbClr val="FFFFFF"/>
-                </a:solidFill>
-                <a:latin typeface="Calibri"/>
-              </a:rPr>
-              <a:t>Enunciado vago</a:t>
-            </a:r>
-          </a:p>
-        </p:txBody>
-      </p:sp>
-      <p:sp>
-        <p:nvSpPr>
-          <p:cNvPr id="8" name="TextBox 7"/>
-          <p:cNvSpPr txBox="1"/>
-          <p:nvPr/>
-        </p:nvSpPr>
-        <p:spPr>
-          <a:xfrm>
-            <a:off x="621792" y="1901952"/>
-            <a:ext cx="5158587" cy="4498848"/>
-          </a:xfrm>
-          <a:prstGeom prst="rect">
-            <a:avLst/>
-          </a:prstGeom>
-          <a:noFill/>
-        </p:spPr>
-        <p:txBody>
-          <a:bodyPr wrap="square">
-            <a:spAutoFit/>
-          </a:bodyPr>
-          <a:lstStyle/>
-          <a:p>
-            <a:pPr>
-              <a:spcAft>
-                <a:spcPts val="800"/>
-              </a:spcAft>
-            </a:pPr>
-            <a:r>
-              <a:rPr sz="1500" b="0" i="0">
-                <a:solidFill>
-                  <a:srgbClr val="333333"/>
-                </a:solidFill>
-                <a:latin typeface="Calibri"/>
-              </a:rPr>
-              <a:t>–   «La app tiene que ser rapida»</a:t>
-            </a:r>
-          </a:p>
-          <a:p>
-            <a:pPr>
-              <a:spcAft>
-                <a:spcPts val="800"/>
-              </a:spcAft>
-            </a:pPr>
-            <a:r>
-              <a:rPr sz="1500" b="0" i="0">
-                <a:solidFill>
-                  <a:srgbClr val="333333"/>
-                </a:solidFill>
-                <a:latin typeface="Calibri"/>
-              </a:rPr>
-              <a:t>–   «Aguanta harta gente»</a:t>
-            </a:r>
-          </a:p>
-          <a:p>
-            <a:pPr>
-              <a:spcAft>
-                <a:spcPts val="800"/>
-              </a:spcAft>
-            </a:pPr>
-            <a:r>
-              <a:rPr sz="1500" b="0" i="0">
-                <a:solidFill>
-                  <a:srgbClr val="333333"/>
-                </a:solidFill>
-                <a:latin typeface="Calibri"/>
-              </a:rPr>
-              <a:t>–   «Si se pone lenta, le subimos recursos»</a:t>
-            </a:r>
-          </a:p>
-          <a:p>
-            <a:pPr>
-              <a:spcAft>
-                <a:spcPts val="800"/>
-              </a:spcAft>
-            </a:pPr>
-            <a:r>
-              <a:rPr sz="1500" b="0" i="0">
-                <a:solidFill>
-                  <a:srgbClr val="333333"/>
-                </a:solidFill>
-                <a:latin typeface="Calibri"/>
-              </a:rPr>
-              <a:t>–   No hay con que comparar despues</a:t>
-            </a:r>
-          </a:p>
-        </p:txBody>
-      </p:sp>
-      <p:sp>
-        <p:nvSpPr>
-          <p:cNvPr id="9" name="Rounded Rectangle 8"/>
-          <p:cNvSpPr/>
-          <p:nvPr/>
-        </p:nvSpPr>
-        <p:spPr>
-          <a:xfrm>
-            <a:off x="6255867" y="1261872"/>
-            <a:ext cx="5478627" cy="5093208"/>
-          </a:xfrm>
-          <a:prstGeom prst="roundRect">
-            <a:avLst>
-              <a:gd name="adj" fmla="val 12000"/>
-            </a:avLst>
-          </a:prstGeom>
-          <a:solidFill>
-            <a:srgbClr val="E8F4FA"/>
-          </a:solidFill>
-          <a:ln>
-            <a:noFill/>
-          </a:ln>
-        </p:spPr>
-        <p:style>
-          <a:lnRef idx="1">
-            <a:schemeClr val="accent1"/>
-          </a:lnRef>
-          <a:fillRef idx="3">
-            <a:schemeClr val="accent1"/>
-          </a:fillRef>
-          <a:effectRef idx="2">
-            <a:schemeClr val="accent1"/>
-          </a:effectRef>
-          <a:fontRef idx="minor">
-            <a:schemeClr val="lt1"/>
-          </a:fontRef>
-        </p:style>
-        <p:txBody>
-          <a:bodyPr rtlCol="0" anchor="ctr"/>
-          <a:lstStyle/>
-          <a:p>
-            <a:pPr algn="ctr"/>
-          </a:p>
-        </p:txBody>
-      </p:sp>
-      <p:sp>
-        <p:nvSpPr>
-          <p:cNvPr id="10" name="Rectangle 9"/>
-          <p:cNvSpPr/>
-          <p:nvPr/>
-        </p:nvSpPr>
-        <p:spPr>
-          <a:xfrm>
-            <a:off x="6255867" y="1261872"/>
-            <a:ext cx="5478627" cy="502920"/>
+            <a:off x="457200" y="1591056"/>
+            <a:ext cx="3624986" cy="64008"/>
           </a:xfrm>
           <a:prstGeom prst="rect">
             <a:avLst/>
@@ -7622,14 +7191,81 @@
       </p:sp>
       <p:sp>
         <p:nvSpPr>
-          <p:cNvPr id="11" name="TextBox 10"/>
+          <p:cNvPr id="8" name="Rectangle 7"/>
+          <p:cNvSpPr/>
+          <p:nvPr/>
+        </p:nvSpPr>
+        <p:spPr>
+          <a:xfrm>
+            <a:off x="457200" y="1655064"/>
+            <a:ext cx="3624986" cy="27432"/>
+          </a:xfrm>
+          <a:prstGeom prst="rect">
+            <a:avLst/>
+          </a:prstGeom>
+          <a:solidFill>
+            <a:srgbClr val="FFD000"/>
+          </a:solidFill>
+          <a:ln>
+            <a:noFill/>
+          </a:ln>
+        </p:spPr>
+        <p:style>
+          <a:lnRef idx="1">
+            <a:schemeClr val="accent1"/>
+          </a:lnRef>
+          <a:fillRef idx="3">
+            <a:schemeClr val="accent1"/>
+          </a:fillRef>
+          <a:effectRef idx="2">
+            <a:schemeClr val="accent1"/>
+          </a:effectRef>
+          <a:fontRef idx="minor">
+            <a:schemeClr val="lt1"/>
+          </a:fontRef>
+        </p:style>
+        <p:txBody>
+          <a:bodyPr rtlCol="0" anchor="ctr"/>
+          <a:lstStyle/>
+          <a:p>
+            <a:pPr algn="ctr"/>
+          </a:p>
+        </p:txBody>
+      </p:sp>
+      <p:pic>
+        <p:nvPicPr>
+          <p:cNvPr id="9" name="Picture 8" descr="google_docs.png"/>
+          <p:cNvPicPr>
+            <a:picLocks noChangeAspect="1"/>
+          </p:cNvPicPr>
+          <p:nvPr/>
+        </p:nvPicPr>
+        <p:blipFill>
+          <a:blip r:embed="rId2"/>
+          <a:stretch>
+            <a:fillRect/>
+          </a:stretch>
+        </p:blipFill>
+        <p:spPr>
+          <a:xfrm>
+            <a:off x="1659331" y="1847087"/>
+            <a:ext cx="1220724" cy="1220724"/>
+          </a:xfrm>
+          <a:prstGeom prst="rect">
+            <a:avLst/>
+          </a:prstGeom>
+        </p:spPr>
+      </p:pic>
+      <p:sp>
+        <p:nvSpPr>
+          <p:cNvPr id="10" name="TextBox 9"/>
           <p:cNvSpPr txBox="1"/>
           <p:nvPr/>
         </p:nvSpPr>
         <p:spPr>
           <a:xfrm>
-            <a:off x="6393027" y="1353312"/>
-            <a:ext cx="5204307" cy="365760"/>
+            <a:off x="530352" y="3159251"/>
+            <a:ext cx="3478682" cy="621792"/>
           </a:xfrm>
           <a:prstGeom prst="rect">
             <a:avLst/>
@@ -7637,32 +7273,203 @@
           <a:noFill/>
         </p:spPr>
         <p:txBody>
-          <a:bodyPr wrap="square" anchor="ctr"/>
+          <a:bodyPr wrap="square" anchor="t"/>
           <a:lstStyle/>
           <a:p>
             <a:pPr algn="ctr"/>
             <a:r>
-              <a:rPr sz="1600" b="1" i="0">
-                <a:solidFill>
-                  <a:srgbClr val="FFFFFF"/>
-                </a:solidFill>
-                <a:latin typeface="Calibri"/>
-              </a:rPr>
-              <a:t>Enunciado medible</a:t>
-            </a:r>
-          </a:p>
-        </p:txBody>
-      </p:sp>
-      <p:sp>
-        <p:nvSpPr>
-          <p:cNvPr id="12" name="TextBox 11"/>
+              <a:rPr sz="1300" b="1" i="0">
+                <a:solidFill>
+                  <a:srgbClr val="095292"/>
+                </a:solidFill>
+                <a:latin typeface="Calibri"/>
+              </a:rPr>
+              <a:t>Google Docs</a:t>
+            </a:r>
+          </a:p>
+          <a:p>
+            <a:pPr algn="ctr">
+              <a:spcBef>
+                <a:spcPts val="200"/>
+              </a:spcBef>
+            </a:pPr>
+            <a:r>
+              <a:rPr sz="1000" b="0" i="0">
+                <a:solidFill>
+                  <a:srgbClr val="666666"/>
+                </a:solidFill>
+                <a:latin typeface="Calibri"/>
+              </a:rPr>
+              <a:t>Objetivo de rendimiento</a:t>
+            </a:r>
+          </a:p>
+        </p:txBody>
+      </p:sp>
+      <p:sp>
+        <p:nvSpPr>
+          <p:cNvPr id="11" name="Rounded Rectangle 10"/>
+          <p:cNvSpPr/>
+          <p:nvPr/>
+        </p:nvSpPr>
+        <p:spPr>
+          <a:xfrm>
+            <a:off x="4283354" y="1591056"/>
+            <a:ext cx="3624986" cy="2299716"/>
+          </a:xfrm>
+          <a:prstGeom prst="roundRect">
+            <a:avLst>
+              <a:gd name="adj" fmla="val 12000"/>
+            </a:avLst>
+          </a:prstGeom>
+          <a:solidFill>
+            <a:srgbClr val="F2F2F2"/>
+          </a:solidFill>
+          <a:ln>
+            <a:noFill/>
+          </a:ln>
+        </p:spPr>
+        <p:style>
+          <a:lnRef idx="1">
+            <a:schemeClr val="accent1"/>
+          </a:lnRef>
+          <a:fillRef idx="3">
+            <a:schemeClr val="accent1"/>
+          </a:fillRef>
+          <a:effectRef idx="2">
+            <a:schemeClr val="accent1"/>
+          </a:effectRef>
+          <a:fontRef idx="minor">
+            <a:schemeClr val="lt1"/>
+          </a:fontRef>
+        </p:style>
+        <p:txBody>
+          <a:bodyPr rtlCol="0" anchor="ctr"/>
+          <a:lstStyle/>
+          <a:p>
+            <a:pPr algn="ctr"/>
+          </a:p>
+        </p:txBody>
+      </p:sp>
+      <p:sp>
+        <p:nvSpPr>
+          <p:cNvPr id="12" name="Rectangle 11"/>
+          <p:cNvSpPr/>
+          <p:nvPr/>
+        </p:nvSpPr>
+        <p:spPr>
+          <a:xfrm>
+            <a:off x="4283354" y="1591056"/>
+            <a:ext cx="3624986" cy="64008"/>
+          </a:xfrm>
+          <a:prstGeom prst="rect">
+            <a:avLst/>
+          </a:prstGeom>
+          <a:solidFill>
+            <a:srgbClr val="095292"/>
+          </a:solidFill>
+          <a:ln>
+            <a:noFill/>
+          </a:ln>
+        </p:spPr>
+        <p:style>
+          <a:lnRef idx="1">
+            <a:schemeClr val="accent1"/>
+          </a:lnRef>
+          <a:fillRef idx="3">
+            <a:schemeClr val="accent1"/>
+          </a:fillRef>
+          <a:effectRef idx="2">
+            <a:schemeClr val="accent1"/>
+          </a:effectRef>
+          <a:fontRef idx="minor">
+            <a:schemeClr val="lt1"/>
+          </a:fontRef>
+        </p:style>
+        <p:txBody>
+          <a:bodyPr rtlCol="0" anchor="ctr"/>
+          <a:lstStyle/>
+          <a:p>
+            <a:pPr algn="ctr"/>
+          </a:p>
+        </p:txBody>
+      </p:sp>
+      <p:sp>
+        <p:nvSpPr>
+          <p:cNvPr id="13" name="Rectangle 12"/>
+          <p:cNvSpPr/>
+          <p:nvPr/>
+        </p:nvSpPr>
+        <p:spPr>
+          <a:xfrm>
+            <a:off x="4283354" y="1655064"/>
+            <a:ext cx="3624986" cy="27432"/>
+          </a:xfrm>
+          <a:prstGeom prst="rect">
+            <a:avLst/>
+          </a:prstGeom>
+          <a:solidFill>
+            <a:srgbClr val="FFD000"/>
+          </a:solidFill>
+          <a:ln>
+            <a:noFill/>
+          </a:ln>
+        </p:spPr>
+        <p:style>
+          <a:lnRef idx="1">
+            <a:schemeClr val="accent1"/>
+          </a:lnRef>
+          <a:fillRef idx="3">
+            <a:schemeClr val="accent1"/>
+          </a:fillRef>
+          <a:effectRef idx="2">
+            <a:schemeClr val="accent1"/>
+          </a:effectRef>
+          <a:fontRef idx="minor">
+            <a:schemeClr val="lt1"/>
+          </a:fontRef>
+        </p:style>
+        <p:txBody>
+          <a:bodyPr rtlCol="0" anchor="ctr"/>
+          <a:lstStyle/>
+          <a:p>
+            <a:pPr algn="ctr"/>
+          </a:p>
+        </p:txBody>
+      </p:sp>
+      <p:pic>
+        <p:nvPicPr>
+          <p:cNvPr id="14" name="Picture 13" descr="drawio.png"/>
+          <p:cNvPicPr>
+            <a:picLocks noChangeAspect="1"/>
+          </p:cNvPicPr>
+          <p:nvPr/>
+        </p:nvPicPr>
+        <p:blipFill>
+          <a:blip r:embed="rId3"/>
+          <a:stretch>
+            <a:fillRect/>
+          </a:stretch>
+        </p:blipFill>
+        <p:spPr>
+          <a:xfrm>
+            <a:off x="5485485" y="1847087"/>
+            <a:ext cx="1220724" cy="1220724"/>
+          </a:xfrm>
+          <a:prstGeom prst="rect">
+            <a:avLst/>
+          </a:prstGeom>
+        </p:spPr>
+      </p:pic>
+      <p:sp>
+        <p:nvSpPr>
+          <p:cNvPr id="15" name="TextBox 14"/>
           <p:cNvSpPr txBox="1"/>
           <p:nvPr/>
         </p:nvSpPr>
         <p:spPr>
           <a:xfrm>
-            <a:off x="6420459" y="1901952"/>
-            <a:ext cx="5158587" cy="4498848"/>
+            <a:off x="4356506" y="3159251"/>
+            <a:ext cx="3478682" cy="621792"/>
           </a:xfrm>
           <a:prstGeom prst="rect">
             <a:avLst/>
@@ -7670,124 +7477,449 @@
           <a:noFill/>
         </p:spPr>
         <p:txBody>
-          <a:bodyPr wrap="square">
-            <a:spAutoFit/>
-          </a:bodyPr>
-          <a:lstStyle/>
-          <a:p>
-            <a:pPr>
-              <a:spcAft>
-                <a:spcPts val="800"/>
-              </a:spcAft>
+          <a:bodyPr wrap="square" anchor="t"/>
+          <a:lstStyle/>
+          <a:p>
+            <a:pPr algn="ctr"/>
+            <a:r>
+              <a:rPr sz="1300" b="1" i="0">
+                <a:solidFill>
+                  <a:srgbClr val="095292"/>
+                </a:solidFill>
+                <a:latin typeface="Calibri"/>
+              </a:rPr>
+              <a:t>draw.io</a:t>
+            </a:r>
+          </a:p>
+          <a:p>
+            <a:pPr algn="ctr">
+              <a:spcBef>
+                <a:spcPts val="200"/>
+              </a:spcBef>
             </a:pPr>
             <a:r>
-              <a:rPr sz="1500" b="0" i="0">
-                <a:solidFill>
-                  <a:srgbClr val="333333"/>
-                </a:solidFill>
-                <a:latin typeface="Calibri"/>
-              </a:rPr>
-              <a:t>–   </a:t>
-            </a:r>
-            <a:r>
-              <a:rPr sz="1500" b="1" i="0">
-                <a:solidFill>
-                  <a:srgbClr val="333333"/>
-                </a:solidFill>
-                <a:latin typeface="Calibri"/>
-              </a:rPr>
-              <a:t>p95 &lt; 300 ms</a:t>
-            </a:r>
-            <a:r>
-              <a:rPr sz="1500" b="0" i="0">
-                <a:solidFill>
-                  <a:srgbClr val="333333"/>
-                </a:solidFill>
-                <a:latin typeface="Calibri"/>
-              </a:rPr>
-              <a:t> en el endpoint de reserva</a:t>
-            </a:r>
-          </a:p>
-          <a:p>
-            <a:pPr>
-              <a:spcAft>
-                <a:spcPts val="800"/>
-              </a:spcAft>
+              <a:rPr sz="1000" b="0" i="0">
+                <a:solidFill>
+                  <a:srgbClr val="666666"/>
+                </a:solidFill>
+                <a:latin typeface="Calibri"/>
+              </a:rPr>
+              <a:t>Bottleneck</a:t>
+            </a:r>
+          </a:p>
+        </p:txBody>
+      </p:sp>
+      <p:sp>
+        <p:nvSpPr>
+          <p:cNvPr id="16" name="Rounded Rectangle 15"/>
+          <p:cNvSpPr/>
+          <p:nvPr/>
+        </p:nvSpPr>
+        <p:spPr>
+          <a:xfrm>
+            <a:off x="8109508" y="1591056"/>
+            <a:ext cx="3624986" cy="2299716"/>
+          </a:xfrm>
+          <a:prstGeom prst="roundRect">
+            <a:avLst>
+              <a:gd name="adj" fmla="val 12000"/>
+            </a:avLst>
+          </a:prstGeom>
+          <a:solidFill>
+            <a:srgbClr val="F2F2F2"/>
+          </a:solidFill>
+          <a:ln>
+            <a:noFill/>
+          </a:ln>
+        </p:spPr>
+        <p:style>
+          <a:lnRef idx="1">
+            <a:schemeClr val="accent1"/>
+          </a:lnRef>
+          <a:fillRef idx="3">
+            <a:schemeClr val="accent1"/>
+          </a:fillRef>
+          <a:effectRef idx="2">
+            <a:schemeClr val="accent1"/>
+          </a:effectRef>
+          <a:fontRef idx="minor">
+            <a:schemeClr val="lt1"/>
+          </a:fontRef>
+        </p:style>
+        <p:txBody>
+          <a:bodyPr rtlCol="0" anchor="ctr"/>
+          <a:lstStyle/>
+          <a:p>
+            <a:pPr algn="ctr"/>
+          </a:p>
+        </p:txBody>
+      </p:sp>
+      <p:sp>
+        <p:nvSpPr>
+          <p:cNvPr id="17" name="Rectangle 16"/>
+          <p:cNvSpPr/>
+          <p:nvPr/>
+        </p:nvSpPr>
+        <p:spPr>
+          <a:xfrm>
+            <a:off x="8109508" y="1591056"/>
+            <a:ext cx="3624986" cy="64008"/>
+          </a:xfrm>
+          <a:prstGeom prst="rect">
+            <a:avLst/>
+          </a:prstGeom>
+          <a:solidFill>
+            <a:srgbClr val="095292"/>
+          </a:solidFill>
+          <a:ln>
+            <a:noFill/>
+          </a:ln>
+        </p:spPr>
+        <p:style>
+          <a:lnRef idx="1">
+            <a:schemeClr val="accent1"/>
+          </a:lnRef>
+          <a:fillRef idx="3">
+            <a:schemeClr val="accent1"/>
+          </a:fillRef>
+          <a:effectRef idx="2">
+            <a:schemeClr val="accent1"/>
+          </a:effectRef>
+          <a:fontRef idx="minor">
+            <a:schemeClr val="lt1"/>
+          </a:fontRef>
+        </p:style>
+        <p:txBody>
+          <a:bodyPr rtlCol="0" anchor="ctr"/>
+          <a:lstStyle/>
+          <a:p>
+            <a:pPr algn="ctr"/>
+          </a:p>
+        </p:txBody>
+      </p:sp>
+      <p:sp>
+        <p:nvSpPr>
+          <p:cNvPr id="18" name="Rectangle 17"/>
+          <p:cNvSpPr/>
+          <p:nvPr/>
+        </p:nvSpPr>
+        <p:spPr>
+          <a:xfrm>
+            <a:off x="8109508" y="1655064"/>
+            <a:ext cx="3624986" cy="27432"/>
+          </a:xfrm>
+          <a:prstGeom prst="rect">
+            <a:avLst/>
+          </a:prstGeom>
+          <a:solidFill>
+            <a:srgbClr val="FFD000"/>
+          </a:solidFill>
+          <a:ln>
+            <a:noFill/>
+          </a:ln>
+        </p:spPr>
+        <p:style>
+          <a:lnRef idx="1">
+            <a:schemeClr val="accent1"/>
+          </a:lnRef>
+          <a:fillRef idx="3">
+            <a:schemeClr val="accent1"/>
+          </a:fillRef>
+          <a:effectRef idx="2">
+            <a:schemeClr val="accent1"/>
+          </a:effectRef>
+          <a:fontRef idx="minor">
+            <a:schemeClr val="lt1"/>
+          </a:fontRef>
+        </p:style>
+        <p:txBody>
+          <a:bodyPr rtlCol="0" anchor="ctr"/>
+          <a:lstStyle/>
+          <a:p>
+            <a:pPr algn="ctr"/>
+          </a:p>
+        </p:txBody>
+      </p:sp>
+      <p:pic>
+        <p:nvPicPr>
+          <p:cNvPr id="19" name="Picture 18" descr="mermaid.png"/>
+          <p:cNvPicPr>
+            <a:picLocks noChangeAspect="1"/>
+          </p:cNvPicPr>
+          <p:nvPr/>
+        </p:nvPicPr>
+        <p:blipFill>
+          <a:blip r:embed="rId4"/>
+          <a:stretch>
+            <a:fillRect/>
+          </a:stretch>
+        </p:blipFill>
+        <p:spPr>
+          <a:xfrm>
+            <a:off x="9311640" y="1847087"/>
+            <a:ext cx="1220724" cy="1220724"/>
+          </a:xfrm>
+          <a:prstGeom prst="rect">
+            <a:avLst/>
+          </a:prstGeom>
+        </p:spPr>
+      </p:pic>
+      <p:sp>
+        <p:nvSpPr>
+          <p:cNvPr id="20" name="TextBox 19"/>
+          <p:cNvSpPr txBox="1"/>
+          <p:nvPr/>
+        </p:nvSpPr>
+        <p:spPr>
+          <a:xfrm>
+            <a:off x="8182660" y="3159251"/>
+            <a:ext cx="3478682" cy="621792"/>
+          </a:xfrm>
+          <a:prstGeom prst="rect">
+            <a:avLst/>
+          </a:prstGeom>
+          <a:noFill/>
+        </p:spPr>
+        <p:txBody>
+          <a:bodyPr wrap="square" anchor="t"/>
+          <a:lstStyle/>
+          <a:p>
+            <a:pPr algn="ctr"/>
+            <a:r>
+              <a:rPr sz="1300" b="1" i="0">
+                <a:solidFill>
+                  <a:srgbClr val="095292"/>
+                </a:solidFill>
+                <a:latin typeface="Calibri"/>
+              </a:rPr>
+              <a:t>Mermaid</a:t>
+            </a:r>
+          </a:p>
+          <a:p>
+            <a:pPr algn="ctr">
+              <a:spcBef>
+                <a:spcPts val="200"/>
+              </a:spcBef>
             </a:pPr>
             <a:r>
-              <a:rPr sz="1500" b="0" i="0">
-                <a:solidFill>
-                  <a:srgbClr val="333333"/>
-                </a:solidFill>
-                <a:latin typeface="Calibri"/>
-              </a:rPr>
-              <a:t>–   Escenario: </a:t>
-            </a:r>
-            <a:r>
-              <a:rPr sz="1500" b="1" i="0">
-                <a:solidFill>
-                  <a:srgbClr val="333333"/>
-                </a:solidFill>
-                <a:latin typeface="Calibri"/>
-              </a:rPr>
-              <a:t>150 RPS</a:t>
-            </a:r>
-            <a:r>
-              <a:rPr sz="1500" b="0" i="0">
-                <a:solidFill>
-                  <a:srgbClr val="333333"/>
-                </a:solidFill>
-                <a:latin typeface="Calibri"/>
-              </a:rPr>
-              <a:t> en el pico de inicio de semestre</a:t>
-            </a:r>
-          </a:p>
-          <a:p>
-            <a:pPr>
-              <a:spcAft>
-                <a:spcPts val="800"/>
-              </a:spcAft>
+              <a:rPr sz="1000" b="0" i="0">
+                <a:solidFill>
+                  <a:srgbClr val="666666"/>
+                </a:solidFill>
+                <a:latin typeface="Calibri"/>
+              </a:rPr>
+              <a:t>Codigo del diagrama</a:t>
+            </a:r>
+          </a:p>
+        </p:txBody>
+      </p:sp>
+      <p:sp>
+        <p:nvSpPr>
+          <p:cNvPr id="21" name="Rounded Rectangle 20"/>
+          <p:cNvSpPr/>
+          <p:nvPr/>
+        </p:nvSpPr>
+        <p:spPr>
+          <a:xfrm>
+            <a:off x="4283354" y="4055364"/>
+            <a:ext cx="3624986" cy="2299716"/>
+          </a:xfrm>
+          <a:prstGeom prst="roundRect">
+            <a:avLst>
+              <a:gd name="adj" fmla="val 12000"/>
+            </a:avLst>
+          </a:prstGeom>
+          <a:solidFill>
+            <a:srgbClr val="F2F2F2"/>
+          </a:solidFill>
+          <a:ln>
+            <a:noFill/>
+          </a:ln>
+        </p:spPr>
+        <p:style>
+          <a:lnRef idx="1">
+            <a:schemeClr val="accent1"/>
+          </a:lnRef>
+          <a:fillRef idx="3">
+            <a:schemeClr val="accent1"/>
+          </a:fillRef>
+          <a:effectRef idx="2">
+            <a:schemeClr val="accent1"/>
+          </a:effectRef>
+          <a:fontRef idx="minor">
+            <a:schemeClr val="lt1"/>
+          </a:fontRef>
+        </p:style>
+        <p:txBody>
+          <a:bodyPr rtlCol="0" anchor="ctr"/>
+          <a:lstStyle/>
+          <a:p>
+            <a:pPr algn="ctr"/>
+          </a:p>
+        </p:txBody>
+      </p:sp>
+      <p:sp>
+        <p:nvSpPr>
+          <p:cNvPr id="22" name="Rectangle 21"/>
+          <p:cNvSpPr/>
+          <p:nvPr/>
+        </p:nvSpPr>
+        <p:spPr>
+          <a:xfrm>
+            <a:off x="4283354" y="4055364"/>
+            <a:ext cx="3624986" cy="64008"/>
+          </a:xfrm>
+          <a:prstGeom prst="rect">
+            <a:avLst/>
+          </a:prstGeom>
+          <a:solidFill>
+            <a:srgbClr val="095292"/>
+          </a:solidFill>
+          <a:ln>
+            <a:noFill/>
+          </a:ln>
+        </p:spPr>
+        <p:style>
+          <a:lnRef idx="1">
+            <a:schemeClr val="accent1"/>
+          </a:lnRef>
+          <a:fillRef idx="3">
+            <a:schemeClr val="accent1"/>
+          </a:fillRef>
+          <a:effectRef idx="2">
+            <a:schemeClr val="accent1"/>
+          </a:effectRef>
+          <a:fontRef idx="minor">
+            <a:schemeClr val="lt1"/>
+          </a:fontRef>
+        </p:style>
+        <p:txBody>
+          <a:bodyPr rtlCol="0" anchor="ctr"/>
+          <a:lstStyle/>
+          <a:p>
+            <a:pPr algn="ctr"/>
+          </a:p>
+        </p:txBody>
+      </p:sp>
+      <p:sp>
+        <p:nvSpPr>
+          <p:cNvPr id="23" name="Rectangle 22"/>
+          <p:cNvSpPr/>
+          <p:nvPr/>
+        </p:nvSpPr>
+        <p:spPr>
+          <a:xfrm>
+            <a:off x="4283354" y="4119372"/>
+            <a:ext cx="3624986" cy="27432"/>
+          </a:xfrm>
+          <a:prstGeom prst="rect">
+            <a:avLst/>
+          </a:prstGeom>
+          <a:solidFill>
+            <a:srgbClr val="FFD000"/>
+          </a:solidFill>
+          <a:ln>
+            <a:noFill/>
+          </a:ln>
+        </p:spPr>
+        <p:style>
+          <a:lnRef idx="1">
+            <a:schemeClr val="accent1"/>
+          </a:lnRef>
+          <a:fillRef idx="3">
+            <a:schemeClr val="accent1"/>
+          </a:fillRef>
+          <a:effectRef idx="2">
+            <a:schemeClr val="accent1"/>
+          </a:effectRef>
+          <a:fontRef idx="minor">
+            <a:schemeClr val="lt1"/>
+          </a:fontRef>
+        </p:style>
+        <p:txBody>
+          <a:bodyPr rtlCol="0" anchor="ctr"/>
+          <a:lstStyle/>
+          <a:p>
+            <a:pPr algn="ctr"/>
+          </a:p>
+        </p:txBody>
+      </p:sp>
+      <p:pic>
+        <p:nvPicPr>
+          <p:cNvPr id="24" name="Picture 23" descr="examlab.png"/>
+          <p:cNvPicPr>
+            <a:picLocks noChangeAspect="1"/>
+          </p:cNvPicPr>
+          <p:nvPr/>
+        </p:nvPicPr>
+        <p:blipFill>
+          <a:blip r:embed="rId5"/>
+          <a:stretch>
+            <a:fillRect/>
+          </a:stretch>
+        </p:blipFill>
+        <p:spPr>
+          <a:xfrm>
+            <a:off x="5485485" y="4311396"/>
+            <a:ext cx="1220724" cy="1220724"/>
+          </a:xfrm>
+          <a:prstGeom prst="rect">
+            <a:avLst/>
+          </a:prstGeom>
+        </p:spPr>
+      </p:pic>
+      <p:sp>
+        <p:nvSpPr>
+          <p:cNvPr id="25" name="TextBox 24"/>
+          <p:cNvSpPr txBox="1"/>
+          <p:nvPr/>
+        </p:nvSpPr>
+        <p:spPr>
+          <a:xfrm>
+            <a:off x="4356506" y="5623560"/>
+            <a:ext cx="3478682" cy="621792"/>
+          </a:xfrm>
+          <a:prstGeom prst="rect">
+            <a:avLst/>
+          </a:prstGeom>
+          <a:noFill/>
+        </p:spPr>
+        <p:txBody>
+          <a:bodyPr wrap="square" anchor="t"/>
+          <a:lstStyle/>
+          <a:p>
+            <a:pPr algn="ctr"/>
+            <a:r>
+              <a:rPr sz="1300" b="1" i="0">
+                <a:solidFill>
+                  <a:srgbClr val="095292"/>
+                </a:solidFill>
+                <a:latin typeface="Calibri"/>
+              </a:rPr>
+              <a:t>la plataforma del curso</a:t>
+            </a:r>
+          </a:p>
+          <a:p>
+            <a:pPr algn="ctr">
+              <a:spcBef>
+                <a:spcPts val="200"/>
+              </a:spcBef>
             </a:pPr>
             <a:r>
-              <a:rPr sz="1500" b="0" i="0">
-                <a:solidFill>
-                  <a:srgbClr val="333333"/>
-                </a:solidFill>
-                <a:latin typeface="Calibri"/>
-              </a:rPr>
-              <a:t>–   Bottleneck sospechado: </a:t>
-            </a:r>
-            <a:r>
-              <a:rPr sz="1500" b="1" i="0">
-                <a:solidFill>
-                  <a:srgbClr val="333333"/>
-                </a:solidFill>
-                <a:latin typeface="Calibri"/>
-              </a:rPr>
-              <a:t>consulta a la BD</a:t>
-            </a:r>
-          </a:p>
-          <a:p>
-            <a:pPr>
-              <a:spcAft>
-                <a:spcPts val="800"/>
-              </a:spcAft>
-            </a:pPr>
-            <a:r>
-              <a:rPr sz="1500" b="0" i="0">
-                <a:solidFill>
-                  <a:srgbClr val="333333"/>
-                </a:solidFill>
-                <a:latin typeface="Calibri"/>
-              </a:rPr>
-              <a:t>–   Se puede verificar: pasa o no pasa</a:t>
-            </a:r>
-          </a:p>
-        </p:txBody>
-      </p:sp>
-      <p:sp>
-        <p:nvSpPr>
-          <p:cNvPr id="13" name="TextBox 12"/>
+              <a:rPr sz="1000" b="0" i="0">
+                <a:solidFill>
+                  <a:srgbClr val="666666"/>
+                </a:solidFill>
+                <a:latin typeface="Calibri"/>
+              </a:rPr>
+              <a:t>Donde se entrega</a:t>
+            </a:r>
+          </a:p>
+        </p:txBody>
+      </p:sp>
+      <p:sp>
+        <p:nvSpPr>
+          <p:cNvPr id="26" name="TextBox 25"/>
           <p:cNvSpPr txBox="1"/>
           <p:nvPr/>
         </p:nvSpPr>
@@ -7961,7 +8093,7 @@
                 </a:solidFill>
                 <a:latin typeface="Calibri"/>
               </a:rPr>
-              <a:t>Herramientas de hoy</a:t>
+              <a:t>Del boceto a la plataforma del curso (diagrama)</a:t>
             </a:r>
           </a:p>
         </p:txBody>
@@ -7995,7 +8127,7 @@
                 </a:solidFill>
                 <a:latin typeface="Calibri"/>
               </a:rPr>
-              <a:t>Gratis · navegador o free tier · sin cuenta de pago</a:t>
+              <a:t>El diagrama se entrega como código Mermaid dentro de la plataforma del curso, no como imagen</a:t>
             </a:r>
           </a:p>
         </p:txBody>
@@ -8008,8 +8140,8 @@
         </p:nvSpPr>
         <p:spPr>
           <a:xfrm>
-            <a:off x="457200" y="1591056"/>
-            <a:ext cx="3624986" cy="2299716"/>
+            <a:off x="457200" y="1659636"/>
+            <a:ext cx="11277295" cy="1051560"/>
           </a:xfrm>
           <a:prstGeom prst="roundRect">
             <a:avLst>
@@ -8047,17 +8179,19 @@
       </p:sp>
       <p:sp>
         <p:nvSpPr>
-          <p:cNvPr id="7" name="Rectangle 6"/>
+          <p:cNvPr id="7" name="Rounded Rectangle 6"/>
           <p:cNvSpPr/>
           <p:nvPr/>
         </p:nvSpPr>
         <p:spPr>
           <a:xfrm>
-            <a:off x="457200" y="1591056"/>
-            <a:ext cx="3624986" cy="64008"/>
-          </a:xfrm>
-          <a:prstGeom prst="rect">
-            <a:avLst/>
+            <a:off x="594360" y="1965960"/>
+            <a:ext cx="438912" cy="438912"/>
+          </a:xfrm>
+          <a:prstGeom prst="roundRect">
+            <a:avLst>
+              <a:gd name="adj" fmla="val 12000"/>
+            </a:avLst>
           </a:prstGeom>
           <a:solidFill>
             <a:srgbClr val="095292"/>
@@ -8090,20 +8224,103 @@
       </p:sp>
       <p:sp>
         <p:nvSpPr>
-          <p:cNvPr id="8" name="Rectangle 7"/>
+          <p:cNvPr id="8" name="TextBox 7"/>
+          <p:cNvSpPr txBox="1"/>
+          <p:nvPr/>
+        </p:nvSpPr>
+        <p:spPr>
+          <a:xfrm>
+            <a:off x="594360" y="1965960"/>
+            <a:ext cx="438912" cy="438912"/>
+          </a:xfrm>
+          <a:prstGeom prst="rect">
+            <a:avLst/>
+          </a:prstGeom>
+          <a:noFill/>
+        </p:spPr>
+        <p:txBody>
+          <a:bodyPr wrap="square" anchor="ctr"/>
+          <a:lstStyle/>
+          <a:p>
+            <a:pPr algn="ctr"/>
+            <a:r>
+              <a:rPr sz="1600" b="1" i="0">
+                <a:solidFill>
+                  <a:srgbClr val="FFFFFF"/>
+                </a:solidFill>
+                <a:latin typeface="Calibri"/>
+              </a:rPr>
+              <a:t>1</a:t>
+            </a:r>
+          </a:p>
+        </p:txBody>
+      </p:sp>
+      <p:sp>
+        <p:nvSpPr>
+          <p:cNvPr id="9" name="TextBox 8"/>
+          <p:cNvSpPr txBox="1"/>
+          <p:nvPr/>
+        </p:nvSpPr>
+        <p:spPr>
+          <a:xfrm>
+            <a:off x="1188720" y="1751076"/>
+            <a:ext cx="10271455" cy="886968"/>
+          </a:xfrm>
+          <a:prstGeom prst="rect">
+            <a:avLst/>
+          </a:prstGeom>
+          <a:noFill/>
+        </p:spPr>
+        <p:txBody>
+          <a:bodyPr wrap="square" anchor="ctr"/>
+          <a:lstStyle/>
+          <a:p>
+            <a:r>
+              <a:rPr sz="1500" b="1" i="0">
+                <a:solidFill>
+                  <a:srgbClr val="095292"/>
+                </a:solidFill>
+                <a:latin typeface="Calibri"/>
+              </a:rPr>
+              <a:t>Disena visual</a:t>
+            </a:r>
+          </a:p>
+          <a:p>
+            <a:pPr>
+              <a:spcBef>
+                <a:spcPts val="200"/>
+              </a:spcBef>
+            </a:pPr>
+            <a:r>
+              <a:rPr sz="1300" b="0" i="0">
+                <a:solidFill>
+                  <a:srgbClr val="333333"/>
+                </a:solidFill>
+                <a:latin typeface="Calibri"/>
+              </a:rPr>
+              <a:t>Dibuja el diagrama como quieras en Excalidraw o draw.io: es mas rapido arrastrar cajas que escribir codigo, y ahi es donde piensas el modelo.</a:t>
+            </a:r>
+          </a:p>
+        </p:txBody>
+      </p:sp>
+      <p:sp>
+        <p:nvSpPr>
+          <p:cNvPr id="10" name="Rounded Rectangle 9"/>
           <p:cNvSpPr/>
           <p:nvPr/>
         </p:nvSpPr>
         <p:spPr>
           <a:xfrm>
-            <a:off x="457200" y="1655064"/>
-            <a:ext cx="3624986" cy="27432"/>
-          </a:xfrm>
-          <a:prstGeom prst="rect">
-            <a:avLst/>
+            <a:off x="457200" y="2802636"/>
+            <a:ext cx="11277295" cy="1051560"/>
+          </a:xfrm>
+          <a:prstGeom prst="roundRect">
+            <a:avLst>
+              <a:gd name="adj" fmla="val 12000"/>
+            </a:avLst>
           </a:prstGeom>
           <a:solidFill>
-            <a:srgbClr val="FFD000"/>
+            <a:srgbClr val="E8F4FA"/>
           </a:solidFill>
           <a:ln>
             <a:noFill/>
@@ -8131,40 +8348,61 @@
           </a:p>
         </p:txBody>
       </p:sp>
-      <p:pic>
-        <p:nvPicPr>
-          <p:cNvPr id="9" name="Picture 8" descr="google_docs.png"/>
-          <p:cNvPicPr>
-            <a:picLocks noChangeAspect="1"/>
-          </p:cNvPicPr>
-          <p:nvPr/>
-        </p:nvPicPr>
-        <p:blipFill>
-          <a:blip r:embed="rId2"/>
-          <a:stretch>
-            <a:fillRect/>
-          </a:stretch>
-        </p:blipFill>
-        <p:spPr>
-          <a:xfrm>
-            <a:off x="1659331" y="1847087"/>
-            <a:ext cx="1220724" cy="1220724"/>
-          </a:xfrm>
-          <a:prstGeom prst="rect">
-            <a:avLst/>
-          </a:prstGeom>
-        </p:spPr>
-      </p:pic>
-      <p:sp>
-        <p:nvSpPr>
-          <p:cNvPr id="10" name="TextBox 9"/>
+      <p:sp>
+        <p:nvSpPr>
+          <p:cNvPr id="11" name="Rounded Rectangle 10"/>
+          <p:cNvSpPr/>
+          <p:nvPr/>
+        </p:nvSpPr>
+        <p:spPr>
+          <a:xfrm>
+            <a:off x="594360" y="3108960"/>
+            <a:ext cx="438912" cy="438912"/>
+          </a:xfrm>
+          <a:prstGeom prst="roundRect">
+            <a:avLst>
+              <a:gd name="adj" fmla="val 12000"/>
+            </a:avLst>
+          </a:prstGeom>
+          <a:solidFill>
+            <a:srgbClr val="095292"/>
+          </a:solidFill>
+          <a:ln>
+            <a:noFill/>
+          </a:ln>
+        </p:spPr>
+        <p:style>
+          <a:lnRef idx="1">
+            <a:schemeClr val="accent1"/>
+          </a:lnRef>
+          <a:fillRef idx="3">
+            <a:schemeClr val="accent1"/>
+          </a:fillRef>
+          <a:effectRef idx="2">
+            <a:schemeClr val="accent1"/>
+          </a:effectRef>
+          <a:fontRef idx="minor">
+            <a:schemeClr val="lt1"/>
+          </a:fontRef>
+        </p:style>
+        <p:txBody>
+          <a:bodyPr rtlCol="0" anchor="ctr"/>
+          <a:lstStyle/>
+          <a:p>
+            <a:pPr algn="ctr"/>
+          </a:p>
+        </p:txBody>
+      </p:sp>
+      <p:sp>
+        <p:nvSpPr>
+          <p:cNvPr id="12" name="TextBox 11"/>
           <p:cNvSpPr txBox="1"/>
           <p:nvPr/>
         </p:nvSpPr>
         <p:spPr>
           <a:xfrm>
-            <a:off x="530352" y="3159251"/>
-            <a:ext cx="3478682" cy="621792"/>
+            <a:off x="594360" y="3108960"/>
+            <a:ext cx="438912" cy="438912"/>
           </a:xfrm>
           <a:prstGeom prst="rect">
             <a:avLst/>
@@ -8172,48 +8410,80 @@
           <a:noFill/>
         </p:spPr>
         <p:txBody>
-          <a:bodyPr wrap="square" anchor="t"/>
+          <a:bodyPr wrap="square" anchor="ctr"/>
           <a:lstStyle/>
           <a:p>
             <a:pPr algn="ctr"/>
             <a:r>
-              <a:rPr sz="1300" b="1" i="0">
+              <a:rPr sz="1600" b="1" i="0">
+                <a:solidFill>
+                  <a:srgbClr val="FFFFFF"/>
+                </a:solidFill>
+                <a:latin typeface="Calibri"/>
+              </a:rPr>
+              <a:t>2</a:t>
+            </a:r>
+          </a:p>
+        </p:txBody>
+      </p:sp>
+      <p:sp>
+        <p:nvSpPr>
+          <p:cNvPr id="13" name="TextBox 12"/>
+          <p:cNvSpPr txBox="1"/>
+          <p:nvPr/>
+        </p:nvSpPr>
+        <p:spPr>
+          <a:xfrm>
+            <a:off x="1188720" y="2894076"/>
+            <a:ext cx="10271455" cy="886968"/>
+          </a:xfrm>
+          <a:prstGeom prst="rect">
+            <a:avLst/>
+          </a:prstGeom>
+          <a:noFill/>
+        </p:spPr>
+        <p:txBody>
+          <a:bodyPr wrap="square" anchor="ctr"/>
+          <a:lstStyle/>
+          <a:p>
+            <a:r>
+              <a:rPr sz="1500" b="1" i="0">
                 <a:solidFill>
                   <a:srgbClr val="095292"/>
                 </a:solidFill>
                 <a:latin typeface="Calibri"/>
               </a:rPr>
-              <a:t>Google Docs</a:t>
-            </a:r>
-          </a:p>
-          <a:p>
-            <a:pPr algn="ctr">
+              <a:t>Traduce con IA</a:t>
+            </a:r>
+          </a:p>
+          <a:p>
+            <a:pPr>
               <a:spcBef>
                 <a:spcPts val="200"/>
               </a:spcBef>
             </a:pPr>
             <a:r>
-              <a:rPr sz="1000" b="0" i="0">
-                <a:solidFill>
-                  <a:srgbClr val="666666"/>
-                </a:solidFill>
-                <a:latin typeface="Calibri"/>
-              </a:rPr>
-              <a:t>Objetivo de rendimiento</a:t>
-            </a:r>
-          </a:p>
-        </p:txBody>
-      </p:sp>
-      <p:sp>
-        <p:nvSpPr>
-          <p:cNvPr id="11" name="Rounded Rectangle 10"/>
+              <a:rPr sz="1300" b="0" i="0">
+                <a:solidFill>
+                  <a:srgbClr val="333333"/>
+                </a:solidFill>
+                <a:latin typeface="Calibri"/>
+              </a:rPr>
+              <a:t>Copia o describe tu boceto a una IA y pidele el codigo Mermaid: «convierte este diagrama a Mermaid usando sequenceDiagram». Revisa el resultado: la IA acierta la sintaxis, no tu modelo.</a:t>
+            </a:r>
+          </a:p>
+        </p:txBody>
+      </p:sp>
+      <p:sp>
+        <p:nvSpPr>
+          <p:cNvPr id="14" name="Rounded Rectangle 13"/>
           <p:cNvSpPr/>
           <p:nvPr/>
         </p:nvSpPr>
         <p:spPr>
           <a:xfrm>
-            <a:off x="4283354" y="1591056"/>
-            <a:ext cx="3624986" cy="2299716"/>
+            <a:off x="457200" y="3945636"/>
+            <a:ext cx="11277295" cy="1051560"/>
           </a:xfrm>
           <a:prstGeom prst="roundRect">
             <a:avLst>
@@ -8251,17 +8521,19 @@
       </p:sp>
       <p:sp>
         <p:nvSpPr>
-          <p:cNvPr id="12" name="Rectangle 11"/>
+          <p:cNvPr id="15" name="Rounded Rectangle 14"/>
           <p:cNvSpPr/>
           <p:nvPr/>
         </p:nvSpPr>
         <p:spPr>
           <a:xfrm>
-            <a:off x="4283354" y="1591056"/>
-            <a:ext cx="3624986" cy="64008"/>
-          </a:xfrm>
-          <a:prstGeom prst="rect">
-            <a:avLst/>
+            <a:off x="594360" y="4251960"/>
+            <a:ext cx="438912" cy="438912"/>
+          </a:xfrm>
+          <a:prstGeom prst="roundRect">
+            <a:avLst>
+              <a:gd name="adj" fmla="val 12000"/>
+            </a:avLst>
           </a:prstGeom>
           <a:solidFill>
             <a:srgbClr val="095292"/>
@@ -8294,20 +8566,103 @@
       </p:sp>
       <p:sp>
         <p:nvSpPr>
-          <p:cNvPr id="13" name="Rectangle 12"/>
+          <p:cNvPr id="16" name="TextBox 15"/>
+          <p:cNvSpPr txBox="1"/>
+          <p:nvPr/>
+        </p:nvSpPr>
+        <p:spPr>
+          <a:xfrm>
+            <a:off x="594360" y="4251960"/>
+            <a:ext cx="438912" cy="438912"/>
+          </a:xfrm>
+          <a:prstGeom prst="rect">
+            <a:avLst/>
+          </a:prstGeom>
+          <a:noFill/>
+        </p:spPr>
+        <p:txBody>
+          <a:bodyPr wrap="square" anchor="ctr"/>
+          <a:lstStyle/>
+          <a:p>
+            <a:pPr algn="ctr"/>
+            <a:r>
+              <a:rPr sz="1600" b="1" i="0">
+                <a:solidFill>
+                  <a:srgbClr val="FFFFFF"/>
+                </a:solidFill>
+                <a:latin typeface="Calibri"/>
+              </a:rPr>
+              <a:t>3</a:t>
+            </a:r>
+          </a:p>
+        </p:txBody>
+      </p:sp>
+      <p:sp>
+        <p:nvSpPr>
+          <p:cNvPr id="17" name="TextBox 16"/>
+          <p:cNvSpPr txBox="1"/>
+          <p:nvPr/>
+        </p:nvSpPr>
+        <p:spPr>
+          <a:xfrm>
+            <a:off x="1188720" y="4037076"/>
+            <a:ext cx="10271455" cy="886968"/>
+          </a:xfrm>
+          <a:prstGeom prst="rect">
+            <a:avLst/>
+          </a:prstGeom>
+          <a:noFill/>
+        </p:spPr>
+        <p:txBody>
+          <a:bodyPr wrap="square" anchor="ctr"/>
+          <a:lstStyle/>
+          <a:p>
+            <a:r>
+              <a:rPr sz="1500" b="1" i="0">
+                <a:solidFill>
+                  <a:srgbClr val="095292"/>
+                </a:solidFill>
+                <a:latin typeface="Calibri"/>
+              </a:rPr>
+              <a:t>Pega y renderiza en la plataforma del curso</a:t>
+            </a:r>
+          </a:p>
+          <a:p>
+            <a:pPr>
+              <a:spcBef>
+                <a:spcPts val="200"/>
+              </a:spcBef>
+            </a:pPr>
+            <a:r>
+              <a:rPr sz="1300" b="0" i="0">
+                <a:solidFill>
+                  <a:srgbClr val="333333"/>
+                </a:solidFill>
+                <a:latin typeface="Calibri"/>
+              </a:rPr>
+              <a:t>Pega ese codigo en la caja de texto de la pregunta y mira como lo dibuja la plataforma. Si no renderiza, corrige ahi mismo: lo que se califica es el diagrama renderizado dentro de la plataforma del curso.</a:t>
+            </a:r>
+          </a:p>
+        </p:txBody>
+      </p:sp>
+      <p:sp>
+        <p:nvSpPr>
+          <p:cNvPr id="18" name="Rounded Rectangle 17"/>
           <p:cNvSpPr/>
           <p:nvPr/>
         </p:nvSpPr>
         <p:spPr>
           <a:xfrm>
-            <a:off x="4283354" y="1655064"/>
-            <a:ext cx="3624986" cy="27432"/>
-          </a:xfrm>
-          <a:prstGeom prst="rect">
-            <a:avLst/>
+            <a:off x="457200" y="5088636"/>
+            <a:ext cx="11277295" cy="1051560"/>
+          </a:xfrm>
+          <a:prstGeom prst="roundRect">
+            <a:avLst>
+              <a:gd name="adj" fmla="val 12000"/>
+            </a:avLst>
           </a:prstGeom>
           <a:solidFill>
-            <a:srgbClr val="FFD000"/>
+            <a:srgbClr val="E8F4FA"/>
           </a:solidFill>
           <a:ln>
             <a:noFill/>
@@ -8335,137 +8690,21 @@
           </a:p>
         </p:txBody>
       </p:sp>
-      <p:pic>
-        <p:nvPicPr>
-          <p:cNvPr id="14" name="Picture 13" descr="drawio.png"/>
-          <p:cNvPicPr>
-            <a:picLocks noChangeAspect="1"/>
-          </p:cNvPicPr>
-          <p:nvPr/>
-        </p:nvPicPr>
-        <p:blipFill>
-          <a:blip r:embed="rId3"/>
-          <a:stretch>
-            <a:fillRect/>
-          </a:stretch>
-        </p:blipFill>
-        <p:spPr>
-          <a:xfrm>
-            <a:off x="5485485" y="1847087"/>
-            <a:ext cx="1220724" cy="1220724"/>
-          </a:xfrm>
-          <a:prstGeom prst="rect">
-            <a:avLst/>
-          </a:prstGeom>
-        </p:spPr>
-      </p:pic>
-      <p:sp>
-        <p:nvSpPr>
-          <p:cNvPr id="15" name="TextBox 14"/>
-          <p:cNvSpPr txBox="1"/>
-          <p:nvPr/>
-        </p:nvSpPr>
-        <p:spPr>
-          <a:xfrm>
-            <a:off x="4356506" y="3159251"/>
-            <a:ext cx="3478682" cy="621792"/>
-          </a:xfrm>
-          <a:prstGeom prst="rect">
-            <a:avLst/>
-          </a:prstGeom>
-          <a:noFill/>
-        </p:spPr>
-        <p:txBody>
-          <a:bodyPr wrap="square" anchor="t"/>
-          <a:lstStyle/>
-          <a:p>
-            <a:pPr algn="ctr"/>
-            <a:r>
-              <a:rPr sz="1300" b="1" i="0">
-                <a:solidFill>
-                  <a:srgbClr val="095292"/>
-                </a:solidFill>
-                <a:latin typeface="Calibri"/>
-              </a:rPr>
-              <a:t>draw.io</a:t>
-            </a:r>
-          </a:p>
-          <a:p>
-            <a:pPr algn="ctr">
-              <a:spcBef>
-                <a:spcPts val="200"/>
-              </a:spcBef>
-            </a:pPr>
-            <a:r>
-              <a:rPr sz="1000" b="0" i="0">
-                <a:solidFill>
-                  <a:srgbClr val="666666"/>
-                </a:solidFill>
-                <a:latin typeface="Calibri"/>
-              </a:rPr>
-              <a:t>Bottleneck</a:t>
-            </a:r>
-          </a:p>
-        </p:txBody>
-      </p:sp>
-      <p:sp>
-        <p:nvSpPr>
-          <p:cNvPr id="16" name="Rounded Rectangle 15"/>
+      <p:sp>
+        <p:nvSpPr>
+          <p:cNvPr id="19" name="Rounded Rectangle 18"/>
           <p:cNvSpPr/>
           <p:nvPr/>
         </p:nvSpPr>
         <p:spPr>
           <a:xfrm>
-            <a:off x="8109508" y="1591056"/>
-            <a:ext cx="3624986" cy="2299716"/>
+            <a:off x="594360" y="5394960"/>
+            <a:ext cx="438912" cy="438912"/>
           </a:xfrm>
           <a:prstGeom prst="roundRect">
             <a:avLst>
               <a:gd name="adj" fmla="val 12000"/>
             </a:avLst>
-          </a:prstGeom>
-          <a:solidFill>
-            <a:srgbClr val="F2F2F2"/>
-          </a:solidFill>
-          <a:ln>
-            <a:noFill/>
-          </a:ln>
-        </p:spPr>
-        <p:style>
-          <a:lnRef idx="1">
-            <a:schemeClr val="accent1"/>
-          </a:lnRef>
-          <a:fillRef idx="3">
-            <a:schemeClr val="accent1"/>
-          </a:fillRef>
-          <a:effectRef idx="2">
-            <a:schemeClr val="accent1"/>
-          </a:effectRef>
-          <a:fontRef idx="minor">
-            <a:schemeClr val="lt1"/>
-          </a:fontRef>
-        </p:style>
-        <p:txBody>
-          <a:bodyPr rtlCol="0" anchor="ctr"/>
-          <a:lstStyle/>
-          <a:p>
-            <a:pPr algn="ctr"/>
-          </a:p>
-        </p:txBody>
-      </p:sp>
-      <p:sp>
-        <p:nvSpPr>
-          <p:cNvPr id="17" name="Rectangle 16"/>
-          <p:cNvSpPr/>
-          <p:nvPr/>
-        </p:nvSpPr>
-        <p:spPr>
-          <a:xfrm>
-            <a:off x="8109508" y="1591056"/>
-            <a:ext cx="3624986" cy="64008"/>
-          </a:xfrm>
-          <a:prstGeom prst="rect">
-            <a:avLst/>
           </a:prstGeom>
           <a:solidFill>
             <a:srgbClr val="095292"/>
@@ -8498,81 +8737,14 @@
       </p:sp>
       <p:sp>
         <p:nvSpPr>
-          <p:cNvPr id="18" name="Rectangle 17"/>
-          <p:cNvSpPr/>
-          <p:nvPr/>
-        </p:nvSpPr>
-        <p:spPr>
-          <a:xfrm>
-            <a:off x="8109508" y="1655064"/>
-            <a:ext cx="3624986" cy="27432"/>
-          </a:xfrm>
-          <a:prstGeom prst="rect">
-            <a:avLst/>
-          </a:prstGeom>
-          <a:solidFill>
-            <a:srgbClr val="FFD000"/>
-          </a:solidFill>
-          <a:ln>
-            <a:noFill/>
-          </a:ln>
-        </p:spPr>
-        <p:style>
-          <a:lnRef idx="1">
-            <a:schemeClr val="accent1"/>
-          </a:lnRef>
-          <a:fillRef idx="3">
-            <a:schemeClr val="accent1"/>
-          </a:fillRef>
-          <a:effectRef idx="2">
-            <a:schemeClr val="accent1"/>
-          </a:effectRef>
-          <a:fontRef idx="minor">
-            <a:schemeClr val="lt1"/>
-          </a:fontRef>
-        </p:style>
-        <p:txBody>
-          <a:bodyPr rtlCol="0" anchor="ctr"/>
-          <a:lstStyle/>
-          <a:p>
-            <a:pPr algn="ctr"/>
-          </a:p>
-        </p:txBody>
-      </p:sp>
-      <p:pic>
-        <p:nvPicPr>
-          <p:cNvPr id="19" name="Picture 18" descr="mermaid.png"/>
-          <p:cNvPicPr>
-            <a:picLocks noChangeAspect="1"/>
-          </p:cNvPicPr>
-          <p:nvPr/>
-        </p:nvPicPr>
-        <p:blipFill>
-          <a:blip r:embed="rId4"/>
-          <a:stretch>
-            <a:fillRect/>
-          </a:stretch>
-        </p:blipFill>
-        <p:spPr>
-          <a:xfrm>
-            <a:off x="9311640" y="1847087"/>
-            <a:ext cx="1220724" cy="1220724"/>
-          </a:xfrm>
-          <a:prstGeom prst="rect">
-            <a:avLst/>
-          </a:prstGeom>
-        </p:spPr>
-      </p:pic>
-      <p:sp>
-        <p:nvSpPr>
           <p:cNvPr id="20" name="TextBox 19"/>
           <p:cNvSpPr txBox="1"/>
           <p:nvPr/>
         </p:nvSpPr>
         <p:spPr>
           <a:xfrm>
-            <a:off x="8182660" y="3159251"/>
-            <a:ext cx="3478682" cy="621792"/>
+            <a:off x="594360" y="5394960"/>
+            <a:ext cx="438912" cy="438912"/>
           </a:xfrm>
           <a:prstGeom prst="rect">
             <a:avLst/>
@@ -8580,245 +8752,73 @@
           <a:noFill/>
         </p:spPr>
         <p:txBody>
-          <a:bodyPr wrap="square" anchor="t"/>
+          <a:bodyPr wrap="square" anchor="ctr"/>
           <a:lstStyle/>
           <a:p>
             <a:pPr algn="ctr"/>
             <a:r>
-              <a:rPr sz="1300" b="1" i="0">
+              <a:rPr sz="1600" b="1" i="0">
+                <a:solidFill>
+                  <a:srgbClr val="FFFFFF"/>
+                </a:solidFill>
+                <a:latin typeface="Calibri"/>
+              </a:rPr>
+              <a:t>4</a:t>
+            </a:r>
+          </a:p>
+        </p:txBody>
+      </p:sp>
+      <p:sp>
+        <p:nvSpPr>
+          <p:cNvPr id="21" name="TextBox 20"/>
+          <p:cNvSpPr txBox="1"/>
+          <p:nvPr/>
+        </p:nvSpPr>
+        <p:spPr>
+          <a:xfrm>
+            <a:off x="1188720" y="5180076"/>
+            <a:ext cx="10271455" cy="886968"/>
+          </a:xfrm>
+          <a:prstGeom prst="rect">
+            <a:avLst/>
+          </a:prstGeom>
+          <a:noFill/>
+        </p:spPr>
+        <p:txBody>
+          <a:bodyPr wrap="square" anchor="ctr"/>
+          <a:lstStyle/>
+          <a:p>
+            <a:r>
+              <a:rPr sz="1500" b="1" i="0">
                 <a:solidFill>
                   <a:srgbClr val="095292"/>
                 </a:solidFill>
                 <a:latin typeface="Calibri"/>
               </a:rPr>
-              <a:t>Mermaid</a:t>
-            </a:r>
-          </a:p>
-          <a:p>
-            <a:pPr algn="ctr">
+              <a:t>Guarda el PNG para tu PI</a:t>
+            </a:r>
+          </a:p>
+          <a:p>
+            <a:pPr>
               <a:spcBef>
                 <a:spcPts val="200"/>
               </a:spcBef>
             </a:pPr>
             <a:r>
-              <a:rPr sz="1000" b="0" i="0">
-                <a:solidFill>
-                  <a:srgbClr val="666666"/>
-                </a:solidFill>
-                <a:latin typeface="Calibri"/>
-              </a:rPr>
-              <a:t>Codigo del diagrama</a:t>
-            </a:r>
-          </a:p>
-        </p:txBody>
-      </p:sp>
-      <p:sp>
-        <p:nvSpPr>
-          <p:cNvPr id="21" name="Rounded Rectangle 20"/>
-          <p:cNvSpPr/>
-          <p:nvPr/>
-        </p:nvSpPr>
-        <p:spPr>
-          <a:xfrm>
-            <a:off x="4283354" y="4055364"/>
-            <a:ext cx="3624986" cy="2299716"/>
-          </a:xfrm>
-          <a:prstGeom prst="roundRect">
-            <a:avLst>
-              <a:gd name="adj" fmla="val 12000"/>
-            </a:avLst>
-          </a:prstGeom>
-          <a:solidFill>
-            <a:srgbClr val="F2F2F2"/>
-          </a:solidFill>
-          <a:ln>
-            <a:noFill/>
-          </a:ln>
-        </p:spPr>
-        <p:style>
-          <a:lnRef idx="1">
-            <a:schemeClr val="accent1"/>
-          </a:lnRef>
-          <a:fillRef idx="3">
-            <a:schemeClr val="accent1"/>
-          </a:fillRef>
-          <a:effectRef idx="2">
-            <a:schemeClr val="accent1"/>
-          </a:effectRef>
-          <a:fontRef idx="minor">
-            <a:schemeClr val="lt1"/>
-          </a:fontRef>
-        </p:style>
-        <p:txBody>
-          <a:bodyPr rtlCol="0" anchor="ctr"/>
-          <a:lstStyle/>
-          <a:p>
-            <a:pPr algn="ctr"/>
-          </a:p>
-        </p:txBody>
-      </p:sp>
-      <p:sp>
-        <p:nvSpPr>
-          <p:cNvPr id="22" name="Rectangle 21"/>
-          <p:cNvSpPr/>
-          <p:nvPr/>
-        </p:nvSpPr>
-        <p:spPr>
-          <a:xfrm>
-            <a:off x="4283354" y="4055364"/>
-            <a:ext cx="3624986" cy="64008"/>
-          </a:xfrm>
-          <a:prstGeom prst="rect">
-            <a:avLst/>
-          </a:prstGeom>
-          <a:solidFill>
-            <a:srgbClr val="095292"/>
-          </a:solidFill>
-          <a:ln>
-            <a:noFill/>
-          </a:ln>
-        </p:spPr>
-        <p:style>
-          <a:lnRef idx="1">
-            <a:schemeClr val="accent1"/>
-          </a:lnRef>
-          <a:fillRef idx="3">
-            <a:schemeClr val="accent1"/>
-          </a:fillRef>
-          <a:effectRef idx="2">
-            <a:schemeClr val="accent1"/>
-          </a:effectRef>
-          <a:fontRef idx="minor">
-            <a:schemeClr val="lt1"/>
-          </a:fontRef>
-        </p:style>
-        <p:txBody>
-          <a:bodyPr rtlCol="0" anchor="ctr"/>
-          <a:lstStyle/>
-          <a:p>
-            <a:pPr algn="ctr"/>
-          </a:p>
-        </p:txBody>
-      </p:sp>
-      <p:sp>
-        <p:nvSpPr>
-          <p:cNvPr id="23" name="Rectangle 22"/>
-          <p:cNvSpPr/>
-          <p:nvPr/>
-        </p:nvSpPr>
-        <p:spPr>
-          <a:xfrm>
-            <a:off x="4283354" y="4119372"/>
-            <a:ext cx="3624986" cy="27432"/>
-          </a:xfrm>
-          <a:prstGeom prst="rect">
-            <a:avLst/>
-          </a:prstGeom>
-          <a:solidFill>
-            <a:srgbClr val="FFD000"/>
-          </a:solidFill>
-          <a:ln>
-            <a:noFill/>
-          </a:ln>
-        </p:spPr>
-        <p:style>
-          <a:lnRef idx="1">
-            <a:schemeClr val="accent1"/>
-          </a:lnRef>
-          <a:fillRef idx="3">
-            <a:schemeClr val="accent1"/>
-          </a:fillRef>
-          <a:effectRef idx="2">
-            <a:schemeClr val="accent1"/>
-          </a:effectRef>
-          <a:fontRef idx="minor">
-            <a:schemeClr val="lt1"/>
-          </a:fontRef>
-        </p:style>
-        <p:txBody>
-          <a:bodyPr rtlCol="0" anchor="ctr"/>
-          <a:lstStyle/>
-          <a:p>
-            <a:pPr algn="ctr"/>
-          </a:p>
-        </p:txBody>
-      </p:sp>
-      <p:pic>
-        <p:nvPicPr>
-          <p:cNvPr id="24" name="Picture 23" descr="examlab.png"/>
-          <p:cNvPicPr>
-            <a:picLocks noChangeAspect="1"/>
-          </p:cNvPicPr>
-          <p:nvPr/>
-        </p:nvPicPr>
-        <p:blipFill>
-          <a:blip r:embed="rId5"/>
-          <a:stretch>
-            <a:fillRect/>
-          </a:stretch>
-        </p:blipFill>
-        <p:spPr>
-          <a:xfrm>
-            <a:off x="5485485" y="4311396"/>
-            <a:ext cx="1220724" cy="1220724"/>
-          </a:xfrm>
-          <a:prstGeom prst="rect">
-            <a:avLst/>
-          </a:prstGeom>
-        </p:spPr>
-      </p:pic>
-      <p:sp>
-        <p:nvSpPr>
-          <p:cNvPr id="25" name="TextBox 24"/>
-          <p:cNvSpPr txBox="1"/>
-          <p:nvPr/>
-        </p:nvSpPr>
-        <p:spPr>
-          <a:xfrm>
-            <a:off x="4356506" y="5623560"/>
-            <a:ext cx="3478682" cy="621792"/>
-          </a:xfrm>
-          <a:prstGeom prst="rect">
-            <a:avLst/>
-          </a:prstGeom>
-          <a:noFill/>
-        </p:spPr>
-        <p:txBody>
-          <a:bodyPr wrap="square" anchor="t"/>
-          <a:lstStyle/>
-          <a:p>
-            <a:pPr algn="ctr"/>
-            <a:r>
-              <a:rPr sz="1300" b="1" i="0">
-                <a:solidFill>
-                  <a:srgbClr val="095292"/>
-                </a:solidFill>
-                <a:latin typeface="Calibri"/>
-              </a:rPr>
-              <a:t>la plataforma del curso</a:t>
-            </a:r>
-          </a:p>
-          <a:p>
-            <a:pPr algn="ctr">
-              <a:spcBef>
-                <a:spcPts val="200"/>
-              </a:spcBef>
-            </a:pPr>
-            <a:r>
-              <a:rPr sz="1000" b="0" i="0">
-                <a:solidFill>
-                  <a:srgbClr val="666666"/>
-                </a:solidFill>
-                <a:latin typeface="Calibri"/>
-              </a:rPr>
-              <a:t>Donde se entrega</a:t>
-            </a:r>
-          </a:p>
-        </p:txBody>
-      </p:sp>
-      <p:sp>
-        <p:nvSpPr>
-          <p:cNvPr id="26" name="TextBox 25"/>
+              <a:rPr sz="1300" b="0" i="0">
+                <a:solidFill>
+                  <a:srgbClr val="333333"/>
+                </a:solidFill>
+                <a:latin typeface="Calibri"/>
+              </a:rPr>
+              <a:t>Exporta tambien la imagen a la carpeta de tu Proyecto Integrador. Esa copia es para tu informe; no reemplaza la respuesta en la plataforma.</a:t>
+            </a:r>
+          </a:p>
+        </p:txBody>
+      </p:sp>
+      <p:sp>
+        <p:nvSpPr>
+          <p:cNvPr id="22" name="TextBox 21"/>
           <p:cNvSpPr txBox="1"/>
           <p:nvPr/>
         </p:nvSpPr>
